--- a/docs/presentation/slides.pptx
+++ b/docs/presentation/slides.pptx
@@ -2,20 +2,20 @@
 <file path=ppt/presentation.xml><?xml version="1.0" encoding="utf-8"?>
 <p:presentation xmlns:p="http://schemas.openxmlformats.org/presentationml/2006/main">
   <p:sldMasterIdLst>
-    <p:sldMasterId xmlns:r="http://schemas.openxmlformats.org/officeDocument/2006/relationships" id="2147483648" r:id="Ra049b71ac8234833"/>
+    <p:sldMasterId xmlns:r="http://schemas.openxmlformats.org/officeDocument/2006/relationships" id="2147483648" r:id="Rc87b1890d60c419c"/>
   </p:sldMasterIdLst>
   <p:notesMasterIdLst>
-    <p:notesMasterId xmlns:r="http://schemas.openxmlformats.org/officeDocument/2006/relationships" r:id="R4e4d8c8b181044a6"/>
+    <p:notesMasterId xmlns:r="http://schemas.openxmlformats.org/officeDocument/2006/relationships" r:id="Rded0b0e0d7084e07"/>
   </p:notesMasterIdLst>
   <p:sldIdLst>
-    <p:sldId xmlns:r="http://schemas.openxmlformats.org/officeDocument/2006/relationships" id="256" r:id="Rdd45375647e54fcc"/>
-    <p:sldId xmlns:r="http://schemas.openxmlformats.org/officeDocument/2006/relationships" id="257" r:id="Re126dcb4010d4aeb"/>
-    <p:sldId xmlns:r="http://schemas.openxmlformats.org/officeDocument/2006/relationships" id="258" r:id="Rd1f30e7e4fd14a53"/>
-    <p:sldId xmlns:r="http://schemas.openxmlformats.org/officeDocument/2006/relationships" id="259" r:id="R14e8cce976b04c08"/>
-    <p:sldId xmlns:r="http://schemas.openxmlformats.org/officeDocument/2006/relationships" id="260" r:id="R80e3a260e9464482"/>
-    <p:sldId xmlns:r="http://schemas.openxmlformats.org/officeDocument/2006/relationships" id="261" r:id="R4a95e75210a24e7c"/>
-    <p:sldId xmlns:r="http://schemas.openxmlformats.org/officeDocument/2006/relationships" id="262" r:id="R7f9139bccca14f74"/>
-    <p:sldId xmlns:r="http://schemas.openxmlformats.org/officeDocument/2006/relationships" id="263" r:id="R0ad370c4dfd24aa1"/>
+    <p:sldId xmlns:r="http://schemas.openxmlformats.org/officeDocument/2006/relationships" id="256" r:id="R62acf150051a4793"/>
+    <p:sldId xmlns:r="http://schemas.openxmlformats.org/officeDocument/2006/relationships" id="257" r:id="R4b03815dec5e43ca"/>
+    <p:sldId xmlns:r="http://schemas.openxmlformats.org/officeDocument/2006/relationships" id="258" r:id="R7ae263cd68474b2d"/>
+    <p:sldId xmlns:r="http://schemas.openxmlformats.org/officeDocument/2006/relationships" id="259" r:id="R00972366b92046a7"/>
+    <p:sldId xmlns:r="http://schemas.openxmlformats.org/officeDocument/2006/relationships" id="260" r:id="Rc0d9de813b57480b"/>
+    <p:sldId xmlns:r="http://schemas.openxmlformats.org/officeDocument/2006/relationships" id="261" r:id="R7526074536dc4642"/>
+    <p:sldId xmlns:r="http://schemas.openxmlformats.org/officeDocument/2006/relationships" id="262" r:id="R9b6b8901458049e8"/>
+    <p:sldId xmlns:r="http://schemas.openxmlformats.org/officeDocument/2006/relationships" id="263" r:id="R398d157145094884"/>
   </p:sldIdLst>
   <p:sldSz cx="15240000" cy="8572500"/>
   <p:notesSz cx="6858000" cy="9144000"/>
@@ -1007,7 +1007,7 @@
   </p:cSld>
   <p:clrMap bg1="lt1" tx1="dk1" bg2="lt2" tx2="dk2" accent1="accent1" accent2="accent2" accent3="accent3" accent4="accent4" accent5="accent5" accent6="accent6" hlink="hlink" folHlink="folHlink"/>
   <p:sldLayoutIdLst>
-    <p:sldLayoutId xmlns:r="http://schemas.openxmlformats.org/officeDocument/2006/relationships" id="2147483649" r:id="R7469dcb68a5c4e43"/>
+    <p:sldLayoutId xmlns:r="http://schemas.openxmlformats.org/officeDocument/2006/relationships" id="2147483649" r:id="R0e7559b82b784a52"/>
   </p:sldLayoutIdLst>
   <p:txStyles>
     <p:titleStyle>
@@ -1537,6 +1537,13 @@
 <file path=ppt/slides/slide1.xml><?xml version="1.0" encoding="utf-8"?>
 <p:sld xmlns:p="http://schemas.openxmlformats.org/presentationml/2006/main">
   <p:cSld>
+    <p:bg>
+      <p:bgPr>
+        <a:solidFill xmlns:a="http://schemas.openxmlformats.org/drawingml/2006/main">
+          <a:srgbClr val="102A43"/>
+        </a:solidFill>
+      </p:bgPr>
+    </p:bg>
     <p:spTree>
       <p:nvGrpSpPr>
         <p:cNvPr id="1" name=""/>
@@ -1546,32 +1553,428 @@
       <p:grpSpPr>
         <a:xfrm xmlns:a="http://schemas.openxmlformats.org/drawingml/2006/main"/>
       </p:grpSpPr>
-      <p:pic>
-        <p:nvPicPr>
-          <p:cNvPr id="2" name=""/>
-          <p:cNvPicPr>
-            <a:picLocks xmlns:a="http://schemas.openxmlformats.org/drawingml/2006/main" noChangeAspect="1"/>
-          </p:cNvPicPr>
-          <p:nvPr/>
-        </p:nvPicPr>
-        <p:blipFill>
-          <a:blip xmlns:r="http://schemas.openxmlformats.org/officeDocument/2006/relationships" xmlns:a="http://schemas.openxmlformats.org/drawingml/2006/main" r:embed="R8ae988a104d7414d"/>
-          <a:stretch xmlns:a="http://schemas.openxmlformats.org/drawingml/2006/main"/>
-        </p:blipFill>
-        <p:spPr>
-          <a:xfrm xmlns:a="http://schemas.openxmlformats.org/drawingml/2006/main">
-            <a:off x="0" y="0"/>
-            <a:ext cx="15240000" cy="8572500"/>
-          </a:xfrm>
-          <a:prstGeom xmlns:a="http://schemas.openxmlformats.org/drawingml/2006/main" prst="rect">
-            <a:avLst/>
-          </a:prstGeom>
-        </p:spPr>
-      </p:pic>
+      <p:sp>
+        <p:nvSpPr>
+          <p:cNvPr id="8" name="s1-eyebrow">
+            <a:extLst xmlns:a="http://schemas.openxmlformats.org/drawingml/2006/main">
+              <a:ext uri="{FF2B5EF4-FFF2-40B4-BE49-F238E27FC236}">
+                <a16:creationId xmlns:a16="http://schemas.microsoft.com/office/drawing/2014/main" id="{2949C022-47EB-48A0-B637-DDB6A9996BC4}"/>
+              </a:ext>
+            </a:extLst>
+          </p:cNvPr>
+          <p:cNvSpPr>
+            <a:spLocks xmlns:a="http://schemas.openxmlformats.org/drawingml/2006/main" noGrp="1"/>
+          </p:cNvSpPr>
+          <p:nvPr/>
+        </p:nvSpPr>
+        <p:spPr>
+          <a:xfrm xmlns:a="http://schemas.openxmlformats.org/drawingml/2006/main">
+            <a:off x="933450" y="1762125"/>
+            <a:ext cx="8572500" cy="285750"/>
+          </a:xfrm>
+          <a:prstGeom xmlns:a="http://schemas.openxmlformats.org/drawingml/2006/main" prst="rect">
+            <a:avLst/>
+          </a:prstGeom>
+          <a:noFill xmlns:a="http://schemas.openxmlformats.org/drawingml/2006/main"/>
+          <a:ln xmlns:a="http://schemas.openxmlformats.org/drawingml/2006/main" w="0">
+            <a:noFill/>
+            <a:prstDash val="solid"/>
+          </a:ln>
+        </p:spPr>
+        <p:txBody>
+          <a:bodyPr xmlns:a="http://schemas.openxmlformats.org/drawingml/2006/main" wrap="square" lIns="0" tIns="0" rIns="0" bIns="0" anchor="t">
+            <a:normAutofit fontScale="100000"/>
+          </a:bodyPr>
+          <a:lstStyle xmlns:a="http://schemas.openxmlformats.org/drawingml/2006/main"/>
+          <a:p xmlns:a="http://schemas.openxmlformats.org/drawingml/2006/main">
+            <a:pPr algn="l">
+              <a:defRPr sz="1350" b="1">
+                <a:solidFill>
+                  <a:srgbClr val="8FC4FF"/>
+                </a:solidFill>
+                <a:latin typeface="Arial"/>
+                <a:ea typeface="Arial"/>
+                <a:cs typeface="Arial"/>
+              </a:defRPr>
+            </a:pPr>
+            <a:r>
+              <a:rPr sz="1350" b="1">
+                <a:solidFill>
+                  <a:srgbClr val="8FC4FF"/>
+                </a:solidFill>
+                <a:latin typeface="Arial"/>
+                <a:ea typeface="Arial"/>
+                <a:cs typeface="Arial"/>
+              </a:rPr>
+              <a:t>MSDS 682 · DATA STREAM PROCESSING</a:t>
+            </a:r>
+          </a:p>
+        </p:txBody>
+      </p:sp>
+      <p:sp>
+        <p:nvSpPr>
+          <p:cNvPr id="2" name="s1-title">
+            <a:extLst xmlns:a="http://schemas.openxmlformats.org/drawingml/2006/main">
+              <a:ext uri="{FF2B5EF4-FFF2-40B4-BE49-F238E27FC236}">
+                <a16:creationId xmlns:a16="http://schemas.microsoft.com/office/drawing/2014/main" id="{B3D6B7A7-2705-48CF-99B1-C68BD68D5153}"/>
+              </a:ext>
+            </a:extLst>
+          </p:cNvPr>
+          <p:cNvSpPr>
+            <a:spLocks xmlns:a="http://schemas.openxmlformats.org/drawingml/2006/main" noGrp="1"/>
+          </p:cNvSpPr>
+          <p:nvPr/>
+        </p:nvSpPr>
+        <p:spPr>
+          <a:xfrm xmlns:a="http://schemas.openxmlformats.org/drawingml/2006/main">
+            <a:off x="933450" y="2238375"/>
+            <a:ext cx="11334750" cy="1571625"/>
+          </a:xfrm>
+          <a:prstGeom xmlns:a="http://schemas.openxmlformats.org/drawingml/2006/main" prst="rect">
+            <a:avLst/>
+          </a:prstGeom>
+          <a:noFill xmlns:a="http://schemas.openxmlformats.org/drawingml/2006/main"/>
+          <a:ln xmlns:a="http://schemas.openxmlformats.org/drawingml/2006/main" w="0">
+            <a:noFill/>
+            <a:prstDash val="solid"/>
+          </a:ln>
+        </p:spPr>
+        <p:txBody>
+          <a:bodyPr xmlns:a="http://schemas.openxmlformats.org/drawingml/2006/main" wrap="square" lIns="0" tIns="0" rIns="0" bIns="0" anchor="t">
+            <a:normAutofit fontScale="100000"/>
+          </a:bodyPr>
+          <a:lstStyle xmlns:a="http://schemas.openxmlformats.org/drawingml/2006/main"/>
+          <a:p xmlns:a="http://schemas.openxmlformats.org/drawingml/2006/main">
+            <a:pPr algn="l">
+              <a:lnSpc>
+                <a:spcPct val="90000"/>
+              </a:lnSpc>
+              <a:buNone/>
+              <a:defRPr sz="5475" b="1">
+                <a:solidFill>
+                  <a:srgbClr val="FFFFFF"/>
+                </a:solidFill>
+                <a:latin typeface="Arial"/>
+                <a:ea typeface="Arial"/>
+                <a:cs typeface="Arial"/>
+              </a:defRPr>
+            </a:pPr>
+            <a:r>
+              <a:rPr sz="5475" b="1">
+                <a:solidFill>
+                  <a:srgbClr val="FFFFFF"/>
+                </a:solidFill>
+                <a:latin typeface="Arial"/>
+                <a:ea typeface="Arial"/>
+                <a:cs typeface="Arial"/>
+              </a:rPr>
+              <a:t>Space Weather</a:t>
+            </a:r>
+          </a:p>
+          <a:p xmlns:a="http://schemas.openxmlformats.org/drawingml/2006/main">
+            <a:pPr algn="l">
+              <a:lnSpc>
+                <a:spcPct val="90000"/>
+              </a:lnSpc>
+              <a:buNone/>
+              <a:defRPr sz="5475" b="1">
+                <a:solidFill>
+                  <a:srgbClr val="FFFFFF"/>
+                </a:solidFill>
+                <a:latin typeface="Arial"/>
+                <a:ea typeface="Arial"/>
+                <a:cs typeface="Arial"/>
+              </a:defRPr>
+            </a:pPr>
+            <a:r>
+              <a:rPr sz="5475" b="1">
+                <a:solidFill>
+                  <a:srgbClr val="FFFFFF"/>
+                </a:solidFill>
+                <a:latin typeface="Arial"/>
+                <a:ea typeface="Arial"/>
+                <a:cs typeface="Arial"/>
+              </a:rPr>
+              <a:t>Radio-Risk Monitor</a:t>
+            </a:r>
+          </a:p>
+        </p:txBody>
+      </p:sp>
+      <p:sp>
+        <p:nvSpPr>
+          <p:cNvPr id="3" name="s1-accent">
+            <a:extLst xmlns:a="http://schemas.openxmlformats.org/drawingml/2006/main">
+              <a:ext uri="{FF2B5EF4-FFF2-40B4-BE49-F238E27FC236}">
+                <a16:creationId xmlns:a16="http://schemas.microsoft.com/office/drawing/2014/main" id="{2856B6AA-6C21-4575-B587-B18A7538BE28}"/>
+              </a:ext>
+            </a:extLst>
+          </p:cNvPr>
+          <p:cNvSpPr>
+            <a:spLocks xmlns:a="http://schemas.openxmlformats.org/drawingml/2006/main" noGrp="1"/>
+          </p:cNvSpPr>
+          <p:nvPr/>
+        </p:nvSpPr>
+        <p:spPr>
+          <a:xfrm xmlns:a="http://schemas.openxmlformats.org/drawingml/2006/main">
+            <a:off x="933450" y="4048125"/>
+            <a:ext cx="1381125" cy="66675"/>
+          </a:xfrm>
+          <a:prstGeom xmlns:a="http://schemas.openxmlformats.org/drawingml/2006/main" prst="rect">
+            <a:avLst/>
+          </a:prstGeom>
+          <a:solidFill xmlns:a="http://schemas.openxmlformats.org/drawingml/2006/main">
+            <a:srgbClr val="F4A261"/>
+          </a:solidFill>
+          <a:ln xmlns:a="http://schemas.openxmlformats.org/drawingml/2006/main" w="0">
+            <a:noFill/>
+            <a:prstDash val="solid"/>
+          </a:ln>
+        </p:spPr>
+      </p:sp>
+      <p:sp>
+        <p:nvSpPr>
+          <p:cNvPr id="4" name="s1-subtitle">
+            <a:extLst xmlns:a="http://schemas.openxmlformats.org/drawingml/2006/main">
+              <a:ext uri="{FF2B5EF4-FFF2-40B4-BE49-F238E27FC236}">
+                <a16:creationId xmlns:a16="http://schemas.microsoft.com/office/drawing/2014/main" id="{9D36095C-0A9B-4495-BB90-5F13D0860655}"/>
+              </a:ext>
+            </a:extLst>
+          </p:cNvPr>
+          <p:cNvSpPr>
+            <a:spLocks xmlns:a="http://schemas.openxmlformats.org/drawingml/2006/main" noGrp="1"/>
+          </p:cNvSpPr>
+          <p:nvPr/>
+        </p:nvSpPr>
+        <p:spPr>
+          <a:xfrm xmlns:a="http://schemas.openxmlformats.org/drawingml/2006/main">
+            <a:off x="933450" y="4381500"/>
+            <a:ext cx="9906000" cy="800100"/>
+          </a:xfrm>
+          <a:prstGeom xmlns:a="http://schemas.openxmlformats.org/drawingml/2006/main" prst="rect">
+            <a:avLst/>
+          </a:prstGeom>
+          <a:noFill xmlns:a="http://schemas.openxmlformats.org/drawingml/2006/main"/>
+          <a:ln xmlns:a="http://schemas.openxmlformats.org/drawingml/2006/main" w="0">
+            <a:noFill/>
+            <a:prstDash val="solid"/>
+          </a:ln>
+        </p:spPr>
+        <p:txBody>
+          <a:bodyPr xmlns:a="http://schemas.openxmlformats.org/drawingml/2006/main" wrap="square" lIns="0" tIns="0" rIns="0" bIns="0" anchor="t">
+            <a:normAutofit fontScale="100000"/>
+          </a:bodyPr>
+          <a:lstStyle xmlns:a="http://schemas.openxmlformats.org/drawingml/2006/main"/>
+          <a:p xmlns:a="http://schemas.openxmlformats.org/drawingml/2006/main">
+            <a:pPr algn="l">
+              <a:lnSpc>
+                <a:spcPct val="115000"/>
+              </a:lnSpc>
+              <a:buNone/>
+              <a:defRPr sz="2100" b="0">
+                <a:solidFill>
+                  <a:srgbClr val="D9E6F1"/>
+                </a:solidFill>
+                <a:latin typeface="Arial"/>
+                <a:ea typeface="Arial"/>
+                <a:cs typeface="Arial"/>
+              </a:defRPr>
+            </a:pPr>
+            <a:r>
+              <a:rPr sz="2100" b="0">
+                <a:solidFill>
+                  <a:srgbClr val="D9E6F1"/>
+                </a:solidFill>
+                <a:latin typeface="Arial"/>
+                <a:ea typeface="Arial"/>
+                <a:cs typeface="Arial"/>
+              </a:rPr>
+              <a:t>A reproducible Kafka alert when planetary Kp crosses an elevated-risk threshold.</a:t>
+            </a:r>
+          </a:p>
+        </p:txBody>
+      </p:sp>
+      <p:sp>
+        <p:nvSpPr>
+          <p:cNvPr id="5" name="s1-team">
+            <a:extLst xmlns:a="http://schemas.openxmlformats.org/drawingml/2006/main">
+              <a:ext uri="{FF2B5EF4-FFF2-40B4-BE49-F238E27FC236}">
+                <a16:creationId xmlns:a16="http://schemas.microsoft.com/office/drawing/2014/main" id="{804C07B7-3EB8-467E-A31A-EA20691F7471}"/>
+              </a:ext>
+            </a:extLst>
+          </p:cNvPr>
+          <p:cNvSpPr>
+            <a:spLocks xmlns:a="http://schemas.openxmlformats.org/drawingml/2006/main" noGrp="1"/>
+          </p:cNvSpPr>
+          <p:nvPr/>
+        </p:nvSpPr>
+        <p:spPr>
+          <a:xfrm xmlns:a="http://schemas.openxmlformats.org/drawingml/2006/main">
+            <a:off x="933450" y="5667375"/>
+            <a:ext cx="6667500" cy="381000"/>
+          </a:xfrm>
+          <a:prstGeom xmlns:a="http://schemas.openxmlformats.org/drawingml/2006/main" prst="rect">
+            <a:avLst/>
+          </a:prstGeom>
+          <a:noFill xmlns:a="http://schemas.openxmlformats.org/drawingml/2006/main"/>
+          <a:ln xmlns:a="http://schemas.openxmlformats.org/drawingml/2006/main" w="0">
+            <a:noFill/>
+            <a:prstDash val="solid"/>
+          </a:ln>
+        </p:spPr>
+        <p:txBody>
+          <a:bodyPr xmlns:a="http://schemas.openxmlformats.org/drawingml/2006/main" wrap="square" lIns="0" tIns="0" rIns="0" bIns="0" anchor="t">
+            <a:normAutofit fontScale="100000"/>
+          </a:bodyPr>
+          <a:lstStyle xmlns:a="http://schemas.openxmlformats.org/drawingml/2006/main"/>
+          <a:p xmlns:a="http://schemas.openxmlformats.org/drawingml/2006/main">
+            <a:pPr algn="l">
+              <a:lnSpc>
+                <a:spcPct val="115000"/>
+              </a:lnSpc>
+              <a:buNone/>
+              <a:defRPr sz="1725" b="0">
+                <a:solidFill>
+                  <a:srgbClr val="FFFFFF"/>
+                </a:solidFill>
+                <a:latin typeface="Arial"/>
+                <a:ea typeface="Arial"/>
+                <a:cs typeface="Arial"/>
+              </a:defRPr>
+            </a:pPr>
+            <a:r>
+              <a:rPr sz="1725" b="0">
+                <a:solidFill>
+                  <a:srgbClr val="FFFFFF"/>
+                </a:solidFill>
+                <a:latin typeface="Arial"/>
+                <a:ea typeface="Arial"/>
+                <a:cs typeface="Arial"/>
+              </a:rPr>
+              <a:t>Noam Fein · Niki Naderzad</a:t>
+            </a:r>
+          </a:p>
+        </p:txBody>
+      </p:sp>
+      <p:sp>
+        <p:nvSpPr>
+          <p:cNvPr id="6" name="footer-1-label">
+            <a:extLst xmlns:a="http://schemas.openxmlformats.org/drawingml/2006/main">
+              <a:ext uri="{FF2B5EF4-FFF2-40B4-BE49-F238E27FC236}">
+                <a16:creationId xmlns:a16="http://schemas.microsoft.com/office/drawing/2014/main" id="{252D79DF-CA1C-4AE8-8EB0-E60BE014A0E4}"/>
+              </a:ext>
+            </a:extLst>
+          </p:cNvPr>
+          <p:cNvSpPr>
+            <a:spLocks xmlns:a="http://schemas.openxmlformats.org/drawingml/2006/main" noGrp="1"/>
+          </p:cNvSpPr>
+          <p:nvPr/>
+        </p:nvSpPr>
+        <p:spPr>
+          <a:xfrm xmlns:a="http://schemas.openxmlformats.org/drawingml/2006/main">
+            <a:off x="933450" y="8191500"/>
+            <a:ext cx="11906250" cy="209550"/>
+          </a:xfrm>
+          <a:prstGeom xmlns:a="http://schemas.openxmlformats.org/drawingml/2006/main" prst="rect">
+            <a:avLst/>
+          </a:prstGeom>
+          <a:noFill xmlns:a="http://schemas.openxmlformats.org/drawingml/2006/main"/>
+          <a:ln xmlns:a="http://schemas.openxmlformats.org/drawingml/2006/main" w="0">
+            <a:noFill/>
+            <a:prstDash val="solid"/>
+          </a:ln>
+        </p:spPr>
+        <p:txBody>
+          <a:bodyPr xmlns:a="http://schemas.openxmlformats.org/drawingml/2006/main" wrap="square" lIns="0" tIns="0" rIns="0" bIns="0" anchor="t">
+            <a:normAutofit fontScale="100000"/>
+          </a:bodyPr>
+          <a:lstStyle xmlns:a="http://schemas.openxmlformats.org/drawingml/2006/main"/>
+          <a:p xmlns:a="http://schemas.openxmlformats.org/drawingml/2006/main">
+            <a:pPr algn="l">
+              <a:defRPr sz="1125" b="0">
+                <a:solidFill>
+                  <a:srgbClr val="9DB2C5"/>
+                </a:solidFill>
+                <a:latin typeface="Arial"/>
+                <a:ea typeface="Arial"/>
+                <a:cs typeface="Arial"/>
+              </a:defRPr>
+            </a:pPr>
+            <a:r>
+              <a:rPr sz="1125" b="0">
+                <a:solidFill>
+                  <a:srgbClr val="9DB2C5"/>
+                </a:solidFill>
+                <a:latin typeface="Arial"/>
+                <a:ea typeface="Arial"/>
+                <a:cs typeface="Arial"/>
+              </a:rPr>
+              <a:t>August 13, 2026</a:t>
+            </a:r>
+          </a:p>
+        </p:txBody>
+      </p:sp>
+      <p:sp>
+        <p:nvSpPr>
+          <p:cNvPr id="7" name="footer-1-number">
+            <a:extLst xmlns:a="http://schemas.openxmlformats.org/drawingml/2006/main">
+              <a:ext uri="{FF2B5EF4-FFF2-40B4-BE49-F238E27FC236}">
+                <a16:creationId xmlns:a16="http://schemas.microsoft.com/office/drawing/2014/main" id="{AD862AA5-7A70-449F-9A9C-066FB7D340CE}"/>
+              </a:ext>
+            </a:extLst>
+          </p:cNvPr>
+          <p:cNvSpPr>
+            <a:spLocks xmlns:a="http://schemas.openxmlformats.org/drawingml/2006/main" noGrp="1"/>
+          </p:cNvSpPr>
+          <p:nvPr/>
+        </p:nvSpPr>
+        <p:spPr>
+          <a:xfrm xmlns:a="http://schemas.openxmlformats.org/drawingml/2006/main">
+            <a:off x="13811250" y="8191500"/>
+            <a:ext cx="495300" cy="209550"/>
+          </a:xfrm>
+          <a:prstGeom xmlns:a="http://schemas.openxmlformats.org/drawingml/2006/main" prst="rect">
+            <a:avLst/>
+          </a:prstGeom>
+          <a:noFill xmlns:a="http://schemas.openxmlformats.org/drawingml/2006/main"/>
+          <a:ln xmlns:a="http://schemas.openxmlformats.org/drawingml/2006/main" w="0">
+            <a:noFill/>
+            <a:prstDash val="solid"/>
+          </a:ln>
+        </p:spPr>
+        <p:txBody>
+          <a:bodyPr xmlns:a="http://schemas.openxmlformats.org/drawingml/2006/main" wrap="square" lIns="0" tIns="0" rIns="0" bIns="0" anchor="t">
+            <a:normAutofit fontScale="100000"/>
+          </a:bodyPr>
+          <a:lstStyle xmlns:a="http://schemas.openxmlformats.org/drawingml/2006/main"/>
+          <a:p xmlns:a="http://schemas.openxmlformats.org/drawingml/2006/main">
+            <a:pPr algn="r">
+              <a:defRPr sz="1125" b="0">
+                <a:solidFill>
+                  <a:srgbClr val="9DB2C5"/>
+                </a:solidFill>
+                <a:latin typeface="Arial"/>
+                <a:ea typeface="Arial"/>
+                <a:cs typeface="Arial"/>
+              </a:defRPr>
+            </a:pPr>
+            <a:r>
+              <a:rPr sz="1125" b="0">
+                <a:solidFill>
+                  <a:srgbClr val="9DB2C5"/>
+                </a:solidFill>
+                <a:latin typeface="Arial"/>
+                <a:ea typeface="Arial"/>
+                <a:cs typeface="Arial"/>
+              </a:rPr>
+              <a:t>1</a:t>
+            </a:r>
+          </a:p>
+        </p:txBody>
+      </p:sp>
     </p:spTree>
     <p:extLst>
       <p:ext uri="{BB962C8B-B14F-4D97-AF65-F5344CB8AC3E}">
-        <p14:creationId xmlns:p14="http://schemas.microsoft.com/office/powerpoint/2010/main" val="1188481651"/>
+        <p14:creationId xmlns:p14="http://schemas.microsoft.com/office/powerpoint/2010/main" val="631848793"/>
       </p:ext>
     </p:extLst>
   </p:cSld>
@@ -1581,6 +1984,13 @@
 <file path=ppt/slides/slide2.xml><?xml version="1.0" encoding="utf-8"?>
 <p:sld xmlns:p="http://schemas.openxmlformats.org/presentationml/2006/main">
   <p:cSld>
+    <p:bg>
+      <p:bgPr>
+        <a:solidFill xmlns:a="http://schemas.openxmlformats.org/drawingml/2006/main">
+          <a:srgbClr val="F8F6F1"/>
+        </a:solidFill>
+      </p:bgPr>
+    </p:bg>
     <p:spTree>
       <p:nvGrpSpPr>
         <p:cNvPr id="1" name=""/>
@@ -1590,32 +2000,585 @@
       <p:grpSpPr>
         <a:xfrm xmlns:a="http://schemas.openxmlformats.org/drawingml/2006/main"/>
       </p:grpSpPr>
-      <p:pic>
-        <p:nvPicPr>
-          <p:cNvPr id="2" name=""/>
-          <p:cNvPicPr>
-            <a:picLocks xmlns:a="http://schemas.openxmlformats.org/drawingml/2006/main" noChangeAspect="1"/>
-          </p:cNvPicPr>
-          <p:nvPr/>
-        </p:nvPicPr>
-        <p:blipFill>
-          <a:blip xmlns:r="http://schemas.openxmlformats.org/officeDocument/2006/relationships" xmlns:a="http://schemas.openxmlformats.org/drawingml/2006/main" r:embed="R72e580c689244b8f"/>
-          <a:stretch xmlns:a="http://schemas.openxmlformats.org/drawingml/2006/main"/>
-        </p:blipFill>
-        <p:spPr>
-          <a:xfrm xmlns:a="http://schemas.openxmlformats.org/drawingml/2006/main">
-            <a:off x="0" y="0"/>
-            <a:ext cx="15240000" cy="8572500"/>
-          </a:xfrm>
-          <a:prstGeom xmlns:a="http://schemas.openxmlformats.org/drawingml/2006/main" prst="rect">
-            <a:avLst/>
-          </a:prstGeom>
-        </p:spPr>
-      </p:pic>
+      <p:sp>
+        <p:nvSpPr>
+          <p:cNvPr id="10" name="eyebrow-Problem and useful">
+            <a:extLst xmlns:a="http://schemas.openxmlformats.org/drawingml/2006/main">
+              <a:ext uri="{FF2B5EF4-FFF2-40B4-BE49-F238E27FC236}">
+                <a16:creationId xmlns:a16="http://schemas.microsoft.com/office/drawing/2014/main" id="{D418B939-4559-4888-9CA9-157AA96DEF10}"/>
+              </a:ext>
+            </a:extLst>
+          </p:cNvPr>
+          <p:cNvSpPr>
+            <a:spLocks xmlns:a="http://schemas.openxmlformats.org/drawingml/2006/main" noGrp="1"/>
+          </p:cNvSpPr>
+          <p:nvPr/>
+        </p:nvSpPr>
+        <p:spPr>
+          <a:xfrm xmlns:a="http://schemas.openxmlformats.org/drawingml/2006/main">
+            <a:off x="933450" y="457200"/>
+            <a:ext cx="9048750" cy="285750"/>
+          </a:xfrm>
+          <a:prstGeom xmlns:a="http://schemas.openxmlformats.org/drawingml/2006/main" prst="rect">
+            <a:avLst/>
+          </a:prstGeom>
+          <a:noFill xmlns:a="http://schemas.openxmlformats.org/drawingml/2006/main"/>
+          <a:ln xmlns:a="http://schemas.openxmlformats.org/drawingml/2006/main" w="0">
+            <a:noFill/>
+            <a:prstDash val="solid"/>
+          </a:ln>
+        </p:spPr>
+        <p:txBody>
+          <a:bodyPr xmlns:a="http://schemas.openxmlformats.org/drawingml/2006/main" wrap="square" lIns="0" tIns="0" rIns="0" bIns="0" anchor="t">
+            <a:normAutofit fontScale="100000"/>
+          </a:bodyPr>
+          <a:lstStyle xmlns:a="http://schemas.openxmlformats.org/drawingml/2006/main"/>
+          <a:p xmlns:a="http://schemas.openxmlformats.org/drawingml/2006/main">
+            <a:pPr algn="l">
+              <a:defRPr sz="1275" b="1">
+                <a:solidFill>
+                  <a:srgbClr val="2F6FED"/>
+                </a:solidFill>
+                <a:latin typeface="Arial"/>
+                <a:ea typeface="Arial"/>
+                <a:cs typeface="Arial"/>
+              </a:defRPr>
+            </a:pPr>
+            <a:r>
+              <a:rPr sz="1275" b="1">
+                <a:solidFill>
+                  <a:srgbClr val="2F6FED"/>
+                </a:solidFill>
+                <a:latin typeface="Arial"/>
+                <a:ea typeface="Arial"/>
+                <a:cs typeface="Arial"/>
+              </a:rPr>
+              <a:t>PROBLEM AND USEFUL RESULT</a:t>
+            </a:r>
+          </a:p>
+        </p:txBody>
+      </p:sp>
+      <p:sp>
+        <p:nvSpPr>
+          <p:cNvPr id="2" name="title-A radio operator n">
+            <a:extLst xmlns:a="http://schemas.openxmlformats.org/drawingml/2006/main">
+              <a:ext uri="{FF2B5EF4-FFF2-40B4-BE49-F238E27FC236}">
+                <a16:creationId xmlns:a16="http://schemas.microsoft.com/office/drawing/2014/main" id="{4C0BB0E3-C168-41BB-9E63-6B8D36070DBC}"/>
+              </a:ext>
+            </a:extLst>
+          </p:cNvPr>
+          <p:cNvSpPr>
+            <a:spLocks xmlns:a="http://schemas.openxmlformats.org/drawingml/2006/main" noGrp="1"/>
+          </p:cNvSpPr>
+          <p:nvPr/>
+        </p:nvSpPr>
+        <p:spPr>
+          <a:xfrm xmlns:a="http://schemas.openxmlformats.org/drawingml/2006/main">
+            <a:off x="933450" y="838200"/>
+            <a:ext cx="13373100" cy="1047750"/>
+          </a:xfrm>
+          <a:prstGeom xmlns:a="http://schemas.openxmlformats.org/drawingml/2006/main" prst="rect">
+            <a:avLst/>
+          </a:prstGeom>
+          <a:noFill xmlns:a="http://schemas.openxmlformats.org/drawingml/2006/main"/>
+          <a:ln xmlns:a="http://schemas.openxmlformats.org/drawingml/2006/main" w="0">
+            <a:noFill/>
+            <a:prstDash val="solid"/>
+          </a:ln>
+        </p:spPr>
+        <p:txBody>
+          <a:bodyPr xmlns:a="http://schemas.openxmlformats.org/drawingml/2006/main" wrap="square" lIns="0" tIns="0" rIns="0" bIns="0" anchor="t">
+            <a:normAutofit fontScale="100000"/>
+          </a:bodyPr>
+          <a:lstStyle xmlns:a="http://schemas.openxmlformats.org/drawingml/2006/main"/>
+          <a:p xmlns:a="http://schemas.openxmlformats.org/drawingml/2006/main">
+            <a:pPr algn="l">
+              <a:lnSpc>
+                <a:spcPct val="96000"/>
+              </a:lnSpc>
+              <a:buNone/>
+              <a:defRPr sz="3675" b="1">
+                <a:solidFill>
+                  <a:srgbClr val="102A43"/>
+                </a:solidFill>
+                <a:latin typeface="Arial"/>
+                <a:ea typeface="Arial"/>
+                <a:cs typeface="Arial"/>
+              </a:defRPr>
+            </a:pPr>
+            <a:r>
+              <a:rPr sz="3675" b="1">
+                <a:solidFill>
+                  <a:srgbClr val="102A43"/>
+                </a:solidFill>
+                <a:latin typeface="Arial"/>
+                <a:ea typeface="Arial"/>
+                <a:cs typeface="Arial"/>
+              </a:rPr>
+              <a:t>A radio operator needs a signal, not another feed to watch</a:t>
+            </a:r>
+          </a:p>
+        </p:txBody>
+      </p:sp>
+      <p:sp>
+        <p:nvSpPr>
+          <p:cNvPr id="3" name="s2-metric">
+            <a:extLst xmlns:a="http://schemas.openxmlformats.org/drawingml/2006/main">
+              <a:ext uri="{FF2B5EF4-FFF2-40B4-BE49-F238E27FC236}">
+                <a16:creationId xmlns:a16="http://schemas.microsoft.com/office/drawing/2014/main" id="{740A6C61-D1D8-44D8-854D-0265D4A840F7}"/>
+              </a:ext>
+            </a:extLst>
+          </p:cNvPr>
+          <p:cNvSpPr>
+            <a:spLocks xmlns:a="http://schemas.openxmlformats.org/drawingml/2006/main" noGrp="1"/>
+          </p:cNvSpPr>
+          <p:nvPr/>
+        </p:nvSpPr>
+        <p:spPr>
+          <a:xfrm xmlns:a="http://schemas.openxmlformats.org/drawingml/2006/main">
+            <a:off x="933450" y="2952750"/>
+            <a:ext cx="4953000" cy="904875"/>
+          </a:xfrm>
+          <a:prstGeom xmlns:a="http://schemas.openxmlformats.org/drawingml/2006/main" prst="rect">
+            <a:avLst/>
+          </a:prstGeom>
+          <a:noFill xmlns:a="http://schemas.openxmlformats.org/drawingml/2006/main"/>
+          <a:ln xmlns:a="http://schemas.openxmlformats.org/drawingml/2006/main" w="0">
+            <a:noFill/>
+            <a:prstDash val="solid"/>
+          </a:ln>
+        </p:spPr>
+        <p:txBody>
+          <a:bodyPr xmlns:a="http://schemas.openxmlformats.org/drawingml/2006/main" wrap="square" lIns="0" tIns="0" rIns="0" bIns="0" anchor="t">
+            <a:normAutofit fontScale="96545"/>
+          </a:bodyPr>
+          <a:lstStyle xmlns:a="http://schemas.openxmlformats.org/drawingml/2006/main"/>
+          <a:p xmlns:a="http://schemas.openxmlformats.org/drawingml/2006/main">
+            <a:pPr algn="l">
+              <a:defRPr sz="6150" b="1">
+                <a:solidFill>
+                  <a:srgbClr val="102A43"/>
+                </a:solidFill>
+                <a:latin typeface="Arial"/>
+                <a:ea typeface="Arial"/>
+                <a:cs typeface="Arial"/>
+              </a:defRPr>
+            </a:pPr>
+            <a:r>
+              <a:rPr sz="6150" b="1">
+                <a:solidFill>
+                  <a:srgbClr val="102A43"/>
+                </a:solidFill>
+                <a:latin typeface="Arial"/>
+                <a:ea typeface="Arial"/>
+                <a:cs typeface="Arial"/>
+              </a:rPr>
+              <a:t>Kp ≥ 6</a:t>
+            </a:r>
+          </a:p>
+        </p:txBody>
+      </p:sp>
+      <p:sp>
+        <p:nvSpPr>
+          <p:cNvPr id="4" name="s2-metric-label">
+            <a:extLst xmlns:a="http://schemas.openxmlformats.org/drawingml/2006/main">
+              <a:ext uri="{FF2B5EF4-FFF2-40B4-BE49-F238E27FC236}">
+                <a16:creationId xmlns:a16="http://schemas.microsoft.com/office/drawing/2014/main" id="{3DE431CC-6F2D-48BE-8102-A6F85698FE10}"/>
+              </a:ext>
+            </a:extLst>
+          </p:cNvPr>
+          <p:cNvSpPr>
+            <a:spLocks xmlns:a="http://schemas.openxmlformats.org/drawingml/2006/main" noGrp="1"/>
+          </p:cNvSpPr>
+          <p:nvPr/>
+        </p:nvSpPr>
+        <p:spPr>
+          <a:xfrm xmlns:a="http://schemas.openxmlformats.org/drawingml/2006/main">
+            <a:off x="933450" y="4000500"/>
+            <a:ext cx="4857750" cy="857250"/>
+          </a:xfrm>
+          <a:prstGeom xmlns:a="http://schemas.openxmlformats.org/drawingml/2006/main" prst="rect">
+            <a:avLst/>
+          </a:prstGeom>
+          <a:noFill xmlns:a="http://schemas.openxmlformats.org/drawingml/2006/main"/>
+          <a:ln xmlns:a="http://schemas.openxmlformats.org/drawingml/2006/main" w="0">
+            <a:noFill/>
+            <a:prstDash val="solid"/>
+          </a:ln>
+        </p:spPr>
+        <p:txBody>
+          <a:bodyPr xmlns:a="http://schemas.openxmlformats.org/drawingml/2006/main" wrap="square" lIns="0" tIns="0" rIns="0" bIns="0" anchor="t">
+            <a:normAutofit fontScale="100000"/>
+          </a:bodyPr>
+          <a:lstStyle xmlns:a="http://schemas.openxmlformats.org/drawingml/2006/main"/>
+          <a:p xmlns:a="http://schemas.openxmlformats.org/drawingml/2006/main">
+            <a:pPr algn="l">
+              <a:lnSpc>
+                <a:spcPct val="115000"/>
+              </a:lnSpc>
+              <a:buNone/>
+              <a:defRPr sz="1800" b="0">
+                <a:solidFill>
+                  <a:srgbClr val="617080"/>
+                </a:solidFill>
+                <a:latin typeface="Arial"/>
+                <a:ea typeface="Arial"/>
+                <a:cs typeface="Arial"/>
+              </a:defRPr>
+            </a:pPr>
+            <a:r>
+              <a:rPr sz="1800" b="0">
+                <a:solidFill>
+                  <a:srgbClr val="617080"/>
+                </a:solidFill>
+                <a:latin typeface="Arial"/>
+                <a:ea typeface="Arial"/>
+                <a:cs typeface="Arial"/>
+              </a:rPr>
+              <a:t>Our course-scale threshold for elevated radio-risk conditions.</a:t>
+            </a:r>
+          </a:p>
+        </p:txBody>
+      </p:sp>
+      <p:sp>
+        <p:nvSpPr>
+          <p:cNvPr id="5" name="s2-rule-accent">
+            <a:extLst xmlns:a="http://schemas.openxmlformats.org/drawingml/2006/main">
+              <a:ext uri="{FF2B5EF4-FFF2-40B4-BE49-F238E27FC236}">
+                <a16:creationId xmlns:a16="http://schemas.microsoft.com/office/drawing/2014/main" id="{C66C1127-541E-48E2-BB4E-A18D24DB9AE8}"/>
+              </a:ext>
+            </a:extLst>
+          </p:cNvPr>
+          <p:cNvSpPr>
+            <a:spLocks xmlns:a="http://schemas.openxmlformats.org/drawingml/2006/main" noGrp="1"/>
+          </p:cNvSpPr>
+          <p:nvPr/>
+        </p:nvSpPr>
+        <p:spPr>
+          <a:xfrm xmlns:a="http://schemas.openxmlformats.org/drawingml/2006/main">
+            <a:off x="7667625" y="2819400"/>
+            <a:ext cx="95250" cy="1676400"/>
+          </a:xfrm>
+          <a:prstGeom xmlns:a="http://schemas.openxmlformats.org/drawingml/2006/main" prst="rect">
+            <a:avLst/>
+          </a:prstGeom>
+          <a:solidFill xmlns:a="http://schemas.openxmlformats.org/drawingml/2006/main">
+            <a:srgbClr val="F4A261"/>
+          </a:solidFill>
+          <a:ln xmlns:a="http://schemas.openxmlformats.org/drawingml/2006/main" w="0">
+            <a:noFill/>
+            <a:prstDash val="solid"/>
+          </a:ln>
+        </p:spPr>
+      </p:sp>
+      <p:sp>
+        <p:nvSpPr>
+          <p:cNvPr id="6" name="s2-rule">
+            <a:extLst xmlns:a="http://schemas.openxmlformats.org/drawingml/2006/main">
+              <a:ext uri="{FF2B5EF4-FFF2-40B4-BE49-F238E27FC236}">
+                <a16:creationId xmlns:a16="http://schemas.microsoft.com/office/drawing/2014/main" id="{493587DF-D496-4C62-AFFA-9CA24C562784}"/>
+              </a:ext>
+            </a:extLst>
+          </p:cNvPr>
+          <p:cNvSpPr>
+            <a:spLocks xmlns:a="http://schemas.openxmlformats.org/drawingml/2006/main" noGrp="1"/>
+          </p:cNvSpPr>
+          <p:nvPr/>
+        </p:nvSpPr>
+        <p:spPr>
+          <a:xfrm xmlns:a="http://schemas.openxmlformats.org/drawingml/2006/main">
+            <a:off x="8096250" y="2924175"/>
+            <a:ext cx="5524500" cy="1476375"/>
+          </a:xfrm>
+          <a:prstGeom xmlns:a="http://schemas.openxmlformats.org/drawingml/2006/main" prst="rect">
+            <a:avLst/>
+          </a:prstGeom>
+          <a:noFill xmlns:a="http://schemas.openxmlformats.org/drawingml/2006/main"/>
+          <a:ln xmlns:a="http://schemas.openxmlformats.org/drawingml/2006/main" w="0">
+            <a:noFill/>
+            <a:prstDash val="solid"/>
+          </a:ln>
+        </p:spPr>
+        <p:txBody>
+          <a:bodyPr xmlns:a="http://schemas.openxmlformats.org/drawingml/2006/main" wrap="square" lIns="0" tIns="0" rIns="0" bIns="0" anchor="t">
+            <a:normAutofit fontScale="100000"/>
+          </a:bodyPr>
+          <a:lstStyle xmlns:a="http://schemas.openxmlformats.org/drawingml/2006/main"/>
+          <a:p xmlns:a="http://schemas.openxmlformats.org/drawingml/2006/main">
+            <a:pPr algn="l">
+              <a:lnSpc>
+                <a:spcPct val="115000"/>
+              </a:lnSpc>
+              <a:buNone/>
+              <a:defRPr sz="2475" b="1">
+                <a:solidFill>
+                  <a:srgbClr val="102A43"/>
+                </a:solidFill>
+                <a:latin typeface="Arial"/>
+                <a:ea typeface="Arial"/>
+                <a:cs typeface="Arial"/>
+              </a:defRPr>
+            </a:pPr>
+            <a:r>
+              <a:rPr sz="2475" b="1">
+                <a:solidFill>
+                  <a:srgbClr val="102A43"/>
+                </a:solidFill>
+                <a:latin typeface="Arial"/>
+                <a:ea typeface="Arial"/>
+                <a:cs typeface="Arial"/>
+              </a:rPr>
+              <a:t>Emit one alert when the rolling 15-minute maximum first reaches or exceeds 6.</a:t>
+            </a:r>
+          </a:p>
+        </p:txBody>
+      </p:sp>
+      <p:sp>
+        <p:nvSpPr>
+          <p:cNvPr id="7" name="s2-bullets">
+            <a:extLst xmlns:a="http://schemas.openxmlformats.org/drawingml/2006/main">
+              <a:ext uri="{FF2B5EF4-FFF2-40B4-BE49-F238E27FC236}">
+                <a16:creationId xmlns:a16="http://schemas.microsoft.com/office/drawing/2014/main" id="{6572F05E-D109-4254-BBA1-C013C7602F67}"/>
+              </a:ext>
+            </a:extLst>
+          </p:cNvPr>
+          <p:cNvSpPr>
+            <a:spLocks xmlns:a="http://schemas.openxmlformats.org/drawingml/2006/main" noGrp="1"/>
+          </p:cNvSpPr>
+          <p:nvPr/>
+        </p:nvSpPr>
+        <p:spPr>
+          <a:xfrm xmlns:a="http://schemas.openxmlformats.org/drawingml/2006/main">
+            <a:off x="8096250" y="4762500"/>
+            <a:ext cx="6191250" cy="2238375"/>
+          </a:xfrm>
+          <a:prstGeom xmlns:a="http://schemas.openxmlformats.org/drawingml/2006/main" prst="rect">
+            <a:avLst/>
+          </a:prstGeom>
+          <a:noFill xmlns:a="http://schemas.openxmlformats.org/drawingml/2006/main"/>
+          <a:ln xmlns:a="http://schemas.openxmlformats.org/drawingml/2006/main" w="0">
+            <a:noFill/>
+            <a:prstDash val="solid"/>
+          </a:ln>
+        </p:spPr>
+        <p:txBody>
+          <a:bodyPr xmlns:a="http://schemas.openxmlformats.org/drawingml/2006/main" wrap="square" lIns="0" tIns="0" rIns="0" bIns="0" anchor="t">
+            <a:normAutofit fontScale="100000"/>
+          </a:bodyPr>
+          <a:lstStyle xmlns:a="http://schemas.openxmlformats.org/drawingml/2006/main"/>
+          <a:p xmlns:a="http://schemas.openxmlformats.org/drawingml/2006/main">
+            <a:pPr algn="l">
+              <a:lnSpc>
+                <a:spcPct val="115000"/>
+              </a:lnSpc>
+              <a:buNone/>
+              <a:defRPr sz="1725" b="0">
+                <a:solidFill>
+                  <a:srgbClr val="17212B"/>
+                </a:solidFill>
+                <a:latin typeface="Arial"/>
+                <a:ea typeface="Arial"/>
+                <a:cs typeface="Arial"/>
+              </a:defRPr>
+            </a:pPr>
+            <a:r>
+              <a:rPr sz="1725" b="0">
+                <a:solidFill>
+                  <a:srgbClr val="17212B"/>
+                </a:solidFill>
+                <a:latin typeface="Arial"/>
+                <a:ea typeface="Arial"/>
+                <a:cs typeface="Arial"/>
+              </a:rPr>
+              <a:t>•  Target user: amateur-radio operators relying on HF propagation.</a:t>
+            </a:r>
+          </a:p>
+          <a:p xmlns:a="http://schemas.openxmlformats.org/drawingml/2006/main">
+            <a:r>
+              <a:t/>
+            </a:r>
+          </a:p>
+          <a:p xmlns:a="http://schemas.openxmlformats.org/drawingml/2006/main">
+            <a:pPr algn="l">
+              <a:lnSpc>
+                <a:spcPct val="115000"/>
+              </a:lnSpc>
+              <a:buNone/>
+              <a:defRPr sz="1725" b="0">
+                <a:solidFill>
+                  <a:srgbClr val="17212B"/>
+                </a:solidFill>
+                <a:latin typeface="Arial"/>
+                <a:ea typeface="Arial"/>
+                <a:cs typeface="Arial"/>
+              </a:defRPr>
+            </a:pPr>
+            <a:r>
+              <a:rPr sz="1725" b="0">
+                <a:solidFill>
+                  <a:srgbClr val="17212B"/>
+                </a:solidFill>
+                <a:latin typeface="Arial"/>
+                <a:ea typeface="Arial"/>
+                <a:cs typeface="Arial"/>
+              </a:rPr>
+              <a:t>•  No repeated alerts while the window remains elevated.</a:t>
+            </a:r>
+          </a:p>
+          <a:p xmlns:a="http://schemas.openxmlformats.org/drawingml/2006/main">
+            <a:r>
+              <a:t/>
+            </a:r>
+          </a:p>
+          <a:p xmlns:a="http://schemas.openxmlformats.org/drawingml/2006/main">
+            <a:pPr algn="l">
+              <a:lnSpc>
+                <a:spcPct val="115000"/>
+              </a:lnSpc>
+              <a:buNone/>
+              <a:defRPr sz="1725" b="0">
+                <a:solidFill>
+                  <a:srgbClr val="17212B"/>
+                </a:solidFill>
+                <a:latin typeface="Arial"/>
+                <a:ea typeface="Arial"/>
+                <a:cs typeface="Arial"/>
+              </a:defRPr>
+            </a:pPr>
+            <a:r>
+              <a:rPr sz="1725" b="0">
+                <a:solidFill>
+                  <a:srgbClr val="17212B"/>
+                </a:solidFill>
+                <a:latin typeface="Arial"/>
+                <a:ea typeface="Arial"/>
+                <a:cs typeface="Arial"/>
+              </a:rPr>
+              <a:t>•  The rule rearms only after the rolling maximum falls below 6.</a:t>
+            </a:r>
+          </a:p>
+        </p:txBody>
+      </p:sp>
+      <p:sp>
+        <p:nvSpPr>
+          <p:cNvPr id="8" name="footer-2-label">
+            <a:extLst xmlns:a="http://schemas.openxmlformats.org/drawingml/2006/main">
+              <a:ext uri="{FF2B5EF4-FFF2-40B4-BE49-F238E27FC236}">
+                <a16:creationId xmlns:a16="http://schemas.microsoft.com/office/drawing/2014/main" id="{656A4A26-8CF3-4A28-B1A9-60BE6BB25CC2}"/>
+              </a:ext>
+            </a:extLst>
+          </p:cNvPr>
+          <p:cNvSpPr>
+            <a:spLocks xmlns:a="http://schemas.openxmlformats.org/drawingml/2006/main" noGrp="1"/>
+          </p:cNvSpPr>
+          <p:nvPr/>
+        </p:nvSpPr>
+        <p:spPr>
+          <a:xfrm xmlns:a="http://schemas.openxmlformats.org/drawingml/2006/main">
+            <a:off x="933450" y="8191500"/>
+            <a:ext cx="11906250" cy="209550"/>
+          </a:xfrm>
+          <a:prstGeom xmlns:a="http://schemas.openxmlformats.org/drawingml/2006/main" prst="rect">
+            <a:avLst/>
+          </a:prstGeom>
+          <a:noFill xmlns:a="http://schemas.openxmlformats.org/drawingml/2006/main"/>
+          <a:ln xmlns:a="http://schemas.openxmlformats.org/drawingml/2006/main" w="0">
+            <a:noFill/>
+            <a:prstDash val="solid"/>
+          </a:ln>
+        </p:spPr>
+        <p:txBody>
+          <a:bodyPr xmlns:a="http://schemas.openxmlformats.org/drawingml/2006/main" wrap="square" lIns="0" tIns="0" rIns="0" bIns="0" anchor="t">
+            <a:normAutofit fontScale="100000"/>
+          </a:bodyPr>
+          <a:lstStyle xmlns:a="http://schemas.openxmlformats.org/drawingml/2006/main"/>
+          <a:p xmlns:a="http://schemas.openxmlformats.org/drawingml/2006/main">
+            <a:pPr algn="l">
+              <a:defRPr sz="1125" b="0">
+                <a:solidFill>
+                  <a:srgbClr val="8894A0"/>
+                </a:solidFill>
+                <a:latin typeface="Arial"/>
+                <a:ea typeface="Arial"/>
+                <a:cs typeface="Arial"/>
+              </a:defRPr>
+            </a:pPr>
+            <a:r>
+              <a:rPr sz="1125" b="0">
+                <a:solidFill>
+                  <a:srgbClr val="8894A0"/>
+                </a:solidFill>
+                <a:latin typeface="Arial"/>
+                <a:ea typeface="Arial"/>
+                <a:cs typeface="Arial"/>
+              </a:rPr>
+              <a:t>Problem · user · result · why it matters</a:t>
+            </a:r>
+          </a:p>
+        </p:txBody>
+      </p:sp>
+      <p:sp>
+        <p:nvSpPr>
+          <p:cNvPr id="9" name="footer-2-number">
+            <a:extLst xmlns:a="http://schemas.openxmlformats.org/drawingml/2006/main">
+              <a:ext uri="{FF2B5EF4-FFF2-40B4-BE49-F238E27FC236}">
+                <a16:creationId xmlns:a16="http://schemas.microsoft.com/office/drawing/2014/main" id="{6D4CB7A1-C59A-4F67-B263-C293FAEBD7F0}"/>
+              </a:ext>
+            </a:extLst>
+          </p:cNvPr>
+          <p:cNvSpPr>
+            <a:spLocks xmlns:a="http://schemas.openxmlformats.org/drawingml/2006/main" noGrp="1"/>
+          </p:cNvSpPr>
+          <p:nvPr/>
+        </p:nvSpPr>
+        <p:spPr>
+          <a:xfrm xmlns:a="http://schemas.openxmlformats.org/drawingml/2006/main">
+            <a:off x="13811250" y="8191500"/>
+            <a:ext cx="495300" cy="209550"/>
+          </a:xfrm>
+          <a:prstGeom xmlns:a="http://schemas.openxmlformats.org/drawingml/2006/main" prst="rect">
+            <a:avLst/>
+          </a:prstGeom>
+          <a:noFill xmlns:a="http://schemas.openxmlformats.org/drawingml/2006/main"/>
+          <a:ln xmlns:a="http://schemas.openxmlformats.org/drawingml/2006/main" w="0">
+            <a:noFill/>
+            <a:prstDash val="solid"/>
+          </a:ln>
+        </p:spPr>
+        <p:txBody>
+          <a:bodyPr xmlns:a="http://schemas.openxmlformats.org/drawingml/2006/main" wrap="square" lIns="0" tIns="0" rIns="0" bIns="0" anchor="t">
+            <a:normAutofit fontScale="100000"/>
+          </a:bodyPr>
+          <a:lstStyle xmlns:a="http://schemas.openxmlformats.org/drawingml/2006/main"/>
+          <a:p xmlns:a="http://schemas.openxmlformats.org/drawingml/2006/main">
+            <a:pPr algn="r">
+              <a:defRPr sz="1125" b="0">
+                <a:solidFill>
+                  <a:srgbClr val="8894A0"/>
+                </a:solidFill>
+                <a:latin typeface="Arial"/>
+                <a:ea typeface="Arial"/>
+                <a:cs typeface="Arial"/>
+              </a:defRPr>
+            </a:pPr>
+            <a:r>
+              <a:rPr sz="1125" b="0">
+                <a:solidFill>
+                  <a:srgbClr val="8894A0"/>
+                </a:solidFill>
+                <a:latin typeface="Arial"/>
+                <a:ea typeface="Arial"/>
+                <a:cs typeface="Arial"/>
+              </a:rPr>
+              <a:t>2</a:t>
+            </a:r>
+          </a:p>
+        </p:txBody>
+      </p:sp>
     </p:spTree>
     <p:extLst>
       <p:ext uri="{BB962C8B-B14F-4D97-AF65-F5344CB8AC3E}">
-        <p14:creationId xmlns:p14="http://schemas.microsoft.com/office/powerpoint/2010/main" val="247187034"/>
+        <p14:creationId xmlns:p14="http://schemas.microsoft.com/office/powerpoint/2010/main" val="1318768079"/>
       </p:ext>
     </p:extLst>
   </p:cSld>
@@ -1625,6 +2588,13 @@
 <file path=ppt/slides/slide3.xml><?xml version="1.0" encoding="utf-8"?>
 <p:sld xmlns:p="http://schemas.openxmlformats.org/presentationml/2006/main">
   <p:cSld>
+    <p:bg>
+      <p:bgPr>
+        <a:solidFill xmlns:a="http://schemas.openxmlformats.org/drawingml/2006/main">
+          <a:srgbClr val="F8F6F1"/>
+        </a:solidFill>
+      </p:bgPr>
+    </p:bg>
     <p:spTree>
       <p:nvGrpSpPr>
         <p:cNvPr id="1" name=""/>
@@ -1634,32 +2604,857 @@
       <p:grpSpPr>
         <a:xfrm xmlns:a="http://schemas.openxmlformats.org/drawingml/2006/main"/>
       </p:grpSpPr>
-      <p:pic>
-        <p:nvPicPr>
-          <p:cNvPr id="2" name=""/>
-          <p:cNvPicPr>
-            <a:picLocks xmlns:a="http://schemas.openxmlformats.org/drawingml/2006/main" noChangeAspect="1"/>
-          </p:cNvPicPr>
-          <p:nvPr/>
-        </p:nvPicPr>
-        <p:blipFill>
-          <a:blip xmlns:r="http://schemas.openxmlformats.org/officeDocument/2006/relationships" xmlns:a="http://schemas.openxmlformats.org/drawingml/2006/main" r:embed="Rbe25cd1496794e1b"/>
-          <a:stretch xmlns:a="http://schemas.openxmlformats.org/drawingml/2006/main"/>
-        </p:blipFill>
-        <p:spPr>
-          <a:xfrm xmlns:a="http://schemas.openxmlformats.org/drawingml/2006/main">
-            <a:off x="0" y="0"/>
-            <a:ext cx="15240000" cy="8572500"/>
-          </a:xfrm>
-          <a:prstGeom xmlns:a="http://schemas.openxmlformats.org/drawingml/2006/main" prst="rect">
-            <a:avLst/>
-          </a:prstGeom>
-        </p:spPr>
-      </p:pic>
+      <p:sp>
+        <p:nvSpPr>
+          <p:cNvPr id="12" name="eyebrow-Data and event con">
+            <a:extLst xmlns:a="http://schemas.openxmlformats.org/drawingml/2006/main">
+              <a:ext uri="{FF2B5EF4-FFF2-40B4-BE49-F238E27FC236}">
+                <a16:creationId xmlns:a16="http://schemas.microsoft.com/office/drawing/2014/main" id="{14480DB1-96DF-4955-8603-FD84944E3F67}"/>
+              </a:ext>
+            </a:extLst>
+          </p:cNvPr>
+          <p:cNvSpPr>
+            <a:spLocks xmlns:a="http://schemas.openxmlformats.org/drawingml/2006/main" noGrp="1"/>
+          </p:cNvSpPr>
+          <p:nvPr/>
+        </p:nvSpPr>
+        <p:spPr>
+          <a:xfrm xmlns:a="http://schemas.openxmlformats.org/drawingml/2006/main">
+            <a:off x="933450" y="457200"/>
+            <a:ext cx="9048750" cy="285750"/>
+          </a:xfrm>
+          <a:prstGeom xmlns:a="http://schemas.openxmlformats.org/drawingml/2006/main" prst="rect">
+            <a:avLst/>
+          </a:prstGeom>
+          <a:noFill xmlns:a="http://schemas.openxmlformats.org/drawingml/2006/main"/>
+          <a:ln xmlns:a="http://schemas.openxmlformats.org/drawingml/2006/main" w="0">
+            <a:noFill/>
+            <a:prstDash val="solid"/>
+          </a:ln>
+        </p:spPr>
+        <p:txBody>
+          <a:bodyPr xmlns:a="http://schemas.openxmlformats.org/drawingml/2006/main" wrap="square" lIns="0" tIns="0" rIns="0" bIns="0" anchor="t">
+            <a:normAutofit fontScale="100000"/>
+          </a:bodyPr>
+          <a:lstStyle xmlns:a="http://schemas.openxmlformats.org/drawingml/2006/main"/>
+          <a:p xmlns:a="http://schemas.openxmlformats.org/drawingml/2006/main">
+            <a:pPr algn="l">
+              <a:defRPr sz="1275" b="1">
+                <a:solidFill>
+                  <a:srgbClr val="2F6FED"/>
+                </a:solidFill>
+                <a:latin typeface="Arial"/>
+                <a:ea typeface="Arial"/>
+                <a:cs typeface="Arial"/>
+              </a:defRPr>
+            </a:pPr>
+            <a:r>
+              <a:rPr sz="1275" b="1">
+                <a:solidFill>
+                  <a:srgbClr val="2F6FED"/>
+                </a:solidFill>
+                <a:latin typeface="Arial"/>
+                <a:ea typeface="Arial"/>
+                <a:cs typeface="Arial"/>
+              </a:rPr>
+              <a:t>DATA AND EVENT CONTRACT</a:t>
+            </a:r>
+          </a:p>
+        </p:txBody>
+      </p:sp>
+      <p:sp>
+        <p:nvSpPr>
+          <p:cNvPr id="2" name="title-Every NOAA observa">
+            <a:extLst xmlns:a="http://schemas.openxmlformats.org/drawingml/2006/main">
+              <a:ext uri="{FF2B5EF4-FFF2-40B4-BE49-F238E27FC236}">
+                <a16:creationId xmlns:a16="http://schemas.microsoft.com/office/drawing/2014/main" id="{C36EB502-603A-4EC7-8BEB-69879F8A6D96}"/>
+              </a:ext>
+            </a:extLst>
+          </p:cNvPr>
+          <p:cNvSpPr>
+            <a:spLocks xmlns:a="http://schemas.openxmlformats.org/drawingml/2006/main" noGrp="1"/>
+          </p:cNvSpPr>
+          <p:nvPr/>
+        </p:nvSpPr>
+        <p:spPr>
+          <a:xfrm xmlns:a="http://schemas.openxmlformats.org/drawingml/2006/main">
+            <a:off x="933450" y="838200"/>
+            <a:ext cx="13373100" cy="1047750"/>
+          </a:xfrm>
+          <a:prstGeom xmlns:a="http://schemas.openxmlformats.org/drawingml/2006/main" prst="rect">
+            <a:avLst/>
+          </a:prstGeom>
+          <a:noFill xmlns:a="http://schemas.openxmlformats.org/drawingml/2006/main"/>
+          <a:ln xmlns:a="http://schemas.openxmlformats.org/drawingml/2006/main" w="0">
+            <a:noFill/>
+            <a:prstDash val="solid"/>
+          </a:ln>
+        </p:spPr>
+        <p:txBody>
+          <a:bodyPr xmlns:a="http://schemas.openxmlformats.org/drawingml/2006/main" wrap="square" lIns="0" tIns="0" rIns="0" bIns="0" anchor="t">
+            <a:normAutofit fontScale="100000"/>
+          </a:bodyPr>
+          <a:lstStyle xmlns:a="http://schemas.openxmlformats.org/drawingml/2006/main"/>
+          <a:p xmlns:a="http://schemas.openxmlformats.org/drawingml/2006/main">
+            <a:pPr algn="l">
+              <a:lnSpc>
+                <a:spcPct val="96000"/>
+              </a:lnSpc>
+              <a:buNone/>
+              <a:defRPr sz="3675" b="1">
+                <a:solidFill>
+                  <a:srgbClr val="102A43"/>
+                </a:solidFill>
+                <a:latin typeface="Arial"/>
+                <a:ea typeface="Arial"/>
+                <a:cs typeface="Arial"/>
+              </a:defRPr>
+            </a:pPr>
+            <a:r>
+              <a:rPr sz="3675" b="1">
+                <a:solidFill>
+                  <a:srgbClr val="102A43"/>
+                </a:solidFill>
+                <a:latin typeface="Arial"/>
+                <a:ea typeface="Arial"/>
+                <a:cs typeface="Arial"/>
+              </a:rPr>
+              <a:t>Every NOAA observation becomes one ordered Kafka event</a:t>
+            </a:r>
+          </a:p>
+        </p:txBody>
+      </p:sp>
+      <p:sp>
+        <p:nvSpPr>
+          <p:cNvPr id="3" name="s3-source">
+            <a:extLst xmlns:a="http://schemas.openxmlformats.org/drawingml/2006/main">
+              <a:ext uri="{FF2B5EF4-FFF2-40B4-BE49-F238E27FC236}">
+                <a16:creationId xmlns:a16="http://schemas.microsoft.com/office/drawing/2014/main" id="{20995705-0F22-4628-8DE6-03BE9D9C06F3}"/>
+              </a:ext>
+            </a:extLst>
+          </p:cNvPr>
+          <p:cNvSpPr>
+            <a:spLocks xmlns:a="http://schemas.openxmlformats.org/drawingml/2006/main" noGrp="1"/>
+          </p:cNvSpPr>
+          <p:nvPr/>
+        </p:nvSpPr>
+        <p:spPr>
+          <a:xfrm xmlns:a="http://schemas.openxmlformats.org/drawingml/2006/main">
+            <a:off x="933450" y="2647950"/>
+            <a:ext cx="5810250" cy="619125"/>
+          </a:xfrm>
+          <a:prstGeom xmlns:a="http://schemas.openxmlformats.org/drawingml/2006/main" prst="rect">
+            <a:avLst/>
+          </a:prstGeom>
+          <a:noFill xmlns:a="http://schemas.openxmlformats.org/drawingml/2006/main"/>
+          <a:ln xmlns:a="http://schemas.openxmlformats.org/drawingml/2006/main" w="0">
+            <a:noFill/>
+            <a:prstDash val="solid"/>
+          </a:ln>
+        </p:spPr>
+        <p:txBody>
+          <a:bodyPr xmlns:a="http://schemas.openxmlformats.org/drawingml/2006/main" wrap="square" lIns="0" tIns="0" rIns="0" bIns="0" anchor="t">
+            <a:normAutofit fontScale="98128"/>
+          </a:bodyPr>
+          <a:lstStyle xmlns:a="http://schemas.openxmlformats.org/drawingml/2006/main"/>
+          <a:p xmlns:a="http://schemas.openxmlformats.org/drawingml/2006/main">
+            <a:pPr algn="l">
+              <a:lnSpc>
+                <a:spcPct val="115000"/>
+              </a:lnSpc>
+              <a:buNone/>
+              <a:defRPr sz="1800" b="0">
+                <a:solidFill>
+                  <a:srgbClr val="17212B"/>
+                </a:solidFill>
+                <a:latin typeface="Arial"/>
+                <a:ea typeface="Arial"/>
+                <a:cs typeface="Arial"/>
+              </a:defRPr>
+            </a:pPr>
+            <a:r>
+              <a:rPr sz="1800" b="1">
+                <a:solidFill>
+                  <a:srgbClr val="17212B"/>
+                </a:solidFill>
+                <a:latin typeface="Arial"/>
+                <a:ea typeface="Arial"/>
+                <a:cs typeface="Arial"/>
+              </a:rPr>
+              <a:t>Source:</a:t>
+            </a:r>
+            <a:r>
+              <a:rPr sz="1800" b="0">
+                <a:solidFill>
+                  <a:srgbClr val="17212B"/>
+                </a:solidFill>
+                <a:latin typeface="Arial"/>
+                <a:ea typeface="Arial"/>
+                <a:cs typeface="Arial"/>
+              </a:rPr>
+              <a:t> NOAA SWPC one-minute estimated planetary K-index JSON.</a:t>
+            </a:r>
+          </a:p>
+        </p:txBody>
+      </p:sp>
+      <p:sp>
+        <p:nvSpPr>
+          <p:cNvPr id="4" name="s3-topic">
+            <a:extLst xmlns:a="http://schemas.openxmlformats.org/drawingml/2006/main">
+              <a:ext uri="{FF2B5EF4-FFF2-40B4-BE49-F238E27FC236}">
+                <a16:creationId xmlns:a16="http://schemas.microsoft.com/office/drawing/2014/main" id="{48D87ECB-610D-4A0F-B07F-45AC5F28BE3D}"/>
+              </a:ext>
+            </a:extLst>
+          </p:cNvPr>
+          <p:cNvSpPr>
+            <a:spLocks xmlns:a="http://schemas.openxmlformats.org/drawingml/2006/main" noGrp="1"/>
+          </p:cNvSpPr>
+          <p:nvPr/>
+        </p:nvSpPr>
+        <p:spPr>
+          <a:xfrm xmlns:a="http://schemas.openxmlformats.org/drawingml/2006/main">
+            <a:off x="933450" y="3495675"/>
+            <a:ext cx="5810250" cy="819150"/>
+          </a:xfrm>
+          <a:prstGeom xmlns:a="http://schemas.openxmlformats.org/drawingml/2006/main" prst="rect">
+            <a:avLst/>
+          </a:prstGeom>
+          <a:noFill xmlns:a="http://schemas.openxmlformats.org/drawingml/2006/main"/>
+          <a:ln xmlns:a="http://schemas.openxmlformats.org/drawingml/2006/main" w="0">
+            <a:noFill/>
+            <a:prstDash val="solid"/>
+          </a:ln>
+        </p:spPr>
+        <p:txBody>
+          <a:bodyPr xmlns:a="http://schemas.openxmlformats.org/drawingml/2006/main" wrap="square" lIns="0" tIns="0" rIns="0" bIns="0" anchor="t">
+            <a:normAutofit fontScale="100000"/>
+          </a:bodyPr>
+          <a:lstStyle xmlns:a="http://schemas.openxmlformats.org/drawingml/2006/main"/>
+          <a:p xmlns:a="http://schemas.openxmlformats.org/drawingml/2006/main">
+            <a:pPr algn="l">
+              <a:lnSpc>
+                <a:spcPct val="115000"/>
+              </a:lnSpc>
+              <a:buNone/>
+              <a:defRPr sz="1800" b="0">
+                <a:solidFill>
+                  <a:srgbClr val="17212B"/>
+                </a:solidFill>
+                <a:latin typeface="Arial"/>
+                <a:ea typeface="Arial"/>
+                <a:cs typeface="Arial"/>
+              </a:defRPr>
+            </a:pPr>
+            <a:r>
+              <a:rPr sz="1800" b="1">
+                <a:solidFill>
+                  <a:srgbClr val="17212B"/>
+                </a:solidFill>
+                <a:latin typeface="Arial"/>
+                <a:ea typeface="Arial"/>
+                <a:cs typeface="Arial"/>
+              </a:rPr>
+              <a:t>Topic:</a:t>
+            </a:r>
+            <a:r>
+              <a:rPr sz="1800" b="0">
+                <a:solidFill>
+                  <a:srgbClr val="17212B"/>
+                </a:solidFill>
+                <a:latin typeface="Arial"/>
+                <a:ea typeface="Arial"/>
+                <a:cs typeface="Arial"/>
+              </a:rPr>
+              <a:t> kp_observations</a:t>
+            </a:r>
+          </a:p>
+          <a:p xmlns:a="http://schemas.openxmlformats.org/drawingml/2006/main">
+            <a:pPr algn="l">
+              <a:lnSpc>
+                <a:spcPct val="115000"/>
+              </a:lnSpc>
+              <a:buNone/>
+              <a:defRPr sz="1800" b="0">
+                <a:solidFill>
+                  <a:srgbClr val="17212B"/>
+                </a:solidFill>
+                <a:latin typeface="Arial"/>
+                <a:ea typeface="Arial"/>
+                <a:cs typeface="Arial"/>
+              </a:defRPr>
+            </a:pPr>
+            <a:r>
+              <a:rPr sz="1800" b="1">
+                <a:solidFill>
+                  <a:srgbClr val="17212B"/>
+                </a:solidFill>
+                <a:latin typeface="Arial"/>
+                <a:ea typeface="Arial"/>
+                <a:cs typeface="Arial"/>
+              </a:rPr>
+              <a:t>Key:</a:t>
+            </a:r>
+            <a:r>
+              <a:rPr sz="1800" b="0">
+                <a:solidFill>
+                  <a:srgbClr val="17212B"/>
+                </a:solidFill>
+                <a:latin typeface="Arial"/>
+                <a:ea typeface="Arial"/>
+                <a:cs typeface="Arial"/>
+              </a:rPr>
+              <a:t> planetary_kp</a:t>
+            </a:r>
+          </a:p>
+        </p:txBody>
+      </p:sp>
+      <p:sp>
+        <p:nvSpPr>
+          <p:cNvPr id="5" name="s3-validation">
+            <a:extLst xmlns:a="http://schemas.openxmlformats.org/drawingml/2006/main">
+              <a:ext uri="{FF2B5EF4-FFF2-40B4-BE49-F238E27FC236}">
+                <a16:creationId xmlns:a16="http://schemas.microsoft.com/office/drawing/2014/main" id="{3506B9F2-8F59-4A99-BFB1-979DCB585CB5}"/>
+              </a:ext>
+            </a:extLst>
+          </p:cNvPr>
+          <p:cNvSpPr>
+            <a:spLocks xmlns:a="http://schemas.openxmlformats.org/drawingml/2006/main" noGrp="1"/>
+          </p:cNvSpPr>
+          <p:nvPr/>
+        </p:nvSpPr>
+        <p:spPr>
+          <a:xfrm xmlns:a="http://schemas.openxmlformats.org/drawingml/2006/main">
+            <a:off x="933450" y="4552950"/>
+            <a:ext cx="5810250" cy="857250"/>
+          </a:xfrm>
+          <a:prstGeom xmlns:a="http://schemas.openxmlformats.org/drawingml/2006/main" prst="rect">
+            <a:avLst/>
+          </a:prstGeom>
+          <a:noFill xmlns:a="http://schemas.openxmlformats.org/drawingml/2006/main"/>
+          <a:ln xmlns:a="http://schemas.openxmlformats.org/drawingml/2006/main" w="0">
+            <a:noFill/>
+            <a:prstDash val="solid"/>
+          </a:ln>
+        </p:spPr>
+        <p:txBody>
+          <a:bodyPr xmlns:a="http://schemas.openxmlformats.org/drawingml/2006/main" wrap="square" lIns="0" tIns="0" rIns="0" bIns="0" anchor="t">
+            <a:normAutofit fontScale="100000"/>
+          </a:bodyPr>
+          <a:lstStyle xmlns:a="http://schemas.openxmlformats.org/drawingml/2006/main"/>
+          <a:p xmlns:a="http://schemas.openxmlformats.org/drawingml/2006/main">
+            <a:pPr algn="l">
+              <a:lnSpc>
+                <a:spcPct val="115000"/>
+              </a:lnSpc>
+              <a:buNone/>
+              <a:defRPr sz="1800" b="0">
+                <a:solidFill>
+                  <a:srgbClr val="17212B"/>
+                </a:solidFill>
+                <a:latin typeface="Arial"/>
+                <a:ea typeface="Arial"/>
+                <a:cs typeface="Arial"/>
+              </a:defRPr>
+            </a:pPr>
+            <a:r>
+              <a:rPr sz="1800" b="1">
+                <a:solidFill>
+                  <a:srgbClr val="17212B"/>
+                </a:solidFill>
+                <a:latin typeface="Arial"/>
+                <a:ea typeface="Arial"/>
+                <a:cs typeface="Arial"/>
+              </a:rPr>
+              <a:t>Validation:</a:t>
+            </a:r>
+            <a:r>
+              <a:rPr sz="1800" b="0">
+                <a:solidFill>
+                  <a:srgbClr val="17212B"/>
+                </a:solidFill>
+                <a:latin typeface="Arial"/>
+                <a:ea typeface="Arial"/>
+                <a:cs typeface="Arial"/>
+              </a:rPr>
+              <a:t> UTC timestamps, Kp from 0–9, approved provenance, exact four-field contract.</a:t>
+            </a:r>
+          </a:p>
+        </p:txBody>
+      </p:sp>
+      <p:sp>
+        <p:nvSpPr>
+          <p:cNvPr id="6" name="s3-source-note">
+            <a:extLst xmlns:a="http://schemas.openxmlformats.org/drawingml/2006/main">
+              <a:ext uri="{FF2B5EF4-FFF2-40B4-BE49-F238E27FC236}">
+                <a16:creationId xmlns:a16="http://schemas.microsoft.com/office/drawing/2014/main" id="{A598F622-A3EB-472A-8A00-D6AD41310C7D}"/>
+              </a:ext>
+            </a:extLst>
+          </p:cNvPr>
+          <p:cNvSpPr>
+            <a:spLocks xmlns:a="http://schemas.openxmlformats.org/drawingml/2006/main" noGrp="1"/>
+          </p:cNvSpPr>
+          <p:nvPr/>
+        </p:nvSpPr>
+        <p:spPr>
+          <a:xfrm xmlns:a="http://schemas.openxmlformats.org/drawingml/2006/main">
+            <a:off x="933450" y="5619750"/>
+            <a:ext cx="5810250" cy="933450"/>
+          </a:xfrm>
+          <a:prstGeom xmlns:a="http://schemas.openxmlformats.org/drawingml/2006/main" prst="rect">
+            <a:avLst/>
+          </a:prstGeom>
+          <a:noFill xmlns:a="http://schemas.openxmlformats.org/drawingml/2006/main"/>
+          <a:ln xmlns:a="http://schemas.openxmlformats.org/drawingml/2006/main" w="0">
+            <a:noFill/>
+            <a:prstDash val="solid"/>
+          </a:ln>
+        </p:spPr>
+        <p:txBody>
+          <a:bodyPr xmlns:a="http://schemas.openxmlformats.org/drawingml/2006/main" wrap="square" lIns="0" tIns="0" rIns="0" bIns="0" anchor="t">
+            <a:normAutofit fontScale="100000"/>
+          </a:bodyPr>
+          <a:lstStyle xmlns:a="http://schemas.openxmlformats.org/drawingml/2006/main"/>
+          <a:p xmlns:a="http://schemas.openxmlformats.org/drawingml/2006/main">
+            <a:pPr algn="l">
+              <a:lnSpc>
+                <a:spcPct val="115000"/>
+              </a:lnSpc>
+              <a:buNone/>
+              <a:defRPr sz="1350" b="0">
+                <a:solidFill>
+                  <a:srgbClr val="617080"/>
+                </a:solidFill>
+                <a:latin typeface="Arial"/>
+                <a:ea typeface="Arial"/>
+                <a:cs typeface="Arial"/>
+              </a:defRPr>
+            </a:pPr>
+            <a:r>
+              <a:rPr sz="1350" b="0">
+                <a:solidFill>
+                  <a:srgbClr val="617080"/>
+                </a:solidFill>
+                <a:latin typeface="Arial"/>
+                <a:ea typeface="Arial"/>
+                <a:cs typeface="Arial"/>
+              </a:rPr>
+              <a:t>The alert demo uses a clearly labeled synthetic replay because live conditions were quiet. A committed raw NOAA sample verifies the source shape.</a:t>
+            </a:r>
+          </a:p>
+        </p:txBody>
+      </p:sp>
+      <p:sp>
+        <p:nvSpPr>
+          <p:cNvPr id="7" name="s3-event-box">
+            <a:extLst xmlns:a="http://schemas.openxmlformats.org/drawingml/2006/main">
+              <a:ext uri="{FF2B5EF4-FFF2-40B4-BE49-F238E27FC236}">
+                <a16:creationId xmlns:a16="http://schemas.microsoft.com/office/drawing/2014/main" id="{E780305C-6125-4193-A0EA-BC663EA7527C}"/>
+              </a:ext>
+            </a:extLst>
+          </p:cNvPr>
+          <p:cNvSpPr>
+            <a:spLocks xmlns:a="http://schemas.openxmlformats.org/drawingml/2006/main" noGrp="1"/>
+          </p:cNvSpPr>
+          <p:nvPr/>
+        </p:nvSpPr>
+        <p:spPr>
+          <a:xfrm xmlns:a="http://schemas.openxmlformats.org/drawingml/2006/main">
+            <a:off x="7667625" y="2457450"/>
+            <a:ext cx="6638925" cy="3667125"/>
+          </a:xfrm>
+          <a:prstGeom xmlns:a="http://schemas.openxmlformats.org/drawingml/2006/main" prst="roundRect">
+            <a:avLst>
+              <a:gd name="adj" fmla="val 3636"/>
+            </a:avLst>
+          </a:prstGeom>
+          <a:solidFill xmlns:a="http://schemas.openxmlformats.org/drawingml/2006/main">
+            <a:srgbClr val="102A43"/>
+          </a:solidFill>
+          <a:ln xmlns:a="http://schemas.openxmlformats.org/drawingml/2006/main" w="0">
+            <a:noFill/>
+            <a:prstDash val="solid"/>
+          </a:ln>
+        </p:spPr>
+      </p:sp>
+      <p:sp>
+        <p:nvSpPr>
+          <p:cNvPr id="8" name="s3-event-code">
+            <a:extLst xmlns:a="http://schemas.openxmlformats.org/drawingml/2006/main">
+              <a:ext uri="{FF2B5EF4-FFF2-40B4-BE49-F238E27FC236}">
+                <a16:creationId xmlns:a16="http://schemas.microsoft.com/office/drawing/2014/main" id="{AED31649-A0B8-461E-9AF3-84A47EB33F23}"/>
+              </a:ext>
+            </a:extLst>
+          </p:cNvPr>
+          <p:cNvSpPr>
+            <a:spLocks xmlns:a="http://schemas.openxmlformats.org/drawingml/2006/main" noGrp="1"/>
+          </p:cNvSpPr>
+          <p:nvPr/>
+        </p:nvSpPr>
+        <p:spPr>
+          <a:xfrm xmlns:a="http://schemas.openxmlformats.org/drawingml/2006/main">
+            <a:off x="8058150" y="2781300"/>
+            <a:ext cx="5857875" cy="3000375"/>
+          </a:xfrm>
+          <a:prstGeom xmlns:a="http://schemas.openxmlformats.org/drawingml/2006/main" prst="rect">
+            <a:avLst/>
+          </a:prstGeom>
+          <a:noFill xmlns:a="http://schemas.openxmlformats.org/drawingml/2006/main"/>
+          <a:ln xmlns:a="http://schemas.openxmlformats.org/drawingml/2006/main" w="0">
+            <a:noFill/>
+            <a:prstDash val="solid"/>
+          </a:ln>
+        </p:spPr>
+        <p:txBody>
+          <a:bodyPr xmlns:a="http://schemas.openxmlformats.org/drawingml/2006/main" wrap="square" lIns="0" tIns="0" rIns="0" bIns="0" anchor="t">
+            <a:normAutofit fontScale="100000"/>
+          </a:bodyPr>
+          <a:lstStyle xmlns:a="http://schemas.openxmlformats.org/drawingml/2006/main"/>
+          <a:p xmlns:a="http://schemas.openxmlformats.org/drawingml/2006/main">
+            <a:pPr algn="l">
+              <a:lnSpc>
+                <a:spcPct val="118000"/>
+              </a:lnSpc>
+              <a:buNone/>
+              <a:defRPr sz="1425" b="0">
+                <a:solidFill>
+                  <a:srgbClr val="EAF1F7"/>
+                </a:solidFill>
+                <a:latin typeface="Courier New"/>
+                <a:ea typeface="Courier New"/>
+                <a:cs typeface="Courier New"/>
+              </a:defRPr>
+            </a:pPr>
+            <a:r>
+              <a:rPr sz="1425" b="0">
+                <a:solidFill>
+                  <a:srgbClr val="EAF1F7"/>
+                </a:solidFill>
+                <a:latin typeface="Courier New"/>
+                <a:ea typeface="Courier New"/>
+                <a:cs typeface="Courier New"/>
+              </a:rPr>
+              <a:t>{</a:t>
+            </a:r>
+          </a:p>
+          <a:p xmlns:a="http://schemas.openxmlformats.org/drawingml/2006/main">
+            <a:pPr algn="l">
+              <a:lnSpc>
+                <a:spcPct val="118000"/>
+              </a:lnSpc>
+              <a:buNone/>
+              <a:defRPr sz="1425" b="0">
+                <a:solidFill>
+                  <a:srgbClr val="EAF1F7"/>
+                </a:solidFill>
+                <a:latin typeface="Courier New"/>
+                <a:ea typeface="Courier New"/>
+                <a:cs typeface="Courier New"/>
+              </a:defRPr>
+            </a:pPr>
+            <a:r>
+              <a:rPr sz="1425" b="0">
+                <a:solidFill>
+                  <a:srgbClr val="EAF1F7"/>
+                </a:solidFill>
+                <a:latin typeface="Courier New"/>
+                <a:ea typeface="Courier New"/>
+                <a:cs typeface="Courier New"/>
+              </a:rPr>
+              <a:t>  "time_tag": "2026-08-11T00:10:00Z",</a:t>
+            </a:r>
+          </a:p>
+          <a:p xmlns:a="http://schemas.openxmlformats.org/drawingml/2006/main">
+            <a:pPr algn="l">
+              <a:lnSpc>
+                <a:spcPct val="118000"/>
+              </a:lnSpc>
+              <a:buNone/>
+              <a:defRPr sz="1425" b="0">
+                <a:solidFill>
+                  <a:srgbClr val="EAF1F7"/>
+                </a:solidFill>
+                <a:latin typeface="Courier New"/>
+                <a:ea typeface="Courier New"/>
+                <a:cs typeface="Courier New"/>
+              </a:defRPr>
+            </a:pPr>
+            <a:r>
+              <a:rPr sz="1425" b="0">
+                <a:solidFill>
+                  <a:srgbClr val="EAF1F7"/>
+                </a:solidFill>
+                <a:latin typeface="Courier New"/>
+                <a:ea typeface="Courier New"/>
+                <a:cs typeface="Courier New"/>
+              </a:rPr>
+              <a:t>  "kp_value": 6.3,</a:t>
+            </a:r>
+          </a:p>
+          <a:p xmlns:a="http://schemas.openxmlformats.org/drawingml/2006/main">
+            <a:pPr algn="l">
+              <a:lnSpc>
+                <a:spcPct val="118000"/>
+              </a:lnSpc>
+              <a:buNone/>
+              <a:defRPr sz="1425" b="0">
+                <a:solidFill>
+                  <a:srgbClr val="EAF1F7"/>
+                </a:solidFill>
+                <a:latin typeface="Courier New"/>
+                <a:ea typeface="Courier New"/>
+                <a:cs typeface="Courier New"/>
+              </a:defRPr>
+            </a:pPr>
+            <a:r>
+              <a:rPr sz="1425" b="0">
+                <a:solidFill>
+                  <a:srgbClr val="EAF1F7"/>
+                </a:solidFill>
+                <a:latin typeface="Courier New"/>
+                <a:ea typeface="Courier New"/>
+                <a:cs typeface="Courier New"/>
+              </a:rPr>
+              <a:t>  "source": "synthetic://kp-threshold-fixture",</a:t>
+            </a:r>
+          </a:p>
+          <a:p xmlns:a="http://schemas.openxmlformats.org/drawingml/2006/main">
+            <a:pPr algn="l">
+              <a:lnSpc>
+                <a:spcPct val="118000"/>
+              </a:lnSpc>
+              <a:buNone/>
+              <a:defRPr sz="1425" b="0">
+                <a:solidFill>
+                  <a:srgbClr val="EAF1F7"/>
+                </a:solidFill>
+                <a:latin typeface="Courier New"/>
+                <a:ea typeface="Courier New"/>
+                <a:cs typeface="Courier New"/>
+              </a:defRPr>
+            </a:pPr>
+            <a:r>
+              <a:rPr sz="1425" b="0">
+                <a:solidFill>
+                  <a:srgbClr val="EAF1F7"/>
+                </a:solidFill>
+                <a:latin typeface="Courier New"/>
+                <a:ea typeface="Courier New"/>
+                <a:cs typeface="Courier New"/>
+              </a:rPr>
+              <a:t>  "ingested_at": "2026-08-11T00:10:05Z"</a:t>
+            </a:r>
+          </a:p>
+          <a:p xmlns:a="http://schemas.openxmlformats.org/drawingml/2006/main">
+            <a:pPr algn="l">
+              <a:lnSpc>
+                <a:spcPct val="118000"/>
+              </a:lnSpc>
+              <a:buNone/>
+              <a:defRPr sz="1425" b="0">
+                <a:solidFill>
+                  <a:srgbClr val="EAF1F7"/>
+                </a:solidFill>
+                <a:latin typeface="Courier New"/>
+                <a:ea typeface="Courier New"/>
+                <a:cs typeface="Courier New"/>
+              </a:defRPr>
+            </a:pPr>
+            <a:r>
+              <a:rPr sz="1425" b="0">
+                <a:solidFill>
+                  <a:srgbClr val="EAF1F7"/>
+                </a:solidFill>
+                <a:latin typeface="Courier New"/>
+                <a:ea typeface="Courier New"/>
+                <a:cs typeface="Courier New"/>
+              </a:rPr>
+              <a:t>}</a:t>
+            </a:r>
+          </a:p>
+        </p:txBody>
+      </p:sp>
+      <p:sp>
+        <p:nvSpPr>
+          <p:cNvPr id="9" name="s3-record-caption">
+            <a:extLst xmlns:a="http://schemas.openxmlformats.org/drawingml/2006/main">
+              <a:ext uri="{FF2B5EF4-FFF2-40B4-BE49-F238E27FC236}">
+                <a16:creationId xmlns:a16="http://schemas.microsoft.com/office/drawing/2014/main" id="{573989E3-DF71-4774-9339-17CE859B1269}"/>
+              </a:ext>
+            </a:extLst>
+          </p:cNvPr>
+          <p:cNvSpPr>
+            <a:spLocks xmlns:a="http://schemas.openxmlformats.org/drawingml/2006/main" noGrp="1"/>
+          </p:cNvSpPr>
+          <p:nvPr/>
+        </p:nvSpPr>
+        <p:spPr>
+          <a:xfrm xmlns:a="http://schemas.openxmlformats.org/drawingml/2006/main">
+            <a:off x="7667625" y="6324600"/>
+            <a:ext cx="6638925" cy="381000"/>
+          </a:xfrm>
+          <a:prstGeom xmlns:a="http://schemas.openxmlformats.org/drawingml/2006/main" prst="rect">
+            <a:avLst/>
+          </a:prstGeom>
+          <a:noFill xmlns:a="http://schemas.openxmlformats.org/drawingml/2006/main"/>
+          <a:ln xmlns:a="http://schemas.openxmlformats.org/drawingml/2006/main" w="0">
+            <a:noFill/>
+            <a:prstDash val="solid"/>
+          </a:ln>
+        </p:spPr>
+        <p:txBody>
+          <a:bodyPr xmlns:a="http://schemas.openxmlformats.org/drawingml/2006/main" wrap="square" lIns="0" tIns="0" rIns="0" bIns="0" anchor="t">
+            <a:normAutofit fontScale="100000"/>
+          </a:bodyPr>
+          <a:lstStyle xmlns:a="http://schemas.openxmlformats.org/drawingml/2006/main"/>
+          <a:p xmlns:a="http://schemas.openxmlformats.org/drawingml/2006/main">
+            <a:pPr algn="l">
+              <a:lnSpc>
+                <a:spcPct val="115000"/>
+              </a:lnSpc>
+              <a:buNone/>
+              <a:defRPr sz="1350" b="0">
+                <a:solidFill>
+                  <a:srgbClr val="617080"/>
+                </a:solidFill>
+                <a:latin typeface="Arial"/>
+                <a:ea typeface="Arial"/>
+                <a:cs typeface="Arial"/>
+              </a:defRPr>
+            </a:pPr>
+            <a:r>
+              <a:rPr sz="1350" b="0">
+                <a:solidFill>
+                  <a:srgbClr val="617080"/>
+                </a:solidFill>
+                <a:latin typeface="Arial"/>
+                <a:ea typeface="Arial"/>
+                <a:cs typeface="Arial"/>
+              </a:rPr>
+              <a:t>Representative record: the first event that creates an alert.</a:t>
+            </a:r>
+          </a:p>
+        </p:txBody>
+      </p:sp>
+      <p:sp>
+        <p:nvSpPr>
+          <p:cNvPr id="10" name="footer-3-label">
+            <a:extLst xmlns:a="http://schemas.openxmlformats.org/drawingml/2006/main">
+              <a:ext uri="{FF2B5EF4-FFF2-40B4-BE49-F238E27FC236}">
+                <a16:creationId xmlns:a16="http://schemas.microsoft.com/office/drawing/2014/main" id="{129CE0EF-5D1E-4948-BF66-FBD70BF8E155}"/>
+              </a:ext>
+            </a:extLst>
+          </p:cNvPr>
+          <p:cNvSpPr>
+            <a:spLocks xmlns:a="http://schemas.openxmlformats.org/drawingml/2006/main" noGrp="1"/>
+          </p:cNvSpPr>
+          <p:nvPr/>
+        </p:nvSpPr>
+        <p:spPr>
+          <a:xfrm xmlns:a="http://schemas.openxmlformats.org/drawingml/2006/main">
+            <a:off x="933450" y="8191500"/>
+            <a:ext cx="11906250" cy="209550"/>
+          </a:xfrm>
+          <a:prstGeom xmlns:a="http://schemas.openxmlformats.org/drawingml/2006/main" prst="rect">
+            <a:avLst/>
+          </a:prstGeom>
+          <a:noFill xmlns:a="http://schemas.openxmlformats.org/drawingml/2006/main"/>
+          <a:ln xmlns:a="http://schemas.openxmlformats.org/drawingml/2006/main" w="0">
+            <a:noFill/>
+            <a:prstDash val="solid"/>
+          </a:ln>
+        </p:spPr>
+        <p:txBody>
+          <a:bodyPr xmlns:a="http://schemas.openxmlformats.org/drawingml/2006/main" wrap="square" lIns="0" tIns="0" rIns="0" bIns="0" anchor="t">
+            <a:normAutofit fontScale="100000"/>
+          </a:bodyPr>
+          <a:lstStyle xmlns:a="http://schemas.openxmlformats.org/drawingml/2006/main"/>
+          <a:p xmlns:a="http://schemas.openxmlformats.org/drawingml/2006/main">
+            <a:pPr algn="l">
+              <a:defRPr sz="1125" b="0">
+                <a:solidFill>
+                  <a:srgbClr val="8894A0"/>
+                </a:solidFill>
+                <a:latin typeface="Arial"/>
+                <a:ea typeface="Arial"/>
+                <a:cs typeface="Arial"/>
+              </a:defRPr>
+            </a:pPr>
+            <a:r>
+              <a:rPr sz="1125" b="0">
+                <a:solidFill>
+                  <a:srgbClr val="8894A0"/>
+                </a:solidFill>
+                <a:latin typeface="Arial"/>
+                <a:ea typeface="Arial"/>
+                <a:cs typeface="Arial"/>
+              </a:rPr>
+              <a:t>Source · Kafka event · key fields · representative record</a:t>
+            </a:r>
+          </a:p>
+        </p:txBody>
+      </p:sp>
+      <p:sp>
+        <p:nvSpPr>
+          <p:cNvPr id="11" name="footer-3-number">
+            <a:extLst xmlns:a="http://schemas.openxmlformats.org/drawingml/2006/main">
+              <a:ext uri="{FF2B5EF4-FFF2-40B4-BE49-F238E27FC236}">
+                <a16:creationId xmlns:a16="http://schemas.microsoft.com/office/drawing/2014/main" id="{3E84E808-9B26-44B0-A69C-51C5C103DAB8}"/>
+              </a:ext>
+            </a:extLst>
+          </p:cNvPr>
+          <p:cNvSpPr>
+            <a:spLocks xmlns:a="http://schemas.openxmlformats.org/drawingml/2006/main" noGrp="1"/>
+          </p:cNvSpPr>
+          <p:nvPr/>
+        </p:nvSpPr>
+        <p:spPr>
+          <a:xfrm xmlns:a="http://schemas.openxmlformats.org/drawingml/2006/main">
+            <a:off x="13811250" y="8191500"/>
+            <a:ext cx="495300" cy="209550"/>
+          </a:xfrm>
+          <a:prstGeom xmlns:a="http://schemas.openxmlformats.org/drawingml/2006/main" prst="rect">
+            <a:avLst/>
+          </a:prstGeom>
+          <a:noFill xmlns:a="http://schemas.openxmlformats.org/drawingml/2006/main"/>
+          <a:ln xmlns:a="http://schemas.openxmlformats.org/drawingml/2006/main" w="0">
+            <a:noFill/>
+            <a:prstDash val="solid"/>
+          </a:ln>
+        </p:spPr>
+        <p:txBody>
+          <a:bodyPr xmlns:a="http://schemas.openxmlformats.org/drawingml/2006/main" wrap="square" lIns="0" tIns="0" rIns="0" bIns="0" anchor="t">
+            <a:normAutofit fontScale="100000"/>
+          </a:bodyPr>
+          <a:lstStyle xmlns:a="http://schemas.openxmlformats.org/drawingml/2006/main"/>
+          <a:p xmlns:a="http://schemas.openxmlformats.org/drawingml/2006/main">
+            <a:pPr algn="r">
+              <a:defRPr sz="1125" b="0">
+                <a:solidFill>
+                  <a:srgbClr val="8894A0"/>
+                </a:solidFill>
+                <a:latin typeface="Arial"/>
+                <a:ea typeface="Arial"/>
+                <a:cs typeface="Arial"/>
+              </a:defRPr>
+            </a:pPr>
+            <a:r>
+              <a:rPr sz="1125" b="0">
+                <a:solidFill>
+                  <a:srgbClr val="8894A0"/>
+                </a:solidFill>
+                <a:latin typeface="Arial"/>
+                <a:ea typeface="Arial"/>
+                <a:cs typeface="Arial"/>
+              </a:rPr>
+              <a:t>3</a:t>
+            </a:r>
+          </a:p>
+        </p:txBody>
+      </p:sp>
     </p:spTree>
     <p:extLst>
       <p:ext uri="{BB962C8B-B14F-4D97-AF65-F5344CB8AC3E}">
-        <p14:creationId xmlns:p14="http://schemas.microsoft.com/office/powerpoint/2010/main" val="1739801694"/>
+        <p14:creationId xmlns:p14="http://schemas.microsoft.com/office/powerpoint/2010/main" val="750122894"/>
       </p:ext>
     </p:extLst>
   </p:cSld>
@@ -1669,6 +3464,13 @@
 <file path=ppt/slides/slide4.xml><?xml version="1.0" encoding="utf-8"?>
 <p:sld xmlns:p="http://schemas.openxmlformats.org/presentationml/2006/main">
   <p:cSld>
+    <p:bg>
+      <p:bgPr>
+        <a:solidFill xmlns:a="http://schemas.openxmlformats.org/drawingml/2006/main">
+          <a:srgbClr val="F8F6F1"/>
+        </a:solidFill>
+      </p:bgPr>
+    </p:bg>
     <p:spTree>
       <p:nvGrpSpPr>
         <p:cNvPr id="1" name=""/>
@@ -1678,32 +3480,1758 @@
       <p:grpSpPr>
         <a:xfrm xmlns:a="http://schemas.openxmlformats.org/drawingml/2006/main"/>
       </p:grpSpPr>
-      <p:pic>
-        <p:nvPicPr>
-          <p:cNvPr id="2" name=""/>
-          <p:cNvPicPr>
-            <a:picLocks xmlns:a="http://schemas.openxmlformats.org/drawingml/2006/main" noChangeAspect="1"/>
-          </p:cNvPicPr>
-          <p:nvPr/>
-        </p:nvPicPr>
-        <p:blipFill>
-          <a:blip xmlns:r="http://schemas.openxmlformats.org/officeDocument/2006/relationships" xmlns:a="http://schemas.openxmlformats.org/drawingml/2006/main" r:embed="R68820754421e4031"/>
-          <a:stretch xmlns:a="http://schemas.openxmlformats.org/drawingml/2006/main"/>
-        </p:blipFill>
-        <p:spPr>
-          <a:xfrm xmlns:a="http://schemas.openxmlformats.org/drawingml/2006/main">
-            <a:off x="0" y="0"/>
-            <a:ext cx="15240000" cy="8572500"/>
-          </a:xfrm>
-          <a:prstGeom xmlns:a="http://schemas.openxmlformats.org/drawingml/2006/main" prst="rect">
-            <a:avLst/>
-          </a:prstGeom>
-        </p:spPr>
-      </p:pic>
+      <p:sp>
+        <p:nvSpPr>
+          <p:cNvPr id="33" name="eyebrow-Implemented archit">
+            <a:extLst xmlns:a="http://schemas.openxmlformats.org/drawingml/2006/main">
+              <a:ext uri="{FF2B5EF4-FFF2-40B4-BE49-F238E27FC236}">
+                <a16:creationId xmlns:a16="http://schemas.microsoft.com/office/drawing/2014/main" id="{D997FE1E-369F-4357-9D2D-0B9F83830F4F}"/>
+              </a:ext>
+            </a:extLst>
+          </p:cNvPr>
+          <p:cNvSpPr>
+            <a:spLocks xmlns:a="http://schemas.openxmlformats.org/drawingml/2006/main" noGrp="1"/>
+          </p:cNvSpPr>
+          <p:nvPr/>
+        </p:nvSpPr>
+        <p:spPr>
+          <a:xfrm xmlns:a="http://schemas.openxmlformats.org/drawingml/2006/main">
+            <a:off x="933450" y="457200"/>
+            <a:ext cx="9048750" cy="285750"/>
+          </a:xfrm>
+          <a:prstGeom xmlns:a="http://schemas.openxmlformats.org/drawingml/2006/main" prst="rect">
+            <a:avLst/>
+          </a:prstGeom>
+          <a:noFill xmlns:a="http://schemas.openxmlformats.org/drawingml/2006/main"/>
+          <a:ln xmlns:a="http://schemas.openxmlformats.org/drawingml/2006/main" w="0">
+            <a:noFill/>
+            <a:prstDash val="solid"/>
+          </a:ln>
+        </p:spPr>
+        <p:txBody>
+          <a:bodyPr xmlns:a="http://schemas.openxmlformats.org/drawingml/2006/main" wrap="square" lIns="0" tIns="0" rIns="0" bIns="0" anchor="t">
+            <a:normAutofit fontScale="100000"/>
+          </a:bodyPr>
+          <a:lstStyle xmlns:a="http://schemas.openxmlformats.org/drawingml/2006/main"/>
+          <a:p xmlns:a="http://schemas.openxmlformats.org/drawingml/2006/main">
+            <a:pPr algn="l">
+              <a:defRPr sz="1275" b="1">
+                <a:solidFill>
+                  <a:srgbClr val="2F6FED"/>
+                </a:solidFill>
+                <a:latin typeface="Arial"/>
+                <a:ea typeface="Arial"/>
+                <a:cs typeface="Arial"/>
+              </a:defRPr>
+            </a:pPr>
+            <a:r>
+              <a:rPr sz="1275" b="1">
+                <a:solidFill>
+                  <a:srgbClr val="2F6FED"/>
+                </a:solidFill>
+                <a:latin typeface="Arial"/>
+                <a:ea typeface="Arial"/>
+                <a:cs typeface="Arial"/>
+              </a:rPr>
+              <a:t>IMPLEMENTED ARCHITECTURE</a:t>
+            </a:r>
+          </a:p>
+        </p:txBody>
+      </p:sp>
+      <p:sp>
+        <p:nvSpPr>
+          <p:cNvPr id="2" name="title-Kafka separates va">
+            <a:extLst xmlns:a="http://schemas.openxmlformats.org/drawingml/2006/main">
+              <a:ext uri="{FF2B5EF4-FFF2-40B4-BE49-F238E27FC236}">
+                <a16:creationId xmlns:a16="http://schemas.microsoft.com/office/drawing/2014/main" id="{BB1CBB83-CB14-463C-B0E1-39D82EE0F759}"/>
+              </a:ext>
+            </a:extLst>
+          </p:cNvPr>
+          <p:cNvSpPr>
+            <a:spLocks xmlns:a="http://schemas.openxmlformats.org/drawingml/2006/main" noGrp="1"/>
+          </p:cNvSpPr>
+          <p:nvPr/>
+        </p:nvSpPr>
+        <p:spPr>
+          <a:xfrm xmlns:a="http://schemas.openxmlformats.org/drawingml/2006/main">
+            <a:off x="933450" y="838200"/>
+            <a:ext cx="13373100" cy="1047750"/>
+          </a:xfrm>
+          <a:prstGeom xmlns:a="http://schemas.openxmlformats.org/drawingml/2006/main" prst="rect">
+            <a:avLst/>
+          </a:prstGeom>
+          <a:noFill xmlns:a="http://schemas.openxmlformats.org/drawingml/2006/main"/>
+          <a:ln xmlns:a="http://schemas.openxmlformats.org/drawingml/2006/main" w="0">
+            <a:noFill/>
+            <a:prstDash val="solid"/>
+          </a:ln>
+        </p:spPr>
+        <p:txBody>
+          <a:bodyPr xmlns:a="http://schemas.openxmlformats.org/drawingml/2006/main" wrap="square" lIns="0" tIns="0" rIns="0" bIns="0" anchor="t">
+            <a:normAutofit fontScale="100000"/>
+          </a:bodyPr>
+          <a:lstStyle xmlns:a="http://schemas.openxmlformats.org/drawingml/2006/main"/>
+          <a:p xmlns:a="http://schemas.openxmlformats.org/drawingml/2006/main">
+            <a:pPr algn="l">
+              <a:lnSpc>
+                <a:spcPct val="96000"/>
+              </a:lnSpc>
+              <a:buNone/>
+              <a:defRPr sz="3675" b="1">
+                <a:solidFill>
+                  <a:srgbClr val="102A43"/>
+                </a:solidFill>
+                <a:latin typeface="Arial"/>
+                <a:ea typeface="Arial"/>
+                <a:cs typeface="Arial"/>
+              </a:defRPr>
+            </a:pPr>
+            <a:r>
+              <a:rPr sz="3675" b="1">
+                <a:solidFill>
+                  <a:srgbClr val="102A43"/>
+                </a:solidFill>
+                <a:latin typeface="Arial"/>
+                <a:ea typeface="Arial"/>
+                <a:cs typeface="Arial"/>
+              </a:rPr>
+              <a:t>Kafka separates validated ingestion from stateful alert logic</a:t>
+            </a:r>
+          </a:p>
+        </p:txBody>
+      </p:sp>
+      <p:sp>
+        <p:nvSpPr>
+          <p:cNvPr id="3" name="stage-1-background">
+            <a:extLst xmlns:a="http://schemas.openxmlformats.org/drawingml/2006/main">
+              <a:ext uri="{FF2B5EF4-FFF2-40B4-BE49-F238E27FC236}">
+                <a16:creationId xmlns:a16="http://schemas.microsoft.com/office/drawing/2014/main" id="{FDE57312-3EB6-4511-931F-B0C52E269359}"/>
+              </a:ext>
+            </a:extLst>
+          </p:cNvPr>
+          <p:cNvSpPr>
+            <a:spLocks xmlns:a="http://schemas.openxmlformats.org/drawingml/2006/main" noGrp="1"/>
+          </p:cNvSpPr>
+          <p:nvPr/>
+        </p:nvSpPr>
+        <p:spPr>
+          <a:xfrm xmlns:a="http://schemas.openxmlformats.org/drawingml/2006/main">
+            <a:off x="933450" y="1809750"/>
+            <a:ext cx="2286000" cy="1352550"/>
+          </a:xfrm>
+          <a:prstGeom xmlns:a="http://schemas.openxmlformats.org/drawingml/2006/main" prst="rect">
+            <a:avLst/>
+          </a:prstGeom>
+          <a:solidFill xmlns:a="http://schemas.openxmlformats.org/drawingml/2006/main">
+            <a:srgbClr val="FFFFFF"/>
+          </a:solidFill>
+          <a:ln xmlns:a="http://schemas.openxmlformats.org/drawingml/2006/main" w="0">
+            <a:noFill/>
+            <a:prstDash val="solid"/>
+          </a:ln>
+        </p:spPr>
+      </p:sp>
+      <p:sp>
+        <p:nvSpPr>
+          <p:cNvPr id="4" name="stage-1-accent">
+            <a:extLst xmlns:a="http://schemas.openxmlformats.org/drawingml/2006/main">
+              <a:ext uri="{FF2B5EF4-FFF2-40B4-BE49-F238E27FC236}">
+                <a16:creationId xmlns:a16="http://schemas.microsoft.com/office/drawing/2014/main" id="{1AA4DEAD-5487-4A57-9418-27D975319632}"/>
+              </a:ext>
+            </a:extLst>
+          </p:cNvPr>
+          <p:cNvSpPr>
+            <a:spLocks xmlns:a="http://schemas.openxmlformats.org/drawingml/2006/main" noGrp="1"/>
+          </p:cNvSpPr>
+          <p:nvPr/>
+        </p:nvSpPr>
+        <p:spPr>
+          <a:xfrm xmlns:a="http://schemas.openxmlformats.org/drawingml/2006/main">
+            <a:off x="933450" y="1809750"/>
+            <a:ext cx="2286000" cy="57150"/>
+          </a:xfrm>
+          <a:prstGeom xmlns:a="http://schemas.openxmlformats.org/drawingml/2006/main" prst="rect">
+            <a:avLst/>
+          </a:prstGeom>
+          <a:solidFill xmlns:a="http://schemas.openxmlformats.org/drawingml/2006/main">
+            <a:srgbClr val="2F6FED"/>
+          </a:solidFill>
+          <a:ln xmlns:a="http://schemas.openxmlformats.org/drawingml/2006/main" w="0">
+            <a:noFill/>
+            <a:prstDash val="solid"/>
+          </a:ln>
+        </p:spPr>
+      </p:sp>
+      <p:sp>
+        <p:nvSpPr>
+          <p:cNvPr id="5" name="stage-1-heading">
+            <a:extLst xmlns:a="http://schemas.openxmlformats.org/drawingml/2006/main">
+              <a:ext uri="{FF2B5EF4-FFF2-40B4-BE49-F238E27FC236}">
+                <a16:creationId xmlns:a16="http://schemas.microsoft.com/office/drawing/2014/main" id="{540EA79F-4CB3-4B8D-AA0E-BD8493FC21DD}"/>
+              </a:ext>
+            </a:extLst>
+          </p:cNvPr>
+          <p:cNvSpPr>
+            <a:spLocks xmlns:a="http://schemas.openxmlformats.org/drawingml/2006/main" noGrp="1"/>
+          </p:cNvSpPr>
+          <p:nvPr/>
+        </p:nvSpPr>
+        <p:spPr>
+          <a:xfrm xmlns:a="http://schemas.openxmlformats.org/drawingml/2006/main">
+            <a:off x="1095375" y="2009775"/>
+            <a:ext cx="1962150" cy="295275"/>
+          </a:xfrm>
+          <a:prstGeom xmlns:a="http://schemas.openxmlformats.org/drawingml/2006/main" prst="rect">
+            <a:avLst/>
+          </a:prstGeom>
+          <a:noFill xmlns:a="http://schemas.openxmlformats.org/drawingml/2006/main"/>
+          <a:ln xmlns:a="http://schemas.openxmlformats.org/drawingml/2006/main" w="0">
+            <a:noFill/>
+            <a:prstDash val="solid"/>
+          </a:ln>
+        </p:spPr>
+        <p:txBody>
+          <a:bodyPr xmlns:a="http://schemas.openxmlformats.org/drawingml/2006/main" wrap="square" lIns="0" tIns="0" rIns="0" bIns="0" anchor="t">
+            <a:normAutofit fontScale="100000"/>
+          </a:bodyPr>
+          <a:lstStyle xmlns:a="http://schemas.openxmlformats.org/drawingml/2006/main"/>
+          <a:p xmlns:a="http://schemas.openxmlformats.org/drawingml/2006/main">
+            <a:pPr algn="l">
+              <a:defRPr sz="1725" b="1">
+                <a:solidFill>
+                  <a:srgbClr val="102A43"/>
+                </a:solidFill>
+                <a:latin typeface="Arial"/>
+                <a:ea typeface="Arial"/>
+                <a:cs typeface="Arial"/>
+              </a:defRPr>
+            </a:pPr>
+            <a:r>
+              <a:rPr sz="1725" b="1">
+                <a:solidFill>
+                  <a:srgbClr val="102A43"/>
+                </a:solidFill>
+                <a:latin typeface="Arial"/>
+                <a:ea typeface="Arial"/>
+                <a:cs typeface="Arial"/>
+              </a:rPr>
+              <a:t>Replay</a:t>
+            </a:r>
+          </a:p>
+        </p:txBody>
+      </p:sp>
+      <p:sp>
+        <p:nvSpPr>
+          <p:cNvPr id="6" name="stage-1-copy">
+            <a:extLst xmlns:a="http://schemas.openxmlformats.org/drawingml/2006/main">
+              <a:ext uri="{FF2B5EF4-FFF2-40B4-BE49-F238E27FC236}">
+                <a16:creationId xmlns:a16="http://schemas.microsoft.com/office/drawing/2014/main" id="{E5E08981-67A6-43D6-B671-76D928F72CFD}"/>
+              </a:ext>
+            </a:extLst>
+          </p:cNvPr>
+          <p:cNvSpPr>
+            <a:spLocks xmlns:a="http://schemas.openxmlformats.org/drawingml/2006/main" noGrp="1"/>
+          </p:cNvSpPr>
+          <p:nvPr/>
+        </p:nvSpPr>
+        <p:spPr>
+          <a:xfrm xmlns:a="http://schemas.openxmlformats.org/drawingml/2006/main">
+            <a:off x="1095375" y="2381250"/>
+            <a:ext cx="1962150" cy="666750"/>
+          </a:xfrm>
+          <a:prstGeom xmlns:a="http://schemas.openxmlformats.org/drawingml/2006/main" prst="rect">
+            <a:avLst/>
+          </a:prstGeom>
+          <a:noFill xmlns:a="http://schemas.openxmlformats.org/drawingml/2006/main"/>
+          <a:ln xmlns:a="http://schemas.openxmlformats.org/drawingml/2006/main" w="0">
+            <a:noFill/>
+            <a:prstDash val="solid"/>
+          </a:ln>
+        </p:spPr>
+        <p:txBody>
+          <a:bodyPr xmlns:a="http://schemas.openxmlformats.org/drawingml/2006/main" wrap="square" lIns="0" tIns="0" rIns="0" bIns="0" anchor="t">
+            <a:normAutofit fontScale="100000"/>
+          </a:bodyPr>
+          <a:lstStyle xmlns:a="http://schemas.openxmlformats.org/drawingml/2006/main"/>
+          <a:p xmlns:a="http://schemas.openxmlformats.org/drawingml/2006/main">
+            <a:pPr algn="l">
+              <a:lnSpc>
+                <a:spcPct val="105000"/>
+              </a:lnSpc>
+              <a:buNone/>
+              <a:defRPr sz="1350" b="0">
+                <a:solidFill>
+                  <a:srgbClr val="617080"/>
+                </a:solidFill>
+                <a:latin typeface="Arial"/>
+                <a:ea typeface="Arial"/>
+                <a:cs typeface="Arial"/>
+              </a:defRPr>
+            </a:pPr>
+            <a:r>
+              <a:rPr sz="1350" b="0">
+                <a:solidFill>
+                  <a:srgbClr val="617080"/>
+                </a:solidFill>
+                <a:latin typeface="Arial"/>
+                <a:ea typeface="Arial"/>
+                <a:cs typeface="Arial"/>
+              </a:rPr>
+              <a:t>9 labeled JSONL events</a:t>
+            </a:r>
+          </a:p>
+          <a:p xmlns:a="http://schemas.openxmlformats.org/drawingml/2006/main">
+            <a:pPr algn="l">
+              <a:lnSpc>
+                <a:spcPct val="105000"/>
+              </a:lnSpc>
+              <a:buNone/>
+              <a:defRPr sz="1350" b="0">
+                <a:solidFill>
+                  <a:srgbClr val="617080"/>
+                </a:solidFill>
+                <a:latin typeface="Arial"/>
+                <a:ea typeface="Arial"/>
+                <a:cs typeface="Arial"/>
+              </a:defRPr>
+            </a:pPr>
+            <a:r>
+              <a:rPr sz="1350" b="0">
+                <a:solidFill>
+                  <a:srgbClr val="617080"/>
+                </a:solidFill>
+                <a:latin typeface="Arial"/>
+                <a:ea typeface="Arial"/>
+                <a:cs typeface="Arial"/>
+              </a:rPr>
+              <a:t>including 1 duplicate</a:t>
+            </a:r>
+          </a:p>
+        </p:txBody>
+      </p:sp>
+      <p:sp>
+        <p:nvSpPr>
+          <p:cNvPr id="7" name="stage-2-background">
+            <a:extLst xmlns:a="http://schemas.openxmlformats.org/drawingml/2006/main">
+              <a:ext uri="{FF2B5EF4-FFF2-40B4-BE49-F238E27FC236}">
+                <a16:creationId xmlns:a16="http://schemas.microsoft.com/office/drawing/2014/main" id="{CE39B752-8CB0-475A-910E-5A55BD3C926C}"/>
+              </a:ext>
+            </a:extLst>
+          </p:cNvPr>
+          <p:cNvSpPr>
+            <a:spLocks xmlns:a="http://schemas.openxmlformats.org/drawingml/2006/main" noGrp="1"/>
+          </p:cNvSpPr>
+          <p:nvPr/>
+        </p:nvSpPr>
+        <p:spPr>
+          <a:xfrm xmlns:a="http://schemas.openxmlformats.org/drawingml/2006/main">
+            <a:off x="3705225" y="1809750"/>
+            <a:ext cx="2286000" cy="1352550"/>
+          </a:xfrm>
+          <a:prstGeom xmlns:a="http://schemas.openxmlformats.org/drawingml/2006/main" prst="rect">
+            <a:avLst/>
+          </a:prstGeom>
+          <a:solidFill xmlns:a="http://schemas.openxmlformats.org/drawingml/2006/main">
+            <a:srgbClr val="FFFFFF"/>
+          </a:solidFill>
+          <a:ln xmlns:a="http://schemas.openxmlformats.org/drawingml/2006/main" w="0">
+            <a:noFill/>
+            <a:prstDash val="solid"/>
+          </a:ln>
+        </p:spPr>
+      </p:sp>
+      <p:sp>
+        <p:nvSpPr>
+          <p:cNvPr id="8" name="stage-2-accent">
+            <a:extLst xmlns:a="http://schemas.openxmlformats.org/drawingml/2006/main">
+              <a:ext uri="{FF2B5EF4-FFF2-40B4-BE49-F238E27FC236}">
+                <a16:creationId xmlns:a16="http://schemas.microsoft.com/office/drawing/2014/main" id="{8A14A7CF-8906-4897-BCA6-20EEFC382D5E}"/>
+              </a:ext>
+            </a:extLst>
+          </p:cNvPr>
+          <p:cNvSpPr>
+            <a:spLocks xmlns:a="http://schemas.openxmlformats.org/drawingml/2006/main" noGrp="1"/>
+          </p:cNvSpPr>
+          <p:nvPr/>
+        </p:nvSpPr>
+        <p:spPr>
+          <a:xfrm xmlns:a="http://schemas.openxmlformats.org/drawingml/2006/main">
+            <a:off x="3705225" y="1809750"/>
+            <a:ext cx="2286000" cy="57150"/>
+          </a:xfrm>
+          <a:prstGeom xmlns:a="http://schemas.openxmlformats.org/drawingml/2006/main" prst="rect">
+            <a:avLst/>
+          </a:prstGeom>
+          <a:solidFill xmlns:a="http://schemas.openxmlformats.org/drawingml/2006/main">
+            <a:srgbClr val="2F6FED"/>
+          </a:solidFill>
+          <a:ln xmlns:a="http://schemas.openxmlformats.org/drawingml/2006/main" w="0">
+            <a:noFill/>
+            <a:prstDash val="solid"/>
+          </a:ln>
+        </p:spPr>
+      </p:sp>
+      <p:sp>
+        <p:nvSpPr>
+          <p:cNvPr id="9" name="stage-2-heading">
+            <a:extLst xmlns:a="http://schemas.openxmlformats.org/drawingml/2006/main">
+              <a:ext uri="{FF2B5EF4-FFF2-40B4-BE49-F238E27FC236}">
+                <a16:creationId xmlns:a16="http://schemas.microsoft.com/office/drawing/2014/main" id="{A6A072FB-042C-488F-A6A5-3DC33076D74C}"/>
+              </a:ext>
+            </a:extLst>
+          </p:cNvPr>
+          <p:cNvSpPr>
+            <a:spLocks xmlns:a="http://schemas.openxmlformats.org/drawingml/2006/main" noGrp="1"/>
+          </p:cNvSpPr>
+          <p:nvPr/>
+        </p:nvSpPr>
+        <p:spPr>
+          <a:xfrm xmlns:a="http://schemas.openxmlformats.org/drawingml/2006/main">
+            <a:off x="3867150" y="2009775"/>
+            <a:ext cx="1962150" cy="295275"/>
+          </a:xfrm>
+          <a:prstGeom xmlns:a="http://schemas.openxmlformats.org/drawingml/2006/main" prst="rect">
+            <a:avLst/>
+          </a:prstGeom>
+          <a:noFill xmlns:a="http://schemas.openxmlformats.org/drawingml/2006/main"/>
+          <a:ln xmlns:a="http://schemas.openxmlformats.org/drawingml/2006/main" w="0">
+            <a:noFill/>
+            <a:prstDash val="solid"/>
+          </a:ln>
+        </p:spPr>
+        <p:txBody>
+          <a:bodyPr xmlns:a="http://schemas.openxmlformats.org/drawingml/2006/main" wrap="square" lIns="0" tIns="0" rIns="0" bIns="0" anchor="t">
+            <a:normAutofit fontScale="100000"/>
+          </a:bodyPr>
+          <a:lstStyle xmlns:a="http://schemas.openxmlformats.org/drawingml/2006/main"/>
+          <a:p xmlns:a="http://schemas.openxmlformats.org/drawingml/2006/main">
+            <a:pPr algn="l">
+              <a:defRPr sz="1725" b="1">
+                <a:solidFill>
+                  <a:srgbClr val="102A43"/>
+                </a:solidFill>
+                <a:latin typeface="Arial"/>
+                <a:ea typeface="Arial"/>
+                <a:cs typeface="Arial"/>
+              </a:defRPr>
+            </a:pPr>
+            <a:r>
+              <a:rPr sz="1725" b="1">
+                <a:solidFill>
+                  <a:srgbClr val="102A43"/>
+                </a:solidFill>
+                <a:latin typeface="Arial"/>
+                <a:ea typeface="Arial"/>
+                <a:cs typeface="Arial"/>
+              </a:rPr>
+              <a:t>Producer</a:t>
+            </a:r>
+          </a:p>
+        </p:txBody>
+      </p:sp>
+      <p:sp>
+        <p:nvSpPr>
+          <p:cNvPr id="10" name="stage-2-copy">
+            <a:extLst xmlns:a="http://schemas.openxmlformats.org/drawingml/2006/main">
+              <a:ext uri="{FF2B5EF4-FFF2-40B4-BE49-F238E27FC236}">
+                <a16:creationId xmlns:a16="http://schemas.microsoft.com/office/drawing/2014/main" id="{A5648F81-3465-4D09-9D1E-0D9492356708}"/>
+              </a:ext>
+            </a:extLst>
+          </p:cNvPr>
+          <p:cNvSpPr>
+            <a:spLocks xmlns:a="http://schemas.openxmlformats.org/drawingml/2006/main" noGrp="1"/>
+          </p:cNvSpPr>
+          <p:nvPr/>
+        </p:nvSpPr>
+        <p:spPr>
+          <a:xfrm xmlns:a="http://schemas.openxmlformats.org/drawingml/2006/main">
+            <a:off x="3867150" y="2381250"/>
+            <a:ext cx="1962150" cy="666750"/>
+          </a:xfrm>
+          <a:prstGeom xmlns:a="http://schemas.openxmlformats.org/drawingml/2006/main" prst="rect">
+            <a:avLst/>
+          </a:prstGeom>
+          <a:noFill xmlns:a="http://schemas.openxmlformats.org/drawingml/2006/main"/>
+          <a:ln xmlns:a="http://schemas.openxmlformats.org/drawingml/2006/main" w="0">
+            <a:noFill/>
+            <a:prstDash val="solid"/>
+          </a:ln>
+        </p:spPr>
+        <p:txBody>
+          <a:bodyPr xmlns:a="http://schemas.openxmlformats.org/drawingml/2006/main" wrap="square" lIns="0" tIns="0" rIns="0" bIns="0" anchor="t">
+            <a:normAutofit fontScale="100000"/>
+          </a:bodyPr>
+          <a:lstStyle xmlns:a="http://schemas.openxmlformats.org/drawingml/2006/main"/>
+          <a:p xmlns:a="http://schemas.openxmlformats.org/drawingml/2006/main">
+            <a:pPr algn="l">
+              <a:lnSpc>
+                <a:spcPct val="105000"/>
+              </a:lnSpc>
+              <a:buNone/>
+              <a:defRPr sz="1350" b="0">
+                <a:solidFill>
+                  <a:srgbClr val="617080"/>
+                </a:solidFill>
+                <a:latin typeface="Arial"/>
+                <a:ea typeface="Arial"/>
+                <a:cs typeface="Arial"/>
+              </a:defRPr>
+            </a:pPr>
+            <a:r>
+              <a:rPr sz="1350" b="0">
+                <a:solidFill>
+                  <a:srgbClr val="617080"/>
+                </a:solidFill>
+                <a:latin typeface="Arial"/>
+                <a:ea typeface="Arial"/>
+                <a:cs typeface="Arial"/>
+              </a:rPr>
+              <a:t>Validate first</a:t>
+            </a:r>
+          </a:p>
+          <a:p xmlns:a="http://schemas.openxmlformats.org/drawingml/2006/main">
+            <a:pPr algn="l">
+              <a:lnSpc>
+                <a:spcPct val="105000"/>
+              </a:lnSpc>
+              <a:buNone/>
+              <a:defRPr sz="1350" b="0">
+                <a:solidFill>
+                  <a:srgbClr val="617080"/>
+                </a:solidFill>
+                <a:latin typeface="Arial"/>
+                <a:ea typeface="Arial"/>
+                <a:cs typeface="Arial"/>
+              </a:defRPr>
+            </a:pPr>
+            <a:r>
+              <a:rPr sz="1350" b="0">
+                <a:solidFill>
+                  <a:srgbClr val="617080"/>
+                </a:solidFill>
+                <a:latin typeface="Arial"/>
+                <a:ea typeface="Arial"/>
+                <a:cs typeface="Arial"/>
+              </a:rPr>
+              <a:t>publish in event order</a:t>
+            </a:r>
+          </a:p>
+        </p:txBody>
+      </p:sp>
+      <p:sp>
+        <p:nvSpPr>
+          <p:cNvPr id="11" name="stage-3-background">
+            <a:extLst xmlns:a="http://schemas.openxmlformats.org/drawingml/2006/main">
+              <a:ext uri="{FF2B5EF4-FFF2-40B4-BE49-F238E27FC236}">
+                <a16:creationId xmlns:a16="http://schemas.microsoft.com/office/drawing/2014/main" id="{57171377-5E76-48F1-BBC3-0367A2DE2CCA}"/>
+              </a:ext>
+            </a:extLst>
+          </p:cNvPr>
+          <p:cNvSpPr>
+            <a:spLocks xmlns:a="http://schemas.openxmlformats.org/drawingml/2006/main" noGrp="1"/>
+          </p:cNvSpPr>
+          <p:nvPr/>
+        </p:nvSpPr>
+        <p:spPr>
+          <a:xfrm xmlns:a="http://schemas.openxmlformats.org/drawingml/2006/main">
+            <a:off x="6477000" y="1809750"/>
+            <a:ext cx="2286000" cy="1352550"/>
+          </a:xfrm>
+          <a:prstGeom xmlns:a="http://schemas.openxmlformats.org/drawingml/2006/main" prst="rect">
+            <a:avLst/>
+          </a:prstGeom>
+          <a:solidFill xmlns:a="http://schemas.openxmlformats.org/drawingml/2006/main">
+            <a:srgbClr val="FFFFFF"/>
+          </a:solidFill>
+          <a:ln xmlns:a="http://schemas.openxmlformats.org/drawingml/2006/main" w="0">
+            <a:noFill/>
+            <a:prstDash val="solid"/>
+          </a:ln>
+        </p:spPr>
+      </p:sp>
+      <p:sp>
+        <p:nvSpPr>
+          <p:cNvPr id="12" name="stage-3-accent">
+            <a:extLst xmlns:a="http://schemas.openxmlformats.org/drawingml/2006/main">
+              <a:ext uri="{FF2B5EF4-FFF2-40B4-BE49-F238E27FC236}">
+                <a16:creationId xmlns:a16="http://schemas.microsoft.com/office/drawing/2014/main" id="{28F5C142-2521-4B43-B80F-24C190212FAA}"/>
+              </a:ext>
+            </a:extLst>
+          </p:cNvPr>
+          <p:cNvSpPr>
+            <a:spLocks xmlns:a="http://schemas.openxmlformats.org/drawingml/2006/main" noGrp="1"/>
+          </p:cNvSpPr>
+          <p:nvPr/>
+        </p:nvSpPr>
+        <p:spPr>
+          <a:xfrm xmlns:a="http://schemas.openxmlformats.org/drawingml/2006/main">
+            <a:off x="6477000" y="1809750"/>
+            <a:ext cx="2286000" cy="57150"/>
+          </a:xfrm>
+          <a:prstGeom xmlns:a="http://schemas.openxmlformats.org/drawingml/2006/main" prst="rect">
+            <a:avLst/>
+          </a:prstGeom>
+          <a:solidFill xmlns:a="http://schemas.openxmlformats.org/drawingml/2006/main">
+            <a:srgbClr val="F4A261"/>
+          </a:solidFill>
+          <a:ln xmlns:a="http://schemas.openxmlformats.org/drawingml/2006/main" w="0">
+            <a:noFill/>
+            <a:prstDash val="solid"/>
+          </a:ln>
+        </p:spPr>
+      </p:sp>
+      <p:sp>
+        <p:nvSpPr>
+          <p:cNvPr id="13" name="stage-3-heading">
+            <a:extLst xmlns:a="http://schemas.openxmlformats.org/drawingml/2006/main">
+              <a:ext uri="{FF2B5EF4-FFF2-40B4-BE49-F238E27FC236}">
+                <a16:creationId xmlns:a16="http://schemas.microsoft.com/office/drawing/2014/main" id="{8F04FB36-EEC6-4992-BD76-B772655D6B6F}"/>
+              </a:ext>
+            </a:extLst>
+          </p:cNvPr>
+          <p:cNvSpPr>
+            <a:spLocks xmlns:a="http://schemas.openxmlformats.org/drawingml/2006/main" noGrp="1"/>
+          </p:cNvSpPr>
+          <p:nvPr/>
+        </p:nvSpPr>
+        <p:spPr>
+          <a:xfrm xmlns:a="http://schemas.openxmlformats.org/drawingml/2006/main">
+            <a:off x="6638925" y="2009775"/>
+            <a:ext cx="1962150" cy="295275"/>
+          </a:xfrm>
+          <a:prstGeom xmlns:a="http://schemas.openxmlformats.org/drawingml/2006/main" prst="rect">
+            <a:avLst/>
+          </a:prstGeom>
+          <a:noFill xmlns:a="http://schemas.openxmlformats.org/drawingml/2006/main"/>
+          <a:ln xmlns:a="http://schemas.openxmlformats.org/drawingml/2006/main" w="0">
+            <a:noFill/>
+            <a:prstDash val="solid"/>
+          </a:ln>
+        </p:spPr>
+        <p:txBody>
+          <a:bodyPr xmlns:a="http://schemas.openxmlformats.org/drawingml/2006/main" wrap="square" lIns="0" tIns="0" rIns="0" bIns="0" anchor="t">
+            <a:normAutofit fontScale="100000"/>
+          </a:bodyPr>
+          <a:lstStyle xmlns:a="http://schemas.openxmlformats.org/drawingml/2006/main"/>
+          <a:p xmlns:a="http://schemas.openxmlformats.org/drawingml/2006/main">
+            <a:pPr algn="l">
+              <a:defRPr sz="1725" b="1">
+                <a:solidFill>
+                  <a:srgbClr val="102A43"/>
+                </a:solidFill>
+                <a:latin typeface="Arial"/>
+                <a:ea typeface="Arial"/>
+                <a:cs typeface="Arial"/>
+              </a:defRPr>
+            </a:pPr>
+            <a:r>
+              <a:rPr sz="1725" b="1">
+                <a:solidFill>
+                  <a:srgbClr val="102A43"/>
+                </a:solidFill>
+                <a:latin typeface="Arial"/>
+                <a:ea typeface="Arial"/>
+                <a:cs typeface="Arial"/>
+              </a:rPr>
+              <a:t>Kafka</a:t>
+            </a:r>
+          </a:p>
+        </p:txBody>
+      </p:sp>
+      <p:sp>
+        <p:nvSpPr>
+          <p:cNvPr id="14" name="stage-3-copy">
+            <a:extLst xmlns:a="http://schemas.openxmlformats.org/drawingml/2006/main">
+              <a:ext uri="{FF2B5EF4-FFF2-40B4-BE49-F238E27FC236}">
+                <a16:creationId xmlns:a16="http://schemas.microsoft.com/office/drawing/2014/main" id="{2A9E9B9E-CB77-40A6-A7DB-B5878B85BC78}"/>
+              </a:ext>
+            </a:extLst>
+          </p:cNvPr>
+          <p:cNvSpPr>
+            <a:spLocks xmlns:a="http://schemas.openxmlformats.org/drawingml/2006/main" noGrp="1"/>
+          </p:cNvSpPr>
+          <p:nvPr/>
+        </p:nvSpPr>
+        <p:spPr>
+          <a:xfrm xmlns:a="http://schemas.openxmlformats.org/drawingml/2006/main">
+            <a:off x="6638925" y="2381250"/>
+            <a:ext cx="1962150" cy="666750"/>
+          </a:xfrm>
+          <a:prstGeom xmlns:a="http://schemas.openxmlformats.org/drawingml/2006/main" prst="rect">
+            <a:avLst/>
+          </a:prstGeom>
+          <a:noFill xmlns:a="http://schemas.openxmlformats.org/drawingml/2006/main"/>
+          <a:ln xmlns:a="http://schemas.openxmlformats.org/drawingml/2006/main" w="0">
+            <a:noFill/>
+            <a:prstDash val="solid"/>
+          </a:ln>
+        </p:spPr>
+        <p:txBody>
+          <a:bodyPr xmlns:a="http://schemas.openxmlformats.org/drawingml/2006/main" wrap="square" lIns="0" tIns="0" rIns="0" bIns="0" anchor="t">
+            <a:normAutofit fontScale="100000"/>
+          </a:bodyPr>
+          <a:lstStyle xmlns:a="http://schemas.openxmlformats.org/drawingml/2006/main"/>
+          <a:p xmlns:a="http://schemas.openxmlformats.org/drawingml/2006/main">
+            <a:pPr algn="l">
+              <a:lnSpc>
+                <a:spcPct val="105000"/>
+              </a:lnSpc>
+              <a:buNone/>
+              <a:defRPr sz="1350" b="0">
+                <a:solidFill>
+                  <a:srgbClr val="617080"/>
+                </a:solidFill>
+                <a:latin typeface="Arial"/>
+                <a:ea typeface="Arial"/>
+                <a:cs typeface="Arial"/>
+              </a:defRPr>
+            </a:pPr>
+            <a:r>
+              <a:rPr sz="1350" b="0">
+                <a:solidFill>
+                  <a:srgbClr val="617080"/>
+                </a:solidFill>
+                <a:latin typeface="Arial"/>
+                <a:ea typeface="Arial"/>
+                <a:cs typeface="Arial"/>
+              </a:rPr>
+              <a:t>1 topic · 1 partition</a:t>
+            </a:r>
+          </a:p>
+          <a:p xmlns:a="http://schemas.openxmlformats.org/drawingml/2006/main">
+            <a:pPr algn="l">
+              <a:lnSpc>
+                <a:spcPct val="105000"/>
+              </a:lnSpc>
+              <a:buNone/>
+              <a:defRPr sz="1350" b="0">
+                <a:solidFill>
+                  <a:srgbClr val="617080"/>
+                </a:solidFill>
+                <a:latin typeface="Arial"/>
+                <a:ea typeface="Arial"/>
+                <a:cs typeface="Arial"/>
+              </a:defRPr>
+            </a:pPr>
+            <a:r>
+              <a:rPr sz="1350" b="0">
+                <a:solidFill>
+                  <a:srgbClr val="617080"/>
+                </a:solidFill>
+                <a:latin typeface="Arial"/>
+                <a:ea typeface="Arial"/>
+                <a:cs typeface="Arial"/>
+              </a:rPr>
+              <a:t>constant global key</a:t>
+            </a:r>
+          </a:p>
+        </p:txBody>
+      </p:sp>
+      <p:sp>
+        <p:nvSpPr>
+          <p:cNvPr id="15" name="stage-4-background">
+            <a:extLst xmlns:a="http://schemas.openxmlformats.org/drawingml/2006/main">
+              <a:ext uri="{FF2B5EF4-FFF2-40B4-BE49-F238E27FC236}">
+                <a16:creationId xmlns:a16="http://schemas.microsoft.com/office/drawing/2014/main" id="{D223F167-9A21-4746-BA36-2484C2507D24}"/>
+              </a:ext>
+            </a:extLst>
+          </p:cNvPr>
+          <p:cNvSpPr>
+            <a:spLocks xmlns:a="http://schemas.openxmlformats.org/drawingml/2006/main" noGrp="1"/>
+          </p:cNvSpPr>
+          <p:nvPr/>
+        </p:nvSpPr>
+        <p:spPr>
+          <a:xfrm xmlns:a="http://schemas.openxmlformats.org/drawingml/2006/main">
+            <a:off x="9248775" y="1809750"/>
+            <a:ext cx="2286000" cy="1352550"/>
+          </a:xfrm>
+          <a:prstGeom xmlns:a="http://schemas.openxmlformats.org/drawingml/2006/main" prst="rect">
+            <a:avLst/>
+          </a:prstGeom>
+          <a:solidFill xmlns:a="http://schemas.openxmlformats.org/drawingml/2006/main">
+            <a:srgbClr val="FFFFFF"/>
+          </a:solidFill>
+          <a:ln xmlns:a="http://schemas.openxmlformats.org/drawingml/2006/main" w="0">
+            <a:noFill/>
+            <a:prstDash val="solid"/>
+          </a:ln>
+        </p:spPr>
+      </p:sp>
+      <p:sp>
+        <p:nvSpPr>
+          <p:cNvPr id="16" name="stage-4-accent">
+            <a:extLst xmlns:a="http://schemas.openxmlformats.org/drawingml/2006/main">
+              <a:ext uri="{FF2B5EF4-FFF2-40B4-BE49-F238E27FC236}">
+                <a16:creationId xmlns:a16="http://schemas.microsoft.com/office/drawing/2014/main" id="{39ADBA65-E189-4FF2-9B9E-CE77F2D78531}"/>
+              </a:ext>
+            </a:extLst>
+          </p:cNvPr>
+          <p:cNvSpPr>
+            <a:spLocks xmlns:a="http://schemas.openxmlformats.org/drawingml/2006/main" noGrp="1"/>
+          </p:cNvSpPr>
+          <p:nvPr/>
+        </p:nvSpPr>
+        <p:spPr>
+          <a:xfrm xmlns:a="http://schemas.openxmlformats.org/drawingml/2006/main">
+            <a:off x="9248775" y="1809750"/>
+            <a:ext cx="2286000" cy="57150"/>
+          </a:xfrm>
+          <a:prstGeom xmlns:a="http://schemas.openxmlformats.org/drawingml/2006/main" prst="rect">
+            <a:avLst/>
+          </a:prstGeom>
+          <a:solidFill xmlns:a="http://schemas.openxmlformats.org/drawingml/2006/main">
+            <a:srgbClr val="2F6FED"/>
+          </a:solidFill>
+          <a:ln xmlns:a="http://schemas.openxmlformats.org/drawingml/2006/main" w="0">
+            <a:noFill/>
+            <a:prstDash val="solid"/>
+          </a:ln>
+        </p:spPr>
+      </p:sp>
+      <p:sp>
+        <p:nvSpPr>
+          <p:cNvPr id="17" name="stage-4-heading">
+            <a:extLst xmlns:a="http://schemas.openxmlformats.org/drawingml/2006/main">
+              <a:ext uri="{FF2B5EF4-FFF2-40B4-BE49-F238E27FC236}">
+                <a16:creationId xmlns:a16="http://schemas.microsoft.com/office/drawing/2014/main" id="{9B1E82B1-835A-4F9F-8F35-7F5175988EDB}"/>
+              </a:ext>
+            </a:extLst>
+          </p:cNvPr>
+          <p:cNvSpPr>
+            <a:spLocks xmlns:a="http://schemas.openxmlformats.org/drawingml/2006/main" noGrp="1"/>
+          </p:cNvSpPr>
+          <p:nvPr/>
+        </p:nvSpPr>
+        <p:spPr>
+          <a:xfrm xmlns:a="http://schemas.openxmlformats.org/drawingml/2006/main">
+            <a:off x="9410700" y="2009775"/>
+            <a:ext cx="1962150" cy="295275"/>
+          </a:xfrm>
+          <a:prstGeom xmlns:a="http://schemas.openxmlformats.org/drawingml/2006/main" prst="rect">
+            <a:avLst/>
+          </a:prstGeom>
+          <a:noFill xmlns:a="http://schemas.openxmlformats.org/drawingml/2006/main"/>
+          <a:ln xmlns:a="http://schemas.openxmlformats.org/drawingml/2006/main" w="0">
+            <a:noFill/>
+            <a:prstDash val="solid"/>
+          </a:ln>
+        </p:spPr>
+        <p:txBody>
+          <a:bodyPr xmlns:a="http://schemas.openxmlformats.org/drawingml/2006/main" wrap="square" lIns="0" tIns="0" rIns="0" bIns="0" anchor="t">
+            <a:normAutofit fontScale="100000"/>
+          </a:bodyPr>
+          <a:lstStyle xmlns:a="http://schemas.openxmlformats.org/drawingml/2006/main"/>
+          <a:p xmlns:a="http://schemas.openxmlformats.org/drawingml/2006/main">
+            <a:pPr algn="l">
+              <a:defRPr sz="1725" b="1">
+                <a:solidFill>
+                  <a:srgbClr val="102A43"/>
+                </a:solidFill>
+                <a:latin typeface="Arial"/>
+                <a:ea typeface="Arial"/>
+                <a:cs typeface="Arial"/>
+              </a:defRPr>
+            </a:pPr>
+            <a:r>
+              <a:rPr sz="1725" b="1">
+                <a:solidFill>
+                  <a:srgbClr val="102A43"/>
+                </a:solidFill>
+                <a:latin typeface="Arial"/>
+                <a:ea typeface="Arial"/>
+                <a:cs typeface="Arial"/>
+              </a:rPr>
+              <a:t>Consumer</a:t>
+            </a:r>
+          </a:p>
+        </p:txBody>
+      </p:sp>
+      <p:sp>
+        <p:nvSpPr>
+          <p:cNvPr id="18" name="stage-4-copy">
+            <a:extLst xmlns:a="http://schemas.openxmlformats.org/drawingml/2006/main">
+              <a:ext uri="{FF2B5EF4-FFF2-40B4-BE49-F238E27FC236}">
+                <a16:creationId xmlns:a16="http://schemas.microsoft.com/office/drawing/2014/main" id="{9A04B7E9-98D9-40EC-9564-78123ADC4120}"/>
+              </a:ext>
+            </a:extLst>
+          </p:cNvPr>
+          <p:cNvSpPr>
+            <a:spLocks xmlns:a="http://schemas.openxmlformats.org/drawingml/2006/main" noGrp="1"/>
+          </p:cNvSpPr>
+          <p:nvPr/>
+        </p:nvSpPr>
+        <p:spPr>
+          <a:xfrm xmlns:a="http://schemas.openxmlformats.org/drawingml/2006/main">
+            <a:off x="9410700" y="2381250"/>
+            <a:ext cx="1962150" cy="666750"/>
+          </a:xfrm>
+          <a:prstGeom xmlns:a="http://schemas.openxmlformats.org/drawingml/2006/main" prst="rect">
+            <a:avLst/>
+          </a:prstGeom>
+          <a:noFill xmlns:a="http://schemas.openxmlformats.org/drawingml/2006/main"/>
+          <a:ln xmlns:a="http://schemas.openxmlformats.org/drawingml/2006/main" w="0">
+            <a:noFill/>
+            <a:prstDash val="solid"/>
+          </a:ln>
+        </p:spPr>
+        <p:txBody>
+          <a:bodyPr xmlns:a="http://schemas.openxmlformats.org/drawingml/2006/main" wrap="square" lIns="0" tIns="0" rIns="0" bIns="0" anchor="t">
+            <a:normAutofit fontScale="100000"/>
+          </a:bodyPr>
+          <a:lstStyle xmlns:a="http://schemas.openxmlformats.org/drawingml/2006/main"/>
+          <a:p xmlns:a="http://schemas.openxmlformats.org/drawingml/2006/main">
+            <a:pPr algn="l">
+              <a:lnSpc>
+                <a:spcPct val="105000"/>
+              </a:lnSpc>
+              <a:buNone/>
+              <a:defRPr sz="1350" b="0">
+                <a:solidFill>
+                  <a:srgbClr val="617080"/>
+                </a:solidFill>
+                <a:latin typeface="Arial"/>
+                <a:ea typeface="Arial"/>
+                <a:cs typeface="Arial"/>
+              </a:defRPr>
+            </a:pPr>
+            <a:r>
+              <a:rPr sz="1350" b="0">
+                <a:solidFill>
+                  <a:srgbClr val="617080"/>
+                </a:solidFill>
+                <a:latin typeface="Arial"/>
+                <a:ea typeface="Arial"/>
+                <a:cs typeface="Arial"/>
+              </a:rPr>
+              <a:t>Deduplicate</a:t>
+            </a:r>
+          </a:p>
+          <a:p xmlns:a="http://schemas.openxmlformats.org/drawingml/2006/main">
+            <a:pPr algn="l">
+              <a:lnSpc>
+                <a:spcPct val="105000"/>
+              </a:lnSpc>
+              <a:buNone/>
+              <a:defRPr sz="1350" b="0">
+                <a:solidFill>
+                  <a:srgbClr val="617080"/>
+                </a:solidFill>
+                <a:latin typeface="Arial"/>
+                <a:ea typeface="Arial"/>
+                <a:cs typeface="Arial"/>
+              </a:defRPr>
+            </a:pPr>
+            <a:r>
+              <a:rPr sz="1350" b="0">
+                <a:solidFill>
+                  <a:srgbClr val="617080"/>
+                </a:solidFill>
+                <a:latin typeface="Arial"/>
+                <a:ea typeface="Arial"/>
+                <a:cs typeface="Arial"/>
+              </a:rPr>
+              <a:t>15-minute rolling max</a:t>
+            </a:r>
+          </a:p>
+          <a:p xmlns:a="http://schemas.openxmlformats.org/drawingml/2006/main">
+            <a:pPr algn="l">
+              <a:lnSpc>
+                <a:spcPct val="105000"/>
+              </a:lnSpc>
+              <a:buNone/>
+              <a:defRPr sz="1350" b="0">
+                <a:solidFill>
+                  <a:srgbClr val="617080"/>
+                </a:solidFill>
+                <a:latin typeface="Arial"/>
+                <a:ea typeface="Arial"/>
+                <a:cs typeface="Arial"/>
+              </a:defRPr>
+            </a:pPr>
+            <a:r>
+              <a:rPr sz="1350" b="0">
+                <a:solidFill>
+                  <a:srgbClr val="617080"/>
+                </a:solidFill>
+                <a:latin typeface="Arial"/>
+                <a:ea typeface="Arial"/>
+                <a:cs typeface="Arial"/>
+              </a:rPr>
+              <a:t>crossing + rearm</a:t>
+            </a:r>
+          </a:p>
+        </p:txBody>
+      </p:sp>
+      <p:sp>
+        <p:nvSpPr>
+          <p:cNvPr id="19" name="stage-5-background">
+            <a:extLst xmlns:a="http://schemas.openxmlformats.org/drawingml/2006/main">
+              <a:ext uri="{FF2B5EF4-FFF2-40B4-BE49-F238E27FC236}">
+                <a16:creationId xmlns:a16="http://schemas.microsoft.com/office/drawing/2014/main" id="{6819C542-EF64-4F1F-A1CE-B63E84CEF71D}"/>
+              </a:ext>
+            </a:extLst>
+          </p:cNvPr>
+          <p:cNvSpPr>
+            <a:spLocks xmlns:a="http://schemas.openxmlformats.org/drawingml/2006/main" noGrp="1"/>
+          </p:cNvSpPr>
+          <p:nvPr/>
+        </p:nvSpPr>
+        <p:spPr>
+          <a:xfrm xmlns:a="http://schemas.openxmlformats.org/drawingml/2006/main">
+            <a:off x="12020550" y="1809750"/>
+            <a:ext cx="2286000" cy="1352550"/>
+          </a:xfrm>
+          <a:prstGeom xmlns:a="http://schemas.openxmlformats.org/drawingml/2006/main" prst="rect">
+            <a:avLst/>
+          </a:prstGeom>
+          <a:solidFill xmlns:a="http://schemas.openxmlformats.org/drawingml/2006/main">
+            <a:srgbClr val="FFFFFF"/>
+          </a:solidFill>
+          <a:ln xmlns:a="http://schemas.openxmlformats.org/drawingml/2006/main" w="0">
+            <a:noFill/>
+            <a:prstDash val="solid"/>
+          </a:ln>
+        </p:spPr>
+      </p:sp>
+      <p:sp>
+        <p:nvSpPr>
+          <p:cNvPr id="20" name="stage-5-accent">
+            <a:extLst xmlns:a="http://schemas.openxmlformats.org/drawingml/2006/main">
+              <a:ext uri="{FF2B5EF4-FFF2-40B4-BE49-F238E27FC236}">
+                <a16:creationId xmlns:a16="http://schemas.microsoft.com/office/drawing/2014/main" id="{76D6B532-B613-4EDE-BB93-1CDA8D89D996}"/>
+              </a:ext>
+            </a:extLst>
+          </p:cNvPr>
+          <p:cNvSpPr>
+            <a:spLocks xmlns:a="http://schemas.openxmlformats.org/drawingml/2006/main" noGrp="1"/>
+          </p:cNvSpPr>
+          <p:nvPr/>
+        </p:nvSpPr>
+        <p:spPr>
+          <a:xfrm xmlns:a="http://schemas.openxmlformats.org/drawingml/2006/main">
+            <a:off x="12020550" y="1809750"/>
+            <a:ext cx="2286000" cy="57150"/>
+          </a:xfrm>
+          <a:prstGeom xmlns:a="http://schemas.openxmlformats.org/drawingml/2006/main" prst="rect">
+            <a:avLst/>
+          </a:prstGeom>
+          <a:solidFill xmlns:a="http://schemas.openxmlformats.org/drawingml/2006/main">
+            <a:srgbClr val="2F6FED"/>
+          </a:solidFill>
+          <a:ln xmlns:a="http://schemas.openxmlformats.org/drawingml/2006/main" w="0">
+            <a:noFill/>
+            <a:prstDash val="solid"/>
+          </a:ln>
+        </p:spPr>
+      </p:sp>
+      <p:sp>
+        <p:nvSpPr>
+          <p:cNvPr id="21" name="stage-5-heading">
+            <a:extLst xmlns:a="http://schemas.openxmlformats.org/drawingml/2006/main">
+              <a:ext uri="{FF2B5EF4-FFF2-40B4-BE49-F238E27FC236}">
+                <a16:creationId xmlns:a16="http://schemas.microsoft.com/office/drawing/2014/main" id="{7A84776E-5F15-42A2-9890-ED262397A97D}"/>
+              </a:ext>
+            </a:extLst>
+          </p:cNvPr>
+          <p:cNvSpPr>
+            <a:spLocks xmlns:a="http://schemas.openxmlformats.org/drawingml/2006/main" noGrp="1"/>
+          </p:cNvSpPr>
+          <p:nvPr/>
+        </p:nvSpPr>
+        <p:spPr>
+          <a:xfrm xmlns:a="http://schemas.openxmlformats.org/drawingml/2006/main">
+            <a:off x="12182475" y="2009775"/>
+            <a:ext cx="1962150" cy="295275"/>
+          </a:xfrm>
+          <a:prstGeom xmlns:a="http://schemas.openxmlformats.org/drawingml/2006/main" prst="rect">
+            <a:avLst/>
+          </a:prstGeom>
+          <a:noFill xmlns:a="http://schemas.openxmlformats.org/drawingml/2006/main"/>
+          <a:ln xmlns:a="http://schemas.openxmlformats.org/drawingml/2006/main" w="0">
+            <a:noFill/>
+            <a:prstDash val="solid"/>
+          </a:ln>
+        </p:spPr>
+        <p:txBody>
+          <a:bodyPr xmlns:a="http://schemas.openxmlformats.org/drawingml/2006/main" wrap="square" lIns="0" tIns="0" rIns="0" bIns="0" anchor="t">
+            <a:normAutofit fontScale="100000"/>
+          </a:bodyPr>
+          <a:lstStyle xmlns:a="http://schemas.openxmlformats.org/drawingml/2006/main"/>
+          <a:p xmlns:a="http://schemas.openxmlformats.org/drawingml/2006/main">
+            <a:pPr algn="l">
+              <a:defRPr sz="1725" b="1">
+                <a:solidFill>
+                  <a:srgbClr val="102A43"/>
+                </a:solidFill>
+                <a:latin typeface="Arial"/>
+                <a:ea typeface="Arial"/>
+                <a:cs typeface="Arial"/>
+              </a:defRPr>
+            </a:pPr>
+            <a:r>
+              <a:rPr sz="1725" b="1">
+                <a:solidFill>
+                  <a:srgbClr val="102A43"/>
+                </a:solidFill>
+                <a:latin typeface="Arial"/>
+                <a:ea typeface="Arial"/>
+                <a:cs typeface="Arial"/>
+              </a:rPr>
+              <a:t>Evidence</a:t>
+            </a:r>
+          </a:p>
+        </p:txBody>
+      </p:sp>
+      <p:sp>
+        <p:nvSpPr>
+          <p:cNvPr id="22" name="stage-5-copy">
+            <a:extLst xmlns:a="http://schemas.openxmlformats.org/drawingml/2006/main">
+              <a:ext uri="{FF2B5EF4-FFF2-40B4-BE49-F238E27FC236}">
+                <a16:creationId xmlns:a16="http://schemas.microsoft.com/office/drawing/2014/main" id="{2490AACD-FCAF-4178-A17A-33933F2F016C}"/>
+              </a:ext>
+            </a:extLst>
+          </p:cNvPr>
+          <p:cNvSpPr>
+            <a:spLocks xmlns:a="http://schemas.openxmlformats.org/drawingml/2006/main" noGrp="1"/>
+          </p:cNvSpPr>
+          <p:nvPr/>
+        </p:nvSpPr>
+        <p:spPr>
+          <a:xfrm xmlns:a="http://schemas.openxmlformats.org/drawingml/2006/main">
+            <a:off x="12182475" y="2381250"/>
+            <a:ext cx="1962150" cy="666750"/>
+          </a:xfrm>
+          <a:prstGeom xmlns:a="http://schemas.openxmlformats.org/drawingml/2006/main" prst="rect">
+            <a:avLst/>
+          </a:prstGeom>
+          <a:noFill xmlns:a="http://schemas.openxmlformats.org/drawingml/2006/main"/>
+          <a:ln xmlns:a="http://schemas.openxmlformats.org/drawingml/2006/main" w="0">
+            <a:noFill/>
+            <a:prstDash val="solid"/>
+          </a:ln>
+        </p:spPr>
+        <p:txBody>
+          <a:bodyPr xmlns:a="http://schemas.openxmlformats.org/drawingml/2006/main" wrap="square" lIns="0" tIns="0" rIns="0" bIns="0" anchor="t">
+            <a:normAutofit fontScale="100000"/>
+          </a:bodyPr>
+          <a:lstStyle xmlns:a="http://schemas.openxmlformats.org/drawingml/2006/main"/>
+          <a:p xmlns:a="http://schemas.openxmlformats.org/drawingml/2006/main">
+            <a:pPr algn="l">
+              <a:lnSpc>
+                <a:spcPct val="105000"/>
+              </a:lnSpc>
+              <a:buNone/>
+              <a:defRPr sz="1350" b="0">
+                <a:solidFill>
+                  <a:srgbClr val="617080"/>
+                </a:solidFill>
+                <a:latin typeface="Arial"/>
+                <a:ea typeface="Arial"/>
+                <a:cs typeface="Arial"/>
+              </a:defRPr>
+            </a:pPr>
+            <a:r>
+              <a:rPr sz="1350" b="0">
+                <a:solidFill>
+                  <a:srgbClr val="617080"/>
+                </a:solidFill>
+                <a:latin typeface="Arial"/>
+                <a:ea typeface="Arial"/>
+                <a:cs typeface="Arial"/>
+              </a:rPr>
+              <a:t>alert.json · metrics.csv</a:t>
+            </a:r>
+          </a:p>
+          <a:p xmlns:a="http://schemas.openxmlformats.org/drawingml/2006/main">
+            <a:pPr algn="l">
+              <a:lnSpc>
+                <a:spcPct val="105000"/>
+              </a:lnSpc>
+              <a:buNone/>
+              <a:defRPr sz="1350" b="0">
+                <a:solidFill>
+                  <a:srgbClr val="617080"/>
+                </a:solidFill>
+                <a:latin typeface="Arial"/>
+                <a:ea typeface="Arial"/>
+                <a:cs typeface="Arial"/>
+              </a:defRPr>
+            </a:pPr>
+            <a:r>
+              <a:rPr sz="1350" b="0">
+                <a:solidFill>
+                  <a:srgbClr val="617080"/>
+                </a:solidFill>
+                <a:latin typeface="Arial"/>
+                <a:ea typeface="Arial"/>
+                <a:cs typeface="Arial"/>
+              </a:rPr>
+              <a:t>briefing.txt · evaluation.json</a:t>
+            </a:r>
+          </a:p>
+        </p:txBody>
+      </p:sp>
+      <p:sp>
+        <p:nvSpPr>
+          <p:cNvPr id="23" name="s4-arrow-1">
+            <a:extLst xmlns:a="http://schemas.openxmlformats.org/drawingml/2006/main">
+              <a:ext uri="{FF2B5EF4-FFF2-40B4-BE49-F238E27FC236}">
+                <a16:creationId xmlns:a16="http://schemas.microsoft.com/office/drawing/2014/main" id="{3A69A5CC-1B0F-4216-8916-2867C9010914}"/>
+              </a:ext>
+            </a:extLst>
+          </p:cNvPr>
+          <p:cNvSpPr>
+            <a:spLocks xmlns:a="http://schemas.openxmlformats.org/drawingml/2006/main" noGrp="1"/>
+          </p:cNvSpPr>
+          <p:nvPr/>
+        </p:nvSpPr>
+        <p:spPr>
+          <a:xfrm xmlns:a="http://schemas.openxmlformats.org/drawingml/2006/main">
+            <a:off x="3286125" y="2238375"/>
+            <a:ext cx="400050" cy="457200"/>
+          </a:xfrm>
+          <a:prstGeom xmlns:a="http://schemas.openxmlformats.org/drawingml/2006/main" prst="rect">
+            <a:avLst/>
+          </a:prstGeom>
+          <a:noFill xmlns:a="http://schemas.openxmlformats.org/drawingml/2006/main"/>
+          <a:ln xmlns:a="http://schemas.openxmlformats.org/drawingml/2006/main" w="0">
+            <a:noFill/>
+            <a:prstDash val="solid"/>
+          </a:ln>
+        </p:spPr>
+        <p:txBody>
+          <a:bodyPr xmlns:a="http://schemas.openxmlformats.org/drawingml/2006/main" wrap="square" lIns="0" tIns="0" rIns="0" bIns="0" anchor="t">
+            <a:normAutofit fontScale="100000"/>
+          </a:bodyPr>
+          <a:lstStyle xmlns:a="http://schemas.openxmlformats.org/drawingml/2006/main"/>
+          <a:p xmlns:a="http://schemas.openxmlformats.org/drawingml/2006/main">
+            <a:pPr algn="ctr">
+              <a:defRPr sz="2550" b="1">
+                <a:solidFill>
+                  <a:srgbClr val="2F6FED"/>
+                </a:solidFill>
+                <a:latin typeface="Arial"/>
+                <a:ea typeface="Arial"/>
+                <a:cs typeface="Arial"/>
+              </a:defRPr>
+            </a:pPr>
+            <a:r>
+              <a:rPr sz="2550" b="1">
+                <a:solidFill>
+                  <a:srgbClr val="2F6FED"/>
+                </a:solidFill>
+                <a:latin typeface="Arial"/>
+                <a:ea typeface="Arial"/>
+                <a:cs typeface="Arial"/>
+              </a:rPr>
+              <a:t>→</a:t>
+            </a:r>
+          </a:p>
+        </p:txBody>
+      </p:sp>
+      <p:sp>
+        <p:nvSpPr>
+          <p:cNvPr id="24" name="s4-arrow-2">
+            <a:extLst xmlns:a="http://schemas.openxmlformats.org/drawingml/2006/main">
+              <a:ext uri="{FF2B5EF4-FFF2-40B4-BE49-F238E27FC236}">
+                <a16:creationId xmlns:a16="http://schemas.microsoft.com/office/drawing/2014/main" id="{A4DB657F-6F07-485F-86AE-FF6ABCA8A555}"/>
+              </a:ext>
+            </a:extLst>
+          </p:cNvPr>
+          <p:cNvSpPr>
+            <a:spLocks xmlns:a="http://schemas.openxmlformats.org/drawingml/2006/main" noGrp="1"/>
+          </p:cNvSpPr>
+          <p:nvPr/>
+        </p:nvSpPr>
+        <p:spPr>
+          <a:xfrm xmlns:a="http://schemas.openxmlformats.org/drawingml/2006/main">
+            <a:off x="6057900" y="2238375"/>
+            <a:ext cx="400050" cy="457200"/>
+          </a:xfrm>
+          <a:prstGeom xmlns:a="http://schemas.openxmlformats.org/drawingml/2006/main" prst="rect">
+            <a:avLst/>
+          </a:prstGeom>
+          <a:noFill xmlns:a="http://schemas.openxmlformats.org/drawingml/2006/main"/>
+          <a:ln xmlns:a="http://schemas.openxmlformats.org/drawingml/2006/main" w="0">
+            <a:noFill/>
+            <a:prstDash val="solid"/>
+          </a:ln>
+        </p:spPr>
+        <p:txBody>
+          <a:bodyPr xmlns:a="http://schemas.openxmlformats.org/drawingml/2006/main" wrap="square" lIns="0" tIns="0" rIns="0" bIns="0" anchor="t">
+            <a:normAutofit fontScale="100000"/>
+          </a:bodyPr>
+          <a:lstStyle xmlns:a="http://schemas.openxmlformats.org/drawingml/2006/main"/>
+          <a:p xmlns:a="http://schemas.openxmlformats.org/drawingml/2006/main">
+            <a:pPr algn="ctr">
+              <a:defRPr sz="2550" b="1">
+                <a:solidFill>
+                  <a:srgbClr val="2F6FED"/>
+                </a:solidFill>
+                <a:latin typeface="Arial"/>
+                <a:ea typeface="Arial"/>
+                <a:cs typeface="Arial"/>
+              </a:defRPr>
+            </a:pPr>
+            <a:r>
+              <a:rPr sz="2550" b="1">
+                <a:solidFill>
+                  <a:srgbClr val="2F6FED"/>
+                </a:solidFill>
+                <a:latin typeface="Arial"/>
+                <a:ea typeface="Arial"/>
+                <a:cs typeface="Arial"/>
+              </a:rPr>
+              <a:t>→</a:t>
+            </a:r>
+          </a:p>
+        </p:txBody>
+      </p:sp>
+      <p:sp>
+        <p:nvSpPr>
+          <p:cNvPr id="25" name="s4-arrow-3">
+            <a:extLst xmlns:a="http://schemas.openxmlformats.org/drawingml/2006/main">
+              <a:ext uri="{FF2B5EF4-FFF2-40B4-BE49-F238E27FC236}">
+                <a16:creationId xmlns:a16="http://schemas.microsoft.com/office/drawing/2014/main" id="{7DF3F4AF-AF88-4A44-81FC-8947ADB4BEE0}"/>
+              </a:ext>
+            </a:extLst>
+          </p:cNvPr>
+          <p:cNvSpPr>
+            <a:spLocks xmlns:a="http://schemas.openxmlformats.org/drawingml/2006/main" noGrp="1"/>
+          </p:cNvSpPr>
+          <p:nvPr/>
+        </p:nvSpPr>
+        <p:spPr>
+          <a:xfrm xmlns:a="http://schemas.openxmlformats.org/drawingml/2006/main">
+            <a:off x="8829675" y="2238375"/>
+            <a:ext cx="400050" cy="457200"/>
+          </a:xfrm>
+          <a:prstGeom xmlns:a="http://schemas.openxmlformats.org/drawingml/2006/main" prst="rect">
+            <a:avLst/>
+          </a:prstGeom>
+          <a:noFill xmlns:a="http://schemas.openxmlformats.org/drawingml/2006/main"/>
+          <a:ln xmlns:a="http://schemas.openxmlformats.org/drawingml/2006/main" w="0">
+            <a:noFill/>
+            <a:prstDash val="solid"/>
+          </a:ln>
+        </p:spPr>
+        <p:txBody>
+          <a:bodyPr xmlns:a="http://schemas.openxmlformats.org/drawingml/2006/main" wrap="square" lIns="0" tIns="0" rIns="0" bIns="0" anchor="t">
+            <a:normAutofit fontScale="100000"/>
+          </a:bodyPr>
+          <a:lstStyle xmlns:a="http://schemas.openxmlformats.org/drawingml/2006/main"/>
+          <a:p xmlns:a="http://schemas.openxmlformats.org/drawingml/2006/main">
+            <a:pPr algn="ctr">
+              <a:defRPr sz="2550" b="1">
+                <a:solidFill>
+                  <a:srgbClr val="2F6FED"/>
+                </a:solidFill>
+                <a:latin typeface="Arial"/>
+                <a:ea typeface="Arial"/>
+                <a:cs typeface="Arial"/>
+              </a:defRPr>
+            </a:pPr>
+            <a:r>
+              <a:rPr sz="2550" b="1">
+                <a:solidFill>
+                  <a:srgbClr val="2F6FED"/>
+                </a:solidFill>
+                <a:latin typeface="Arial"/>
+                <a:ea typeface="Arial"/>
+                <a:cs typeface="Arial"/>
+              </a:rPr>
+              <a:t>→</a:t>
+            </a:r>
+          </a:p>
+        </p:txBody>
+      </p:sp>
+      <p:sp>
+        <p:nvSpPr>
+          <p:cNvPr id="26" name="s4-arrow-4">
+            <a:extLst xmlns:a="http://schemas.openxmlformats.org/drawingml/2006/main">
+              <a:ext uri="{FF2B5EF4-FFF2-40B4-BE49-F238E27FC236}">
+                <a16:creationId xmlns:a16="http://schemas.microsoft.com/office/drawing/2014/main" id="{C36691F6-FE02-4CEE-B6CC-2113C89736C6}"/>
+              </a:ext>
+            </a:extLst>
+          </p:cNvPr>
+          <p:cNvSpPr>
+            <a:spLocks xmlns:a="http://schemas.openxmlformats.org/drawingml/2006/main" noGrp="1"/>
+          </p:cNvSpPr>
+          <p:nvPr/>
+        </p:nvSpPr>
+        <p:spPr>
+          <a:xfrm xmlns:a="http://schemas.openxmlformats.org/drawingml/2006/main">
+            <a:off x="11601450" y="2238375"/>
+            <a:ext cx="400050" cy="457200"/>
+          </a:xfrm>
+          <a:prstGeom xmlns:a="http://schemas.openxmlformats.org/drawingml/2006/main" prst="rect">
+            <a:avLst/>
+          </a:prstGeom>
+          <a:noFill xmlns:a="http://schemas.openxmlformats.org/drawingml/2006/main"/>
+          <a:ln xmlns:a="http://schemas.openxmlformats.org/drawingml/2006/main" w="0">
+            <a:noFill/>
+            <a:prstDash val="solid"/>
+          </a:ln>
+        </p:spPr>
+        <p:txBody>
+          <a:bodyPr xmlns:a="http://schemas.openxmlformats.org/drawingml/2006/main" wrap="square" lIns="0" tIns="0" rIns="0" bIns="0" anchor="t">
+            <a:normAutofit fontScale="100000"/>
+          </a:bodyPr>
+          <a:lstStyle xmlns:a="http://schemas.openxmlformats.org/drawingml/2006/main"/>
+          <a:p xmlns:a="http://schemas.openxmlformats.org/drawingml/2006/main">
+            <a:pPr algn="ctr">
+              <a:defRPr sz="2550" b="1">
+                <a:solidFill>
+                  <a:srgbClr val="2F6FED"/>
+                </a:solidFill>
+                <a:latin typeface="Arial"/>
+                <a:ea typeface="Arial"/>
+                <a:cs typeface="Arial"/>
+              </a:defRPr>
+            </a:pPr>
+            <a:r>
+              <a:rPr sz="2550" b="1">
+                <a:solidFill>
+                  <a:srgbClr val="2F6FED"/>
+                </a:solidFill>
+                <a:latin typeface="Arial"/>
+                <a:ea typeface="Arial"/>
+                <a:cs typeface="Arial"/>
+              </a:rPr>
+              <a:t>→</a:t>
+            </a:r>
+          </a:p>
+        </p:txBody>
+      </p:sp>
+      <p:sp>
+        <p:nvSpPr>
+          <p:cNvPr id="27" name="s4-design-choice">
+            <a:extLst xmlns:a="http://schemas.openxmlformats.org/drawingml/2006/main">
+              <a:ext uri="{FF2B5EF4-FFF2-40B4-BE49-F238E27FC236}">
+                <a16:creationId xmlns:a16="http://schemas.microsoft.com/office/drawing/2014/main" id="{FA46C9B2-5C18-4EC1-85AB-3E0E12812F85}"/>
+              </a:ext>
+            </a:extLst>
+          </p:cNvPr>
+          <p:cNvSpPr>
+            <a:spLocks xmlns:a="http://schemas.openxmlformats.org/drawingml/2006/main" noGrp="1"/>
+          </p:cNvSpPr>
+          <p:nvPr/>
+        </p:nvSpPr>
+        <p:spPr>
+          <a:xfrm xmlns:a="http://schemas.openxmlformats.org/drawingml/2006/main">
+            <a:off x="933450" y="3667125"/>
+            <a:ext cx="13373100" cy="904875"/>
+          </a:xfrm>
+          <a:prstGeom xmlns:a="http://schemas.openxmlformats.org/drawingml/2006/main" prst="rect">
+            <a:avLst/>
+          </a:prstGeom>
+          <a:noFill xmlns:a="http://schemas.openxmlformats.org/drawingml/2006/main"/>
+          <a:ln xmlns:a="http://schemas.openxmlformats.org/drawingml/2006/main" w="0">
+            <a:noFill/>
+            <a:prstDash val="solid"/>
+          </a:ln>
+        </p:spPr>
+        <p:txBody>
+          <a:bodyPr xmlns:a="http://schemas.openxmlformats.org/drawingml/2006/main" wrap="square" lIns="0" tIns="0" rIns="0" bIns="0" anchor="t">
+            <a:normAutofit fontScale="100000"/>
+          </a:bodyPr>
+          <a:lstStyle xmlns:a="http://schemas.openxmlformats.org/drawingml/2006/main"/>
+          <a:p xmlns:a="http://schemas.openxmlformats.org/drawingml/2006/main">
+            <a:pPr algn="l">
+              <a:lnSpc>
+                <a:spcPct val="115000"/>
+              </a:lnSpc>
+              <a:buNone/>
+              <a:defRPr sz="1800" b="0">
+                <a:solidFill>
+                  <a:srgbClr val="17212B"/>
+                </a:solidFill>
+                <a:latin typeface="Arial"/>
+                <a:ea typeface="Arial"/>
+                <a:cs typeface="Arial"/>
+              </a:defRPr>
+            </a:pPr>
+            <a:r>
+              <a:rPr sz="1800" b="1">
+                <a:solidFill>
+                  <a:srgbClr val="17212B"/>
+                </a:solidFill>
+                <a:latin typeface="Arial"/>
+                <a:ea typeface="Arial"/>
+                <a:cs typeface="Arial"/>
+              </a:rPr>
+              <a:t>Why this architecture:</a:t>
+            </a:r>
+            <a:r>
+              <a:rPr sz="1800" b="0">
+                <a:solidFill>
+                  <a:srgbClr val="17212B"/>
+                </a:solidFill>
+                <a:latin typeface="Arial"/>
+                <a:ea typeface="Arial"/>
+                <a:cs typeface="Arial"/>
+              </a:rPr>
+              <a:t> Kp is one global ordered series, so one partition and one constant key preserve sequence. Kafka keeps the producer and consumer independent and makes replay and duplicates observable.</a:t>
+            </a:r>
+          </a:p>
+        </p:txBody>
+      </p:sp>
+      <p:sp>
+        <p:nvSpPr>
+          <p:cNvPr id="28" name="s4-example-background">
+            <a:extLst xmlns:a="http://schemas.openxmlformats.org/drawingml/2006/main">
+              <a:ext uri="{FF2B5EF4-FFF2-40B4-BE49-F238E27FC236}">
+                <a16:creationId xmlns:a16="http://schemas.microsoft.com/office/drawing/2014/main" id="{4D3894BD-A83D-4A62-99DA-5C65CE12A338}"/>
+              </a:ext>
+            </a:extLst>
+          </p:cNvPr>
+          <p:cNvSpPr>
+            <a:spLocks xmlns:a="http://schemas.openxmlformats.org/drawingml/2006/main" noGrp="1"/>
+          </p:cNvSpPr>
+          <p:nvPr/>
+        </p:nvSpPr>
+        <p:spPr>
+          <a:xfrm xmlns:a="http://schemas.openxmlformats.org/drawingml/2006/main">
+            <a:off x="933450" y="4876800"/>
+            <a:ext cx="13373100" cy="781050"/>
+          </a:xfrm>
+          <a:prstGeom xmlns:a="http://schemas.openxmlformats.org/drawingml/2006/main" prst="rect">
+            <a:avLst/>
+          </a:prstGeom>
+          <a:solidFill xmlns:a="http://schemas.openxmlformats.org/drawingml/2006/main">
+            <a:srgbClr val="FFF1E6"/>
+          </a:solidFill>
+          <a:ln xmlns:a="http://schemas.openxmlformats.org/drawingml/2006/main" w="0">
+            <a:noFill/>
+            <a:prstDash val="solid"/>
+          </a:ln>
+        </p:spPr>
+      </p:sp>
+      <p:sp>
+        <p:nvSpPr>
+          <p:cNvPr id="29" name="s4-example-accent">
+            <a:extLst xmlns:a="http://schemas.openxmlformats.org/drawingml/2006/main">
+              <a:ext uri="{FF2B5EF4-FFF2-40B4-BE49-F238E27FC236}">
+                <a16:creationId xmlns:a16="http://schemas.microsoft.com/office/drawing/2014/main" id="{3184996F-990A-4E6F-A876-27180C2C9BF8}"/>
+              </a:ext>
+            </a:extLst>
+          </p:cNvPr>
+          <p:cNvSpPr>
+            <a:spLocks xmlns:a="http://schemas.openxmlformats.org/drawingml/2006/main" noGrp="1"/>
+          </p:cNvSpPr>
+          <p:nvPr/>
+        </p:nvSpPr>
+        <p:spPr>
+          <a:xfrm xmlns:a="http://schemas.openxmlformats.org/drawingml/2006/main">
+            <a:off x="933450" y="4876800"/>
+            <a:ext cx="76200" cy="781050"/>
+          </a:xfrm>
+          <a:prstGeom xmlns:a="http://schemas.openxmlformats.org/drawingml/2006/main" prst="rect">
+            <a:avLst/>
+          </a:prstGeom>
+          <a:solidFill xmlns:a="http://schemas.openxmlformats.org/drawingml/2006/main">
+            <a:srgbClr val="F4A261"/>
+          </a:solidFill>
+          <a:ln xmlns:a="http://schemas.openxmlformats.org/drawingml/2006/main" w="0">
+            <a:noFill/>
+            <a:prstDash val="solid"/>
+          </a:ln>
+        </p:spPr>
+      </p:sp>
+      <p:sp>
+        <p:nvSpPr>
+          <p:cNvPr id="30" name="s4-example">
+            <a:extLst xmlns:a="http://schemas.openxmlformats.org/drawingml/2006/main">
+              <a:ext uri="{FF2B5EF4-FFF2-40B4-BE49-F238E27FC236}">
+                <a16:creationId xmlns:a16="http://schemas.microsoft.com/office/drawing/2014/main" id="{05659C41-15DC-49BB-BD55-1712B7BE9B24}"/>
+              </a:ext>
+            </a:extLst>
+          </p:cNvPr>
+          <p:cNvSpPr>
+            <a:spLocks xmlns:a="http://schemas.openxmlformats.org/drawingml/2006/main" noGrp="1"/>
+          </p:cNvSpPr>
+          <p:nvPr/>
+        </p:nvSpPr>
+        <p:spPr>
+          <a:xfrm xmlns:a="http://schemas.openxmlformats.org/drawingml/2006/main">
+            <a:off x="1219200" y="5057775"/>
+            <a:ext cx="12811125" cy="476250"/>
+          </a:xfrm>
+          <a:prstGeom xmlns:a="http://schemas.openxmlformats.org/drawingml/2006/main" prst="rect">
+            <a:avLst/>
+          </a:prstGeom>
+          <a:noFill xmlns:a="http://schemas.openxmlformats.org/drawingml/2006/main"/>
+          <a:ln xmlns:a="http://schemas.openxmlformats.org/drawingml/2006/main" w="0">
+            <a:noFill/>
+            <a:prstDash val="solid"/>
+          </a:ln>
+        </p:spPr>
+        <p:txBody>
+          <a:bodyPr xmlns:a="http://schemas.openxmlformats.org/drawingml/2006/main" wrap="square" lIns="0" tIns="0" rIns="0" bIns="0" anchor="t">
+            <a:normAutofit fontScale="100000"/>
+          </a:bodyPr>
+          <a:lstStyle xmlns:a="http://schemas.openxmlformats.org/drawingml/2006/main"/>
+          <a:p xmlns:a="http://schemas.openxmlformats.org/drawingml/2006/main">
+            <a:pPr algn="l">
+              <a:lnSpc>
+                <a:spcPct val="115000"/>
+              </a:lnSpc>
+              <a:buNone/>
+              <a:defRPr sz="1650" b="0">
+                <a:solidFill>
+                  <a:srgbClr val="102A43"/>
+                </a:solidFill>
+                <a:latin typeface="Arial"/>
+                <a:ea typeface="Arial"/>
+                <a:cs typeface="Arial"/>
+              </a:defRPr>
+            </a:pPr>
+            <a:r>
+              <a:rPr sz="1650" b="1">
+                <a:solidFill>
+                  <a:srgbClr val="102A43"/>
+                </a:solidFill>
+                <a:latin typeface="Arial"/>
+                <a:ea typeface="Arial"/>
+                <a:cs typeface="Arial"/>
+              </a:rPr>
+              <a:t>Example:</a:t>
+            </a:r>
+            <a:r>
+              <a:rPr sz="1650" b="0">
+                <a:solidFill>
+                  <a:srgbClr val="102A43"/>
+                </a:solidFill>
+                <a:latin typeface="Arial"/>
+                <a:ea typeface="Arial"/>
+                <a:cs typeface="Arial"/>
+              </a:rPr>
+              <a:t> Kp 6.3 arrives → rolling 15-minute maximum becomes 6.3 → first crossing of Kp ≥ 6 → alert #1</a:t>
+            </a:r>
+          </a:p>
+        </p:txBody>
+      </p:sp>
+      <p:sp>
+        <p:nvSpPr>
+          <p:cNvPr id="31" name="footer-4-label">
+            <a:extLst xmlns:a="http://schemas.openxmlformats.org/drawingml/2006/main">
+              <a:ext uri="{FF2B5EF4-FFF2-40B4-BE49-F238E27FC236}">
+                <a16:creationId xmlns:a16="http://schemas.microsoft.com/office/drawing/2014/main" id="{6521B86B-B9B0-4A99-9A55-5C0BF1A79D99}"/>
+              </a:ext>
+            </a:extLst>
+          </p:cNvPr>
+          <p:cNvSpPr>
+            <a:spLocks xmlns:a="http://schemas.openxmlformats.org/drawingml/2006/main" noGrp="1"/>
+          </p:cNvSpPr>
+          <p:nvPr/>
+        </p:nvSpPr>
+        <p:spPr>
+          <a:xfrm xmlns:a="http://schemas.openxmlformats.org/drawingml/2006/main">
+            <a:off x="933450" y="8191500"/>
+            <a:ext cx="11906250" cy="209550"/>
+          </a:xfrm>
+          <a:prstGeom xmlns:a="http://schemas.openxmlformats.org/drawingml/2006/main" prst="rect">
+            <a:avLst/>
+          </a:prstGeom>
+          <a:noFill xmlns:a="http://schemas.openxmlformats.org/drawingml/2006/main"/>
+          <a:ln xmlns:a="http://schemas.openxmlformats.org/drawingml/2006/main" w="0">
+            <a:noFill/>
+            <a:prstDash val="solid"/>
+          </a:ln>
+        </p:spPr>
+        <p:txBody>
+          <a:bodyPr xmlns:a="http://schemas.openxmlformats.org/drawingml/2006/main" wrap="square" lIns="0" tIns="0" rIns="0" bIns="0" anchor="t">
+            <a:normAutofit fontScale="100000"/>
+          </a:bodyPr>
+          <a:lstStyle xmlns:a="http://schemas.openxmlformats.org/drawingml/2006/main"/>
+          <a:p xmlns:a="http://schemas.openxmlformats.org/drawingml/2006/main">
+            <a:pPr algn="l">
+              <a:defRPr sz="1125" b="0">
+                <a:solidFill>
+                  <a:srgbClr val="8894A0"/>
+                </a:solidFill>
+                <a:latin typeface="Arial"/>
+                <a:ea typeface="Arial"/>
+                <a:cs typeface="Arial"/>
+              </a:defRPr>
+            </a:pPr>
+            <a:r>
+              <a:rPr sz="1125" b="0">
+                <a:solidFill>
+                  <a:srgbClr val="8894A0"/>
+                </a:solidFill>
+                <a:latin typeface="Arial"/>
+                <a:ea typeface="Arial"/>
+                <a:cs typeface="Arial"/>
+              </a:rPr>
+              <a:t>Concrete example: Kp 6.3 → first crossing → alert #1</a:t>
+            </a:r>
+          </a:p>
+        </p:txBody>
+      </p:sp>
+      <p:sp>
+        <p:nvSpPr>
+          <p:cNvPr id="32" name="footer-4-number">
+            <a:extLst xmlns:a="http://schemas.openxmlformats.org/drawingml/2006/main">
+              <a:ext uri="{FF2B5EF4-FFF2-40B4-BE49-F238E27FC236}">
+                <a16:creationId xmlns:a16="http://schemas.microsoft.com/office/drawing/2014/main" id="{5FC8B186-AA41-490E-B800-98239207459B}"/>
+              </a:ext>
+            </a:extLst>
+          </p:cNvPr>
+          <p:cNvSpPr>
+            <a:spLocks xmlns:a="http://schemas.openxmlformats.org/drawingml/2006/main" noGrp="1"/>
+          </p:cNvSpPr>
+          <p:nvPr/>
+        </p:nvSpPr>
+        <p:spPr>
+          <a:xfrm xmlns:a="http://schemas.openxmlformats.org/drawingml/2006/main">
+            <a:off x="13811250" y="8191500"/>
+            <a:ext cx="495300" cy="209550"/>
+          </a:xfrm>
+          <a:prstGeom xmlns:a="http://schemas.openxmlformats.org/drawingml/2006/main" prst="rect">
+            <a:avLst/>
+          </a:prstGeom>
+          <a:noFill xmlns:a="http://schemas.openxmlformats.org/drawingml/2006/main"/>
+          <a:ln xmlns:a="http://schemas.openxmlformats.org/drawingml/2006/main" w="0">
+            <a:noFill/>
+            <a:prstDash val="solid"/>
+          </a:ln>
+        </p:spPr>
+        <p:txBody>
+          <a:bodyPr xmlns:a="http://schemas.openxmlformats.org/drawingml/2006/main" wrap="square" lIns="0" tIns="0" rIns="0" bIns="0" anchor="t">
+            <a:normAutofit fontScale="100000"/>
+          </a:bodyPr>
+          <a:lstStyle xmlns:a="http://schemas.openxmlformats.org/drawingml/2006/main"/>
+          <a:p xmlns:a="http://schemas.openxmlformats.org/drawingml/2006/main">
+            <a:pPr algn="r">
+              <a:defRPr sz="1125" b="0">
+                <a:solidFill>
+                  <a:srgbClr val="8894A0"/>
+                </a:solidFill>
+                <a:latin typeface="Arial"/>
+                <a:ea typeface="Arial"/>
+                <a:cs typeface="Arial"/>
+              </a:defRPr>
+            </a:pPr>
+            <a:r>
+              <a:rPr sz="1125" b="0">
+                <a:solidFill>
+                  <a:srgbClr val="8894A0"/>
+                </a:solidFill>
+                <a:latin typeface="Arial"/>
+                <a:ea typeface="Arial"/>
+                <a:cs typeface="Arial"/>
+              </a:rPr>
+              <a:t>4</a:t>
+            </a:r>
+          </a:p>
+        </p:txBody>
+      </p:sp>
     </p:spTree>
     <p:extLst>
       <p:ext uri="{BB962C8B-B14F-4D97-AF65-F5344CB8AC3E}">
-        <p14:creationId xmlns:p14="http://schemas.microsoft.com/office/powerpoint/2010/main" val="767949449"/>
+        <p14:creationId xmlns:p14="http://schemas.microsoft.com/office/powerpoint/2010/main" val="2052980271"/>
       </p:ext>
     </p:extLst>
   </p:cSld>
@@ -1713,6 +5241,13 @@
 <file path=ppt/slides/slide5.xml><?xml version="1.0" encoding="utf-8"?>
 <p:sld xmlns:p="http://schemas.openxmlformats.org/presentationml/2006/main">
   <p:cSld>
+    <p:bg>
+      <p:bgPr>
+        <a:solidFill xmlns:a="http://schemas.openxmlformats.org/drawingml/2006/main">
+          <a:srgbClr val="2F6FED"/>
+        </a:solidFill>
+      </p:bgPr>
+    </p:bg>
     <p:spTree>
       <p:nvGrpSpPr>
         <p:cNvPr id="1" name=""/>
@@ -1722,32 +5257,753 @@
       <p:grpSpPr>
         <a:xfrm xmlns:a="http://schemas.openxmlformats.org/drawingml/2006/main"/>
       </p:grpSpPr>
-      <p:pic>
-        <p:nvPicPr>
-          <p:cNvPr id="2" name=""/>
-          <p:cNvPicPr>
-            <a:picLocks xmlns:a="http://schemas.openxmlformats.org/drawingml/2006/main" noChangeAspect="1"/>
-          </p:cNvPicPr>
-          <p:nvPr/>
-        </p:nvPicPr>
-        <p:blipFill>
-          <a:blip xmlns:r="http://schemas.openxmlformats.org/officeDocument/2006/relationships" xmlns:a="http://schemas.openxmlformats.org/drawingml/2006/main" r:embed="Rd81663b523724501"/>
-          <a:stretch xmlns:a="http://schemas.openxmlformats.org/drawingml/2006/main"/>
-        </p:blipFill>
-        <p:spPr>
-          <a:xfrm xmlns:a="http://schemas.openxmlformats.org/drawingml/2006/main">
-            <a:off x="0" y="0"/>
-            <a:ext cx="15240000" cy="8572500"/>
-          </a:xfrm>
-          <a:prstGeom xmlns:a="http://schemas.openxmlformats.org/drawingml/2006/main" prst="rect">
-            <a:avLst/>
-          </a:prstGeom>
-        </p:spPr>
-      </p:pic>
+      <p:sp>
+        <p:nvSpPr>
+          <p:cNvPr id="15" name="s5-eyebrow">
+            <a:extLst xmlns:a="http://schemas.openxmlformats.org/drawingml/2006/main">
+              <a:ext uri="{FF2B5EF4-FFF2-40B4-BE49-F238E27FC236}">
+                <a16:creationId xmlns:a16="http://schemas.microsoft.com/office/drawing/2014/main" id="{BE5D0C9C-2E71-407D-8436-F7350FBA3637}"/>
+              </a:ext>
+            </a:extLst>
+          </p:cNvPr>
+          <p:cNvSpPr>
+            <a:spLocks xmlns:a="http://schemas.openxmlformats.org/drawingml/2006/main" noGrp="1"/>
+          </p:cNvSpPr>
+          <p:nvPr/>
+        </p:nvSpPr>
+        <p:spPr>
+          <a:xfrm xmlns:a="http://schemas.openxmlformats.org/drawingml/2006/main">
+            <a:off x="933450" y="1762125"/>
+            <a:ext cx="13373100" cy="285750"/>
+          </a:xfrm>
+          <a:prstGeom xmlns:a="http://schemas.openxmlformats.org/drawingml/2006/main" prst="rect">
+            <a:avLst/>
+          </a:prstGeom>
+          <a:noFill xmlns:a="http://schemas.openxmlformats.org/drawingml/2006/main"/>
+          <a:ln xmlns:a="http://schemas.openxmlformats.org/drawingml/2006/main" w="0">
+            <a:noFill/>
+            <a:prstDash val="solid"/>
+          </a:ln>
+        </p:spPr>
+        <p:txBody>
+          <a:bodyPr xmlns:a="http://schemas.openxmlformats.org/drawingml/2006/main" wrap="square" lIns="0" tIns="0" rIns="0" bIns="0" anchor="t">
+            <a:normAutofit fontScale="100000"/>
+          </a:bodyPr>
+          <a:lstStyle xmlns:a="http://schemas.openxmlformats.org/drawingml/2006/main"/>
+          <a:p xmlns:a="http://schemas.openxmlformats.org/drawingml/2006/main">
+            <a:pPr algn="ctr">
+              <a:defRPr sz="1350" b="1">
+                <a:solidFill>
+                  <a:srgbClr val="CBD9FF"/>
+                </a:solidFill>
+                <a:latin typeface="Arial"/>
+                <a:ea typeface="Arial"/>
+                <a:cs typeface="Arial"/>
+              </a:defRPr>
+            </a:pPr>
+            <a:r>
+              <a:rPr sz="1350" b="1">
+                <a:solidFill>
+                  <a:srgbClr val="CBD9FF"/>
+                </a:solidFill>
+                <a:latin typeface="Arial"/>
+                <a:ea typeface="Arial"/>
+                <a:cs typeface="Arial"/>
+              </a:rPr>
+              <a:t>LIVE DEMONSTRATION</a:t>
+            </a:r>
+          </a:p>
+        </p:txBody>
+      </p:sp>
+      <p:sp>
+        <p:nvSpPr>
+          <p:cNvPr id="2" name="s5-title">
+            <a:extLst xmlns:a="http://schemas.openxmlformats.org/drawingml/2006/main">
+              <a:ext uri="{FF2B5EF4-FFF2-40B4-BE49-F238E27FC236}">
+                <a16:creationId xmlns:a16="http://schemas.microsoft.com/office/drawing/2014/main" id="{1E182A20-0CE1-4706-8693-0FDCF66ECA76}"/>
+              </a:ext>
+            </a:extLst>
+          </p:cNvPr>
+          <p:cNvSpPr>
+            <a:spLocks xmlns:a="http://schemas.openxmlformats.org/drawingml/2006/main" noGrp="1"/>
+          </p:cNvSpPr>
+          <p:nvPr/>
+        </p:nvSpPr>
+        <p:spPr>
+          <a:xfrm xmlns:a="http://schemas.openxmlformats.org/drawingml/2006/main">
+            <a:off x="933450" y="2343150"/>
+            <a:ext cx="13373100" cy="857250"/>
+          </a:xfrm>
+          <a:prstGeom xmlns:a="http://schemas.openxmlformats.org/drawingml/2006/main" prst="rect">
+            <a:avLst/>
+          </a:prstGeom>
+          <a:noFill xmlns:a="http://schemas.openxmlformats.org/drawingml/2006/main"/>
+          <a:ln xmlns:a="http://schemas.openxmlformats.org/drawingml/2006/main" w="0">
+            <a:noFill/>
+            <a:prstDash val="solid"/>
+          </a:ln>
+        </p:spPr>
+        <p:txBody>
+          <a:bodyPr xmlns:a="http://schemas.openxmlformats.org/drawingml/2006/main" wrap="square" lIns="0" tIns="0" rIns="0" bIns="0" anchor="t">
+            <a:normAutofit fontScale="100000"/>
+          </a:bodyPr>
+          <a:lstStyle xmlns:a="http://schemas.openxmlformats.org/drawingml/2006/main"/>
+          <a:p xmlns:a="http://schemas.openxmlformats.org/drawingml/2006/main">
+            <a:pPr algn="ctr">
+              <a:defRPr sz="4950" b="1">
+                <a:solidFill>
+                  <a:srgbClr val="FFFFFF"/>
+                </a:solidFill>
+                <a:latin typeface="Arial"/>
+                <a:ea typeface="Arial"/>
+                <a:cs typeface="Arial"/>
+              </a:defRPr>
+            </a:pPr>
+            <a:r>
+              <a:rPr sz="4950" b="1">
+                <a:solidFill>
+                  <a:srgbClr val="FFFFFF"/>
+                </a:solidFill>
+                <a:latin typeface="Arial"/>
+                <a:ea typeface="Arial"/>
+                <a:cs typeface="Arial"/>
+              </a:rPr>
+              <a:t>Live demo: one command, two alerts</a:t>
+            </a:r>
+          </a:p>
+        </p:txBody>
+      </p:sp>
+      <p:sp>
+        <p:nvSpPr>
+          <p:cNvPr id="3" name="s5-prompt">
+            <a:extLst xmlns:a="http://schemas.openxmlformats.org/drawingml/2006/main">
+              <a:ext uri="{FF2B5EF4-FFF2-40B4-BE49-F238E27FC236}">
+                <a16:creationId xmlns:a16="http://schemas.microsoft.com/office/drawing/2014/main" id="{030B32A8-4344-4767-80E0-0ECFAE6D4FAA}"/>
+              </a:ext>
+            </a:extLst>
+          </p:cNvPr>
+          <p:cNvSpPr>
+            <a:spLocks xmlns:a="http://schemas.openxmlformats.org/drawingml/2006/main" noGrp="1"/>
+          </p:cNvSpPr>
+          <p:nvPr/>
+        </p:nvSpPr>
+        <p:spPr>
+          <a:xfrm xmlns:a="http://schemas.openxmlformats.org/drawingml/2006/main">
+            <a:off x="2333625" y="3400425"/>
+            <a:ext cx="10572750" cy="609600"/>
+          </a:xfrm>
+          <a:prstGeom xmlns:a="http://schemas.openxmlformats.org/drawingml/2006/main" prst="rect">
+            <a:avLst/>
+          </a:prstGeom>
+          <a:noFill xmlns:a="http://schemas.openxmlformats.org/drawingml/2006/main"/>
+          <a:ln xmlns:a="http://schemas.openxmlformats.org/drawingml/2006/main" w="0">
+            <a:noFill/>
+            <a:prstDash val="solid"/>
+          </a:ln>
+        </p:spPr>
+        <p:txBody>
+          <a:bodyPr xmlns:a="http://schemas.openxmlformats.org/drawingml/2006/main" wrap="square" lIns="0" tIns="0" rIns="0" bIns="0" anchor="t">
+            <a:normAutofit fontScale="100000"/>
+          </a:bodyPr>
+          <a:lstStyle xmlns:a="http://schemas.openxmlformats.org/drawingml/2006/main"/>
+          <a:p xmlns:a="http://schemas.openxmlformats.org/drawingml/2006/main">
+            <a:pPr algn="ctr">
+              <a:defRPr sz="2175" b="0">
+                <a:solidFill>
+                  <a:srgbClr val="DFE9FF"/>
+                </a:solidFill>
+                <a:latin typeface="Arial"/>
+                <a:ea typeface="Arial"/>
+                <a:cs typeface="Arial"/>
+              </a:defRPr>
+            </a:pPr>
+            <a:r>
+              <a:rPr sz="2175" b="0">
+                <a:solidFill>
+                  <a:srgbClr val="DFE9FF"/>
+                </a:solidFill>
+                <a:latin typeface="Arial"/>
+                <a:ea typeface="Arial"/>
+                <a:cs typeface="Arial"/>
+              </a:rPr>
+              <a:t>A deterministic replay proves crossing, suppression, rearming, and a second alert.</a:t>
+            </a:r>
+          </a:p>
+        </p:txBody>
+      </p:sp>
+      <p:sp>
+        <p:nvSpPr>
+          <p:cNvPr id="4" name="s5-rule-1">
+            <a:extLst xmlns:a="http://schemas.openxmlformats.org/drawingml/2006/main">
+              <a:ext uri="{FF2B5EF4-FFF2-40B4-BE49-F238E27FC236}">
+                <a16:creationId xmlns:a16="http://schemas.microsoft.com/office/drawing/2014/main" id="{73A8845F-9026-4785-84C4-E3D43F7AD0BE}"/>
+              </a:ext>
+            </a:extLst>
+          </p:cNvPr>
+          <p:cNvSpPr>
+            <a:spLocks xmlns:a="http://schemas.openxmlformats.org/drawingml/2006/main" noGrp="1"/>
+          </p:cNvSpPr>
+          <p:nvPr/>
+        </p:nvSpPr>
+        <p:spPr>
+          <a:xfrm xmlns:a="http://schemas.openxmlformats.org/drawingml/2006/main">
+            <a:off x="1952625" y="4686300"/>
+            <a:ext cx="3505200" cy="19050"/>
+          </a:xfrm>
+          <a:prstGeom xmlns:a="http://schemas.openxmlformats.org/drawingml/2006/main" prst="rect">
+            <a:avLst/>
+          </a:prstGeom>
+          <a:solidFill xmlns:a="http://schemas.openxmlformats.org/drawingml/2006/main">
+            <a:srgbClr val="9DBBFF"/>
+          </a:solidFill>
+          <a:ln xmlns:a="http://schemas.openxmlformats.org/drawingml/2006/main" w="0">
+            <a:noFill/>
+            <a:prstDash val="solid"/>
+          </a:ln>
+        </p:spPr>
+      </p:sp>
+      <p:sp>
+        <p:nvSpPr>
+          <p:cNvPr id="5" name="s5-head-1">
+            <a:extLst xmlns:a="http://schemas.openxmlformats.org/drawingml/2006/main">
+              <a:ext uri="{FF2B5EF4-FFF2-40B4-BE49-F238E27FC236}">
+                <a16:creationId xmlns:a16="http://schemas.microsoft.com/office/drawing/2014/main" id="{B0A1D881-8EBC-4883-B35D-DF682A8A3D7C}"/>
+              </a:ext>
+            </a:extLst>
+          </p:cNvPr>
+          <p:cNvSpPr>
+            <a:spLocks xmlns:a="http://schemas.openxmlformats.org/drawingml/2006/main" noGrp="1"/>
+          </p:cNvSpPr>
+          <p:nvPr/>
+        </p:nvSpPr>
+        <p:spPr>
+          <a:xfrm xmlns:a="http://schemas.openxmlformats.org/drawingml/2006/main">
+            <a:off x="1952625" y="4953000"/>
+            <a:ext cx="3505200" cy="361950"/>
+          </a:xfrm>
+          <a:prstGeom xmlns:a="http://schemas.openxmlformats.org/drawingml/2006/main" prst="rect">
+            <a:avLst/>
+          </a:prstGeom>
+          <a:noFill xmlns:a="http://schemas.openxmlformats.org/drawingml/2006/main"/>
+          <a:ln xmlns:a="http://schemas.openxmlformats.org/drawingml/2006/main" w="0">
+            <a:noFill/>
+            <a:prstDash val="solid"/>
+          </a:ln>
+        </p:spPr>
+        <p:txBody>
+          <a:bodyPr xmlns:a="http://schemas.openxmlformats.org/drawingml/2006/main" wrap="square" lIns="0" tIns="0" rIns="0" bIns="0" anchor="t">
+            <a:normAutofit fontScale="100000"/>
+          </a:bodyPr>
+          <a:lstStyle xmlns:a="http://schemas.openxmlformats.org/drawingml/2006/main"/>
+          <a:p xmlns:a="http://schemas.openxmlformats.org/drawingml/2006/main">
+            <a:pPr algn="l">
+              <a:defRPr sz="1875" b="1">
+                <a:solidFill>
+                  <a:srgbClr val="FFFFFF"/>
+                </a:solidFill>
+                <a:latin typeface="Arial"/>
+                <a:ea typeface="Arial"/>
+                <a:cs typeface="Arial"/>
+              </a:defRPr>
+            </a:pPr>
+            <a:r>
+              <a:rPr sz="1875" b="1">
+                <a:solidFill>
+                  <a:srgbClr val="FFFFFF"/>
+                </a:solidFill>
+                <a:latin typeface="Arial"/>
+                <a:ea typeface="Arial"/>
+                <a:cs typeface="Arial"/>
+              </a:rPr>
+              <a:t>1 · Kafka replay</a:t>
+            </a:r>
+          </a:p>
+        </p:txBody>
+      </p:sp>
+      <p:sp>
+        <p:nvSpPr>
+          <p:cNvPr id="6" name="s5-copy-1">
+            <a:extLst xmlns:a="http://schemas.openxmlformats.org/drawingml/2006/main">
+              <a:ext uri="{FF2B5EF4-FFF2-40B4-BE49-F238E27FC236}">
+                <a16:creationId xmlns:a16="http://schemas.microsoft.com/office/drawing/2014/main" id="{DDBEB313-5D0E-4060-8D27-69FD18FBAABA}"/>
+              </a:ext>
+            </a:extLst>
+          </p:cNvPr>
+          <p:cNvSpPr>
+            <a:spLocks xmlns:a="http://schemas.openxmlformats.org/drawingml/2006/main" noGrp="1"/>
+          </p:cNvSpPr>
+          <p:nvPr/>
+        </p:nvSpPr>
+        <p:spPr>
+          <a:xfrm xmlns:a="http://schemas.openxmlformats.org/drawingml/2006/main">
+            <a:off x="1952625" y="5448300"/>
+            <a:ext cx="3505200" cy="1009650"/>
+          </a:xfrm>
+          <a:prstGeom xmlns:a="http://schemas.openxmlformats.org/drawingml/2006/main" prst="rect">
+            <a:avLst/>
+          </a:prstGeom>
+          <a:noFill xmlns:a="http://schemas.openxmlformats.org/drawingml/2006/main"/>
+          <a:ln xmlns:a="http://schemas.openxmlformats.org/drawingml/2006/main" w="0">
+            <a:noFill/>
+            <a:prstDash val="solid"/>
+          </a:ln>
+        </p:spPr>
+        <p:txBody>
+          <a:bodyPr xmlns:a="http://schemas.openxmlformats.org/drawingml/2006/main" wrap="square" lIns="0" tIns="0" rIns="0" bIns="0" anchor="t">
+            <a:normAutofit fontScale="100000"/>
+          </a:bodyPr>
+          <a:lstStyle xmlns:a="http://schemas.openxmlformats.org/drawingml/2006/main"/>
+          <a:p xmlns:a="http://schemas.openxmlformats.org/drawingml/2006/main">
+            <a:pPr algn="l">
+              <a:lnSpc>
+                <a:spcPct val="115000"/>
+              </a:lnSpc>
+              <a:buNone/>
+              <a:defRPr sz="1500" b="0">
+                <a:solidFill>
+                  <a:srgbClr val="DFE9FF"/>
+                </a:solidFill>
+                <a:latin typeface="Arial"/>
+                <a:ea typeface="Arial"/>
+                <a:cs typeface="Arial"/>
+              </a:defRPr>
+            </a:pPr>
+            <a:r>
+              <a:rPr sz="1500" b="0">
+                <a:solidFill>
+                  <a:srgbClr val="DFE9FF"/>
+                </a:solidFill>
+                <a:latin typeface="Arial"/>
+                <a:ea typeface="Arial"/>
+                <a:cs typeface="Arial"/>
+              </a:rPr>
+              <a:t>./run_demo.sh publishes 9 ordered events through local Kafka.</a:t>
+            </a:r>
+          </a:p>
+        </p:txBody>
+      </p:sp>
+      <p:sp>
+        <p:nvSpPr>
+          <p:cNvPr id="7" name="s5-rule-2">
+            <a:extLst xmlns:a="http://schemas.openxmlformats.org/drawingml/2006/main">
+              <a:ext uri="{FF2B5EF4-FFF2-40B4-BE49-F238E27FC236}">
+                <a16:creationId xmlns:a16="http://schemas.microsoft.com/office/drawing/2014/main" id="{769EF7E6-83B7-44CA-A0D4-340476201B8F}"/>
+              </a:ext>
+            </a:extLst>
+          </p:cNvPr>
+          <p:cNvSpPr>
+            <a:spLocks xmlns:a="http://schemas.openxmlformats.org/drawingml/2006/main" noGrp="1"/>
+          </p:cNvSpPr>
+          <p:nvPr/>
+        </p:nvSpPr>
+        <p:spPr>
+          <a:xfrm xmlns:a="http://schemas.openxmlformats.org/drawingml/2006/main">
+            <a:off x="5867400" y="4686300"/>
+            <a:ext cx="3505200" cy="19050"/>
+          </a:xfrm>
+          <a:prstGeom xmlns:a="http://schemas.openxmlformats.org/drawingml/2006/main" prst="rect">
+            <a:avLst/>
+          </a:prstGeom>
+          <a:solidFill xmlns:a="http://schemas.openxmlformats.org/drawingml/2006/main">
+            <a:srgbClr val="9DBBFF"/>
+          </a:solidFill>
+          <a:ln xmlns:a="http://schemas.openxmlformats.org/drawingml/2006/main" w="0">
+            <a:noFill/>
+            <a:prstDash val="solid"/>
+          </a:ln>
+        </p:spPr>
+      </p:sp>
+      <p:sp>
+        <p:nvSpPr>
+          <p:cNvPr id="8" name="s5-head-2">
+            <a:extLst xmlns:a="http://schemas.openxmlformats.org/drawingml/2006/main">
+              <a:ext uri="{FF2B5EF4-FFF2-40B4-BE49-F238E27FC236}">
+                <a16:creationId xmlns:a16="http://schemas.microsoft.com/office/drawing/2014/main" id="{7702C7E6-B7C9-44E8-AF8E-B36C24584CE1}"/>
+              </a:ext>
+            </a:extLst>
+          </p:cNvPr>
+          <p:cNvSpPr>
+            <a:spLocks xmlns:a="http://schemas.openxmlformats.org/drawingml/2006/main" noGrp="1"/>
+          </p:cNvSpPr>
+          <p:nvPr/>
+        </p:nvSpPr>
+        <p:spPr>
+          <a:xfrm xmlns:a="http://schemas.openxmlformats.org/drawingml/2006/main">
+            <a:off x="5867400" y="4953000"/>
+            <a:ext cx="3505200" cy="361950"/>
+          </a:xfrm>
+          <a:prstGeom xmlns:a="http://schemas.openxmlformats.org/drawingml/2006/main" prst="rect">
+            <a:avLst/>
+          </a:prstGeom>
+          <a:noFill xmlns:a="http://schemas.openxmlformats.org/drawingml/2006/main"/>
+          <a:ln xmlns:a="http://schemas.openxmlformats.org/drawingml/2006/main" w="0">
+            <a:noFill/>
+            <a:prstDash val="solid"/>
+          </a:ln>
+        </p:spPr>
+        <p:txBody>
+          <a:bodyPr xmlns:a="http://schemas.openxmlformats.org/drawingml/2006/main" wrap="square" lIns="0" tIns="0" rIns="0" bIns="0" anchor="t">
+            <a:normAutofit fontScale="100000"/>
+          </a:bodyPr>
+          <a:lstStyle xmlns:a="http://schemas.openxmlformats.org/drawingml/2006/main"/>
+          <a:p xmlns:a="http://schemas.openxmlformats.org/drawingml/2006/main">
+            <a:pPr algn="l">
+              <a:defRPr sz="1875" b="1">
+                <a:solidFill>
+                  <a:srgbClr val="FFFFFF"/>
+                </a:solidFill>
+                <a:latin typeface="Arial"/>
+                <a:ea typeface="Arial"/>
+                <a:cs typeface="Arial"/>
+              </a:defRPr>
+            </a:pPr>
+            <a:r>
+              <a:rPr sz="1875" b="1">
+                <a:solidFill>
+                  <a:srgbClr val="FFFFFF"/>
+                </a:solidFill>
+                <a:latin typeface="Arial"/>
+                <a:ea typeface="Arial"/>
+                <a:cs typeface="Arial"/>
+              </a:rPr>
+              <a:t>2 · Two crossings</a:t>
+            </a:r>
+          </a:p>
+        </p:txBody>
+      </p:sp>
+      <p:sp>
+        <p:nvSpPr>
+          <p:cNvPr id="9" name="s5-copy-2">
+            <a:extLst xmlns:a="http://schemas.openxmlformats.org/drawingml/2006/main">
+              <a:ext uri="{FF2B5EF4-FFF2-40B4-BE49-F238E27FC236}">
+                <a16:creationId xmlns:a16="http://schemas.microsoft.com/office/drawing/2014/main" id="{0814C667-F4AF-4AAE-A4EA-2C8B6573ACE2}"/>
+              </a:ext>
+            </a:extLst>
+          </p:cNvPr>
+          <p:cNvSpPr>
+            <a:spLocks xmlns:a="http://schemas.openxmlformats.org/drawingml/2006/main" noGrp="1"/>
+          </p:cNvSpPr>
+          <p:nvPr/>
+        </p:nvSpPr>
+        <p:spPr>
+          <a:xfrm xmlns:a="http://schemas.openxmlformats.org/drawingml/2006/main">
+            <a:off x="5867400" y="5448300"/>
+            <a:ext cx="3505200" cy="1009650"/>
+          </a:xfrm>
+          <a:prstGeom xmlns:a="http://schemas.openxmlformats.org/drawingml/2006/main" prst="rect">
+            <a:avLst/>
+          </a:prstGeom>
+          <a:noFill xmlns:a="http://schemas.openxmlformats.org/drawingml/2006/main"/>
+          <a:ln xmlns:a="http://schemas.openxmlformats.org/drawingml/2006/main" w="0">
+            <a:noFill/>
+            <a:prstDash val="solid"/>
+          </a:ln>
+        </p:spPr>
+        <p:txBody>
+          <a:bodyPr xmlns:a="http://schemas.openxmlformats.org/drawingml/2006/main" wrap="square" lIns="0" tIns="0" rIns="0" bIns="0" anchor="t">
+            <a:normAutofit fontScale="100000"/>
+          </a:bodyPr>
+          <a:lstStyle xmlns:a="http://schemas.openxmlformats.org/drawingml/2006/main"/>
+          <a:p xmlns:a="http://schemas.openxmlformats.org/drawingml/2006/main">
+            <a:pPr algn="l">
+              <a:lnSpc>
+                <a:spcPct val="115000"/>
+              </a:lnSpc>
+              <a:buNone/>
+              <a:defRPr sz="1500" b="0">
+                <a:solidFill>
+                  <a:srgbClr val="DFE9FF"/>
+                </a:solidFill>
+                <a:latin typeface="Arial"/>
+                <a:ea typeface="Arial"/>
+                <a:cs typeface="Arial"/>
+              </a:defRPr>
+            </a:pPr>
+            <a:r>
+              <a:rPr sz="1500" b="0">
+                <a:solidFill>
+                  <a:srgbClr val="DFE9FF"/>
+                </a:solidFill>
+                <a:latin typeface="Arial"/>
+                <a:ea typeface="Arial"/>
+                <a:cs typeface="Arial"/>
+              </a:rPr>
+              <a:t>1 duplicate is skipped; the monitor rearms and emits exactly 2 alerts.</a:t>
+            </a:r>
+          </a:p>
+        </p:txBody>
+      </p:sp>
+      <p:sp>
+        <p:nvSpPr>
+          <p:cNvPr id="10" name="s5-rule-3">
+            <a:extLst xmlns:a="http://schemas.openxmlformats.org/drawingml/2006/main">
+              <a:ext uri="{FF2B5EF4-FFF2-40B4-BE49-F238E27FC236}">
+                <a16:creationId xmlns:a16="http://schemas.microsoft.com/office/drawing/2014/main" id="{610DFC85-369E-42FE-924C-44EB00ABDDF2}"/>
+              </a:ext>
+            </a:extLst>
+          </p:cNvPr>
+          <p:cNvSpPr>
+            <a:spLocks xmlns:a="http://schemas.openxmlformats.org/drawingml/2006/main" noGrp="1"/>
+          </p:cNvSpPr>
+          <p:nvPr/>
+        </p:nvSpPr>
+        <p:spPr>
+          <a:xfrm xmlns:a="http://schemas.openxmlformats.org/drawingml/2006/main">
+            <a:off x="9782175" y="4686300"/>
+            <a:ext cx="3505200" cy="19050"/>
+          </a:xfrm>
+          <a:prstGeom xmlns:a="http://schemas.openxmlformats.org/drawingml/2006/main" prst="rect">
+            <a:avLst/>
+          </a:prstGeom>
+          <a:solidFill xmlns:a="http://schemas.openxmlformats.org/drawingml/2006/main">
+            <a:srgbClr val="9DBBFF"/>
+          </a:solidFill>
+          <a:ln xmlns:a="http://schemas.openxmlformats.org/drawingml/2006/main" w="0">
+            <a:noFill/>
+            <a:prstDash val="solid"/>
+          </a:ln>
+        </p:spPr>
+      </p:sp>
+      <p:sp>
+        <p:nvSpPr>
+          <p:cNvPr id="11" name="s5-head-3">
+            <a:extLst xmlns:a="http://schemas.openxmlformats.org/drawingml/2006/main">
+              <a:ext uri="{FF2B5EF4-FFF2-40B4-BE49-F238E27FC236}">
+                <a16:creationId xmlns:a16="http://schemas.microsoft.com/office/drawing/2014/main" id="{7EE29B0E-1524-4154-BD44-BA0B09A93AB4}"/>
+              </a:ext>
+            </a:extLst>
+          </p:cNvPr>
+          <p:cNvSpPr>
+            <a:spLocks xmlns:a="http://schemas.openxmlformats.org/drawingml/2006/main" noGrp="1"/>
+          </p:cNvSpPr>
+          <p:nvPr/>
+        </p:nvSpPr>
+        <p:spPr>
+          <a:xfrm xmlns:a="http://schemas.openxmlformats.org/drawingml/2006/main">
+            <a:off x="9782175" y="4953000"/>
+            <a:ext cx="3505200" cy="361950"/>
+          </a:xfrm>
+          <a:prstGeom xmlns:a="http://schemas.openxmlformats.org/drawingml/2006/main" prst="rect">
+            <a:avLst/>
+          </a:prstGeom>
+          <a:noFill xmlns:a="http://schemas.openxmlformats.org/drawingml/2006/main"/>
+          <a:ln xmlns:a="http://schemas.openxmlformats.org/drawingml/2006/main" w="0">
+            <a:noFill/>
+            <a:prstDash val="solid"/>
+          </a:ln>
+        </p:spPr>
+        <p:txBody>
+          <a:bodyPr xmlns:a="http://schemas.openxmlformats.org/drawingml/2006/main" wrap="square" lIns="0" tIns="0" rIns="0" bIns="0" anchor="t">
+            <a:normAutofit fontScale="100000"/>
+          </a:bodyPr>
+          <a:lstStyle xmlns:a="http://schemas.openxmlformats.org/drawingml/2006/main"/>
+          <a:p xmlns:a="http://schemas.openxmlformats.org/drawingml/2006/main">
+            <a:pPr algn="l">
+              <a:defRPr sz="1875" b="1">
+                <a:solidFill>
+                  <a:srgbClr val="FFFFFF"/>
+                </a:solidFill>
+                <a:latin typeface="Arial"/>
+                <a:ea typeface="Arial"/>
+                <a:cs typeface="Arial"/>
+              </a:defRPr>
+            </a:pPr>
+            <a:r>
+              <a:rPr sz="1875" b="1">
+                <a:solidFill>
+                  <a:srgbClr val="FFFFFF"/>
+                </a:solidFill>
+                <a:latin typeface="Arial"/>
+                <a:ea typeface="Arial"/>
+                <a:cs typeface="Arial"/>
+              </a:rPr>
+              <a:t>3 · Evidence UI</a:t>
+            </a:r>
+          </a:p>
+        </p:txBody>
+      </p:sp>
+      <p:sp>
+        <p:nvSpPr>
+          <p:cNvPr id="12" name="s5-copy-3">
+            <a:extLst xmlns:a="http://schemas.openxmlformats.org/drawingml/2006/main">
+              <a:ext uri="{FF2B5EF4-FFF2-40B4-BE49-F238E27FC236}">
+                <a16:creationId xmlns:a16="http://schemas.microsoft.com/office/drawing/2014/main" id="{84146111-17F7-40A8-A8DF-1CE10FD789B1}"/>
+              </a:ext>
+            </a:extLst>
+          </p:cNvPr>
+          <p:cNvSpPr>
+            <a:spLocks xmlns:a="http://schemas.openxmlformats.org/drawingml/2006/main" noGrp="1"/>
+          </p:cNvSpPr>
+          <p:nvPr/>
+        </p:nvSpPr>
+        <p:spPr>
+          <a:xfrm xmlns:a="http://schemas.openxmlformats.org/drawingml/2006/main">
+            <a:off x="9782175" y="5448300"/>
+            <a:ext cx="3505200" cy="1009650"/>
+          </a:xfrm>
+          <a:prstGeom xmlns:a="http://schemas.openxmlformats.org/drawingml/2006/main" prst="rect">
+            <a:avLst/>
+          </a:prstGeom>
+          <a:noFill xmlns:a="http://schemas.openxmlformats.org/drawingml/2006/main"/>
+          <a:ln xmlns:a="http://schemas.openxmlformats.org/drawingml/2006/main" w="0">
+            <a:noFill/>
+            <a:prstDash val="solid"/>
+          </a:ln>
+        </p:spPr>
+        <p:txBody>
+          <a:bodyPr xmlns:a="http://schemas.openxmlformats.org/drawingml/2006/main" wrap="square" lIns="0" tIns="0" rIns="0" bIns="0" anchor="t">
+            <a:normAutofit fontScale="100000"/>
+          </a:bodyPr>
+          <a:lstStyle xmlns:a="http://schemas.openxmlformats.org/drawingml/2006/main"/>
+          <a:p xmlns:a="http://schemas.openxmlformats.org/drawingml/2006/main">
+            <a:pPr algn="l">
+              <a:lnSpc>
+                <a:spcPct val="115000"/>
+              </a:lnSpc>
+              <a:buNone/>
+              <a:defRPr sz="1500" b="0">
+                <a:solidFill>
+                  <a:srgbClr val="DFE9FF"/>
+                </a:solidFill>
+                <a:latin typeface="Arial"/>
+                <a:ea typeface="Arial"/>
+                <a:cs typeface="Arial"/>
+              </a:defRPr>
+            </a:pPr>
+            <a:r>
+              <a:rPr sz="1500" b="0">
+                <a:solidFill>
+                  <a:srgbClr val="DFE9FF"/>
+                </a:solidFill>
+                <a:latin typeface="Arial"/>
+                <a:ea typeface="Arial"/>
+                <a:cs typeface="Arial"/>
+              </a:rPr>
+              <a:t>Trace alert #1, the metrics, and the bounded natural-language briefing.</a:t>
+            </a:r>
+          </a:p>
+        </p:txBody>
+      </p:sp>
+      <p:sp>
+        <p:nvSpPr>
+          <p:cNvPr id="13" name="footer-5-label">
+            <a:extLst xmlns:a="http://schemas.openxmlformats.org/drawingml/2006/main">
+              <a:ext uri="{FF2B5EF4-FFF2-40B4-BE49-F238E27FC236}">
+                <a16:creationId xmlns:a16="http://schemas.microsoft.com/office/drawing/2014/main" id="{D7C8FFB1-79CC-444F-A404-3C673B61D7D4}"/>
+              </a:ext>
+            </a:extLst>
+          </p:cNvPr>
+          <p:cNvSpPr>
+            <a:spLocks xmlns:a="http://schemas.openxmlformats.org/drawingml/2006/main" noGrp="1"/>
+          </p:cNvSpPr>
+          <p:nvPr/>
+        </p:nvSpPr>
+        <p:spPr>
+          <a:xfrm xmlns:a="http://schemas.openxmlformats.org/drawingml/2006/main">
+            <a:off x="933450" y="8191500"/>
+            <a:ext cx="11906250" cy="209550"/>
+          </a:xfrm>
+          <a:prstGeom xmlns:a="http://schemas.openxmlformats.org/drawingml/2006/main" prst="rect">
+            <a:avLst/>
+          </a:prstGeom>
+          <a:noFill xmlns:a="http://schemas.openxmlformats.org/drawingml/2006/main"/>
+          <a:ln xmlns:a="http://schemas.openxmlformats.org/drawingml/2006/main" w="0">
+            <a:noFill/>
+            <a:prstDash val="solid"/>
+          </a:ln>
+        </p:spPr>
+        <p:txBody>
+          <a:bodyPr xmlns:a="http://schemas.openxmlformats.org/drawingml/2006/main" wrap="square" lIns="0" tIns="0" rIns="0" bIns="0" anchor="t">
+            <a:normAutofit fontScale="100000"/>
+          </a:bodyPr>
+          <a:lstStyle xmlns:a="http://schemas.openxmlformats.org/drawingml/2006/main"/>
+          <a:p xmlns:a="http://schemas.openxmlformats.org/drawingml/2006/main">
+            <a:pPr algn="l">
+              <a:defRPr sz="1125" b="0">
+                <a:solidFill>
+                  <a:srgbClr val="9DB2C5"/>
+                </a:solidFill>
+                <a:latin typeface="Arial"/>
+                <a:ea typeface="Arial"/>
+                <a:cs typeface="Arial"/>
+              </a:defRPr>
+            </a:pPr>
+            <a:r>
+              <a:rPr sz="1125" b="0">
+                <a:solidFill>
+                  <a:srgbClr val="9DB2C5"/>
+                </a:solidFill>
+                <a:latin typeface="Arial"/>
+                <a:ea typeface="Arial"/>
+                <a:cs typeface="Arial"/>
+              </a:rPr>
+              <a:t>Replay → Kafka → consumer → evidence UI</a:t>
+            </a:r>
+          </a:p>
+        </p:txBody>
+      </p:sp>
+      <p:sp>
+        <p:nvSpPr>
+          <p:cNvPr id="14" name="footer-5-number">
+            <a:extLst xmlns:a="http://schemas.openxmlformats.org/drawingml/2006/main">
+              <a:ext uri="{FF2B5EF4-FFF2-40B4-BE49-F238E27FC236}">
+                <a16:creationId xmlns:a16="http://schemas.microsoft.com/office/drawing/2014/main" id="{06D941A1-FC4C-4BEE-92DF-C5AD9F42F604}"/>
+              </a:ext>
+            </a:extLst>
+          </p:cNvPr>
+          <p:cNvSpPr>
+            <a:spLocks xmlns:a="http://schemas.openxmlformats.org/drawingml/2006/main" noGrp="1"/>
+          </p:cNvSpPr>
+          <p:nvPr/>
+        </p:nvSpPr>
+        <p:spPr>
+          <a:xfrm xmlns:a="http://schemas.openxmlformats.org/drawingml/2006/main">
+            <a:off x="13811250" y="8191500"/>
+            <a:ext cx="495300" cy="209550"/>
+          </a:xfrm>
+          <a:prstGeom xmlns:a="http://schemas.openxmlformats.org/drawingml/2006/main" prst="rect">
+            <a:avLst/>
+          </a:prstGeom>
+          <a:noFill xmlns:a="http://schemas.openxmlformats.org/drawingml/2006/main"/>
+          <a:ln xmlns:a="http://schemas.openxmlformats.org/drawingml/2006/main" w="0">
+            <a:noFill/>
+            <a:prstDash val="solid"/>
+          </a:ln>
+        </p:spPr>
+        <p:txBody>
+          <a:bodyPr xmlns:a="http://schemas.openxmlformats.org/drawingml/2006/main" wrap="square" lIns="0" tIns="0" rIns="0" bIns="0" anchor="t">
+            <a:normAutofit fontScale="100000"/>
+          </a:bodyPr>
+          <a:lstStyle xmlns:a="http://schemas.openxmlformats.org/drawingml/2006/main"/>
+          <a:p xmlns:a="http://schemas.openxmlformats.org/drawingml/2006/main">
+            <a:pPr algn="r">
+              <a:defRPr sz="1125" b="0">
+                <a:solidFill>
+                  <a:srgbClr val="9DB2C5"/>
+                </a:solidFill>
+                <a:latin typeface="Arial"/>
+                <a:ea typeface="Arial"/>
+                <a:cs typeface="Arial"/>
+              </a:defRPr>
+            </a:pPr>
+            <a:r>
+              <a:rPr sz="1125" b="0">
+                <a:solidFill>
+                  <a:srgbClr val="9DB2C5"/>
+                </a:solidFill>
+                <a:latin typeface="Arial"/>
+                <a:ea typeface="Arial"/>
+                <a:cs typeface="Arial"/>
+              </a:rPr>
+              <a:t>5</a:t>
+            </a:r>
+          </a:p>
+        </p:txBody>
+      </p:sp>
     </p:spTree>
     <p:extLst>
       <p:ext uri="{BB962C8B-B14F-4D97-AF65-F5344CB8AC3E}">
-        <p14:creationId xmlns:p14="http://schemas.microsoft.com/office/powerpoint/2010/main" val="2077891938"/>
+        <p14:creationId xmlns:p14="http://schemas.microsoft.com/office/powerpoint/2010/main" val="226471351"/>
       </p:ext>
     </p:extLst>
   </p:cSld>
@@ -1757,6 +6013,13 @@
 <file path=ppt/slides/slide6.xml><?xml version="1.0" encoding="utf-8"?>
 <p:sld xmlns:p="http://schemas.openxmlformats.org/presentationml/2006/main">
   <p:cSld>
+    <p:bg>
+      <p:bgPr>
+        <a:solidFill xmlns:a="http://schemas.openxmlformats.org/drawingml/2006/main">
+          <a:srgbClr val="F8F6F1"/>
+        </a:solidFill>
+      </p:bgPr>
+    </p:bg>
     <p:spTree>
       <p:nvGrpSpPr>
         <p:cNvPr id="1" name=""/>
@@ -1766,32 +6029,1132 @@
       <p:grpSpPr>
         <a:xfrm xmlns:a="http://schemas.openxmlformats.org/drawingml/2006/main"/>
       </p:grpSpPr>
-      <p:pic>
-        <p:nvPicPr>
-          <p:cNvPr id="2" name=""/>
-          <p:cNvPicPr>
-            <a:picLocks xmlns:a="http://schemas.openxmlformats.org/drawingml/2006/main" noChangeAspect="1"/>
-          </p:cNvPicPr>
-          <p:nvPr/>
-        </p:nvPicPr>
-        <p:blipFill>
-          <a:blip xmlns:r="http://schemas.openxmlformats.org/officeDocument/2006/relationships" xmlns:a="http://schemas.openxmlformats.org/drawingml/2006/main" r:embed="R9c8a3aa9a4864ae6"/>
-          <a:stretch xmlns:a="http://schemas.openxmlformats.org/drawingml/2006/main"/>
-        </p:blipFill>
-        <p:spPr>
-          <a:xfrm xmlns:a="http://schemas.openxmlformats.org/drawingml/2006/main">
-            <a:off x="0" y="0"/>
-            <a:ext cx="15240000" cy="8572500"/>
-          </a:xfrm>
-          <a:prstGeom xmlns:a="http://schemas.openxmlformats.org/drawingml/2006/main" prst="rect">
-            <a:avLst/>
-          </a:prstGeom>
-        </p:spPr>
-      </p:pic>
+      <p:sp>
+        <p:nvSpPr>
+          <p:cNvPr id="22" name="eyebrow-Evidence and bound">
+            <a:extLst xmlns:a="http://schemas.openxmlformats.org/drawingml/2006/main">
+              <a:ext uri="{FF2B5EF4-FFF2-40B4-BE49-F238E27FC236}">
+                <a16:creationId xmlns:a16="http://schemas.microsoft.com/office/drawing/2014/main" id="{0C2BCD9D-2724-4E15-BFEF-8162F38E1958}"/>
+              </a:ext>
+            </a:extLst>
+          </p:cNvPr>
+          <p:cNvSpPr>
+            <a:spLocks xmlns:a="http://schemas.openxmlformats.org/drawingml/2006/main" noGrp="1"/>
+          </p:cNvSpPr>
+          <p:nvPr/>
+        </p:nvSpPr>
+        <p:spPr>
+          <a:xfrm xmlns:a="http://schemas.openxmlformats.org/drawingml/2006/main">
+            <a:off x="933450" y="457200"/>
+            <a:ext cx="9048750" cy="285750"/>
+          </a:xfrm>
+          <a:prstGeom xmlns:a="http://schemas.openxmlformats.org/drawingml/2006/main" prst="rect">
+            <a:avLst/>
+          </a:prstGeom>
+          <a:noFill xmlns:a="http://schemas.openxmlformats.org/drawingml/2006/main"/>
+          <a:ln xmlns:a="http://schemas.openxmlformats.org/drawingml/2006/main" w="0">
+            <a:noFill/>
+            <a:prstDash val="solid"/>
+          </a:ln>
+        </p:spPr>
+        <p:txBody>
+          <a:bodyPr xmlns:a="http://schemas.openxmlformats.org/drawingml/2006/main" wrap="square" lIns="0" tIns="0" rIns="0" bIns="0" anchor="t">
+            <a:normAutofit fontScale="100000"/>
+          </a:bodyPr>
+          <a:lstStyle xmlns:a="http://schemas.openxmlformats.org/drawingml/2006/main"/>
+          <a:p xmlns:a="http://schemas.openxmlformats.org/drawingml/2006/main">
+            <a:pPr algn="l">
+              <a:defRPr sz="1275" b="1">
+                <a:solidFill>
+                  <a:srgbClr val="2F6FED"/>
+                </a:solidFill>
+                <a:latin typeface="Arial"/>
+                <a:ea typeface="Arial"/>
+                <a:cs typeface="Arial"/>
+              </a:defRPr>
+            </a:pPr>
+            <a:r>
+              <a:rPr sz="1275" b="1">
+                <a:solidFill>
+                  <a:srgbClr val="2F6FED"/>
+                </a:solidFill>
+                <a:latin typeface="Arial"/>
+                <a:ea typeface="Arial"/>
+                <a:cs typeface="Arial"/>
+              </a:rPr>
+              <a:t>EVIDENCE AND BOUNDED AI</a:t>
+            </a:r>
+          </a:p>
+        </p:txBody>
+      </p:sp>
+      <p:sp>
+        <p:nvSpPr>
+          <p:cNvPr id="2" name="title-The alert path is ">
+            <a:extLst xmlns:a="http://schemas.openxmlformats.org/drawingml/2006/main">
+              <a:ext uri="{FF2B5EF4-FFF2-40B4-BE49-F238E27FC236}">
+                <a16:creationId xmlns:a16="http://schemas.microsoft.com/office/drawing/2014/main" id="{509DDEEB-7061-42C1-AEF7-EFDCE68E64C2}"/>
+              </a:ext>
+            </a:extLst>
+          </p:cNvPr>
+          <p:cNvSpPr>
+            <a:spLocks xmlns:a="http://schemas.openxmlformats.org/drawingml/2006/main" noGrp="1"/>
+          </p:cNvSpPr>
+          <p:nvPr/>
+        </p:nvSpPr>
+        <p:spPr>
+          <a:xfrm xmlns:a="http://schemas.openxmlformats.org/drawingml/2006/main">
+            <a:off x="933450" y="838200"/>
+            <a:ext cx="13373100" cy="1047750"/>
+          </a:xfrm>
+          <a:prstGeom xmlns:a="http://schemas.openxmlformats.org/drawingml/2006/main" prst="rect">
+            <a:avLst/>
+          </a:prstGeom>
+          <a:noFill xmlns:a="http://schemas.openxmlformats.org/drawingml/2006/main"/>
+          <a:ln xmlns:a="http://schemas.openxmlformats.org/drawingml/2006/main" w="0">
+            <a:noFill/>
+            <a:prstDash val="solid"/>
+          </a:ln>
+        </p:spPr>
+        <p:txBody>
+          <a:bodyPr xmlns:a="http://schemas.openxmlformats.org/drawingml/2006/main" wrap="square" lIns="0" tIns="0" rIns="0" bIns="0" anchor="t">
+            <a:normAutofit fontScale="100000"/>
+          </a:bodyPr>
+          <a:lstStyle xmlns:a="http://schemas.openxmlformats.org/drawingml/2006/main"/>
+          <a:p xmlns:a="http://schemas.openxmlformats.org/drawingml/2006/main">
+            <a:pPr algn="l">
+              <a:lnSpc>
+                <a:spcPct val="96000"/>
+              </a:lnSpc>
+              <a:buNone/>
+              <a:defRPr sz="3675" b="1">
+                <a:solidFill>
+                  <a:srgbClr val="102A43"/>
+                </a:solidFill>
+                <a:latin typeface="Arial"/>
+                <a:ea typeface="Arial"/>
+                <a:cs typeface="Arial"/>
+              </a:defRPr>
+            </a:pPr>
+            <a:r>
+              <a:rPr sz="3675" b="1">
+                <a:solidFill>
+                  <a:srgbClr val="102A43"/>
+                </a:solidFill>
+                <a:latin typeface="Arial"/>
+                <a:ea typeface="Arial"/>
+                <a:cs typeface="Arial"/>
+              </a:rPr>
+              <a:t>The alert path is deterministic; AI only explains the result</a:t>
+            </a:r>
+          </a:p>
+        </p:txBody>
+      </p:sp>
+      <p:sp>
+        <p:nvSpPr>
+          <p:cNvPr id="3" name="s6-result-rule-1">
+            <a:extLst xmlns:a="http://schemas.openxmlformats.org/drawingml/2006/main">
+              <a:ext uri="{FF2B5EF4-FFF2-40B4-BE49-F238E27FC236}">
+                <a16:creationId xmlns:a16="http://schemas.microsoft.com/office/drawing/2014/main" id="{48FAEC79-660E-4A7A-90CF-89943438B2EB}"/>
+              </a:ext>
+            </a:extLst>
+          </p:cNvPr>
+          <p:cNvSpPr>
+            <a:spLocks xmlns:a="http://schemas.openxmlformats.org/drawingml/2006/main" noGrp="1"/>
+          </p:cNvSpPr>
+          <p:nvPr/>
+        </p:nvSpPr>
+        <p:spPr>
+          <a:xfrm xmlns:a="http://schemas.openxmlformats.org/drawingml/2006/main">
+            <a:off x="933450" y="2038350"/>
+            <a:ext cx="3829050" cy="47625"/>
+          </a:xfrm>
+          <a:prstGeom xmlns:a="http://schemas.openxmlformats.org/drawingml/2006/main" prst="rect">
+            <a:avLst/>
+          </a:prstGeom>
+          <a:solidFill xmlns:a="http://schemas.openxmlformats.org/drawingml/2006/main">
+            <a:srgbClr val="2F6FED"/>
+          </a:solidFill>
+          <a:ln xmlns:a="http://schemas.openxmlformats.org/drawingml/2006/main" w="0">
+            <a:noFill/>
+            <a:prstDash val="solid"/>
+          </a:ln>
+        </p:spPr>
+      </p:sp>
+      <p:sp>
+        <p:nvSpPr>
+          <p:cNvPr id="4" name="s6-result-number-1">
+            <a:extLst xmlns:a="http://schemas.openxmlformats.org/drawingml/2006/main">
+              <a:ext uri="{FF2B5EF4-FFF2-40B4-BE49-F238E27FC236}">
+                <a16:creationId xmlns:a16="http://schemas.microsoft.com/office/drawing/2014/main" id="{410CAF2D-FB86-48EA-9DD8-DB19C2985484}"/>
+              </a:ext>
+            </a:extLst>
+          </p:cNvPr>
+          <p:cNvSpPr>
+            <a:spLocks xmlns:a="http://schemas.openxmlformats.org/drawingml/2006/main" noGrp="1"/>
+          </p:cNvSpPr>
+          <p:nvPr/>
+        </p:nvSpPr>
+        <p:spPr>
+          <a:xfrm xmlns:a="http://schemas.openxmlformats.org/drawingml/2006/main">
+            <a:off x="933450" y="2286000"/>
+            <a:ext cx="3829050" cy="685800"/>
+          </a:xfrm>
+          <a:prstGeom xmlns:a="http://schemas.openxmlformats.org/drawingml/2006/main" prst="rect">
+            <a:avLst/>
+          </a:prstGeom>
+          <a:noFill xmlns:a="http://schemas.openxmlformats.org/drawingml/2006/main"/>
+          <a:ln xmlns:a="http://schemas.openxmlformats.org/drawingml/2006/main" w="0">
+            <a:noFill/>
+            <a:prstDash val="solid"/>
+          </a:ln>
+        </p:spPr>
+        <p:txBody>
+          <a:bodyPr xmlns:a="http://schemas.openxmlformats.org/drawingml/2006/main" wrap="square" lIns="0" tIns="0" rIns="0" bIns="0" anchor="t">
+            <a:normAutofit fontScale="100000"/>
+          </a:bodyPr>
+          <a:lstStyle xmlns:a="http://schemas.openxmlformats.org/drawingml/2006/main"/>
+          <a:p xmlns:a="http://schemas.openxmlformats.org/drawingml/2006/main">
+            <a:pPr algn="l">
+              <a:defRPr sz="4050" b="1">
+                <a:solidFill>
+                  <a:srgbClr val="102A43"/>
+                </a:solidFill>
+                <a:latin typeface="Arial"/>
+                <a:ea typeface="Arial"/>
+                <a:cs typeface="Arial"/>
+              </a:defRPr>
+            </a:pPr>
+            <a:r>
+              <a:rPr sz="4050" b="1">
+                <a:solidFill>
+                  <a:srgbClr val="102A43"/>
+                </a:solidFill>
+                <a:latin typeface="Arial"/>
+                <a:ea typeface="Arial"/>
+                <a:cs typeface="Arial"/>
+              </a:rPr>
+              <a:t>9</a:t>
+            </a:r>
+          </a:p>
+        </p:txBody>
+      </p:sp>
+      <p:sp>
+        <p:nvSpPr>
+          <p:cNvPr id="5" name="s6-result-copy-1">
+            <a:extLst xmlns:a="http://schemas.openxmlformats.org/drawingml/2006/main">
+              <a:ext uri="{FF2B5EF4-FFF2-40B4-BE49-F238E27FC236}">
+                <a16:creationId xmlns:a16="http://schemas.microsoft.com/office/drawing/2014/main" id="{A32DDC0D-9131-40F6-B7B3-ECACC8CF00C7}"/>
+              </a:ext>
+            </a:extLst>
+          </p:cNvPr>
+          <p:cNvSpPr>
+            <a:spLocks xmlns:a="http://schemas.openxmlformats.org/drawingml/2006/main" noGrp="1"/>
+          </p:cNvSpPr>
+          <p:nvPr/>
+        </p:nvSpPr>
+        <p:spPr>
+          <a:xfrm xmlns:a="http://schemas.openxmlformats.org/drawingml/2006/main">
+            <a:off x="933450" y="3000375"/>
+            <a:ext cx="3829050" cy="714375"/>
+          </a:xfrm>
+          <a:prstGeom xmlns:a="http://schemas.openxmlformats.org/drawingml/2006/main" prst="rect">
+            <a:avLst/>
+          </a:prstGeom>
+          <a:noFill xmlns:a="http://schemas.openxmlformats.org/drawingml/2006/main"/>
+          <a:ln xmlns:a="http://schemas.openxmlformats.org/drawingml/2006/main" w="0">
+            <a:noFill/>
+            <a:prstDash val="solid"/>
+          </a:ln>
+        </p:spPr>
+        <p:txBody>
+          <a:bodyPr xmlns:a="http://schemas.openxmlformats.org/drawingml/2006/main" wrap="square" lIns="0" tIns="0" rIns="0" bIns="0" anchor="t">
+            <a:normAutofit fontScale="100000"/>
+          </a:bodyPr>
+          <a:lstStyle xmlns:a="http://schemas.openxmlformats.org/drawingml/2006/main"/>
+          <a:p xmlns:a="http://schemas.openxmlformats.org/drawingml/2006/main">
+            <a:pPr algn="l">
+              <a:lnSpc>
+                <a:spcPct val="115000"/>
+              </a:lnSpc>
+              <a:buNone/>
+              <a:defRPr sz="1500" b="0">
+                <a:solidFill>
+                  <a:srgbClr val="617080"/>
+                </a:solidFill>
+                <a:latin typeface="Arial"/>
+                <a:ea typeface="Arial"/>
+                <a:cs typeface="Arial"/>
+              </a:defRPr>
+            </a:pPr>
+            <a:r>
+              <a:rPr sz="1500" b="0">
+                <a:solidFill>
+                  <a:srgbClr val="617080"/>
+                </a:solidFill>
+                <a:latin typeface="Arial"/>
+                <a:ea typeface="Arial"/>
+                <a:cs typeface="Arial"/>
+              </a:rPr>
+              <a:t>Kafka messages processed, including one deliberate duplicate.</a:t>
+            </a:r>
+          </a:p>
+        </p:txBody>
+      </p:sp>
+      <p:sp>
+        <p:nvSpPr>
+          <p:cNvPr id="6" name="s6-result-rule-2">
+            <a:extLst xmlns:a="http://schemas.openxmlformats.org/drawingml/2006/main">
+              <a:ext uri="{FF2B5EF4-FFF2-40B4-BE49-F238E27FC236}">
+                <a16:creationId xmlns:a16="http://schemas.microsoft.com/office/drawing/2014/main" id="{90C67C17-1059-4F2A-BE9A-DA12BCA8A412}"/>
+              </a:ext>
+            </a:extLst>
+          </p:cNvPr>
+          <p:cNvSpPr>
+            <a:spLocks xmlns:a="http://schemas.openxmlformats.org/drawingml/2006/main" noGrp="1"/>
+          </p:cNvSpPr>
+          <p:nvPr/>
+        </p:nvSpPr>
+        <p:spPr>
+          <a:xfrm xmlns:a="http://schemas.openxmlformats.org/drawingml/2006/main">
+            <a:off x="5514975" y="2038350"/>
+            <a:ext cx="3829050" cy="47625"/>
+          </a:xfrm>
+          <a:prstGeom xmlns:a="http://schemas.openxmlformats.org/drawingml/2006/main" prst="rect">
+            <a:avLst/>
+          </a:prstGeom>
+          <a:solidFill xmlns:a="http://schemas.openxmlformats.org/drawingml/2006/main">
+            <a:srgbClr val="F4A261"/>
+          </a:solidFill>
+          <a:ln xmlns:a="http://schemas.openxmlformats.org/drawingml/2006/main" w="0">
+            <a:noFill/>
+            <a:prstDash val="solid"/>
+          </a:ln>
+        </p:spPr>
+      </p:sp>
+      <p:sp>
+        <p:nvSpPr>
+          <p:cNvPr id="7" name="s6-result-number-2">
+            <a:extLst xmlns:a="http://schemas.openxmlformats.org/drawingml/2006/main">
+              <a:ext uri="{FF2B5EF4-FFF2-40B4-BE49-F238E27FC236}">
+                <a16:creationId xmlns:a16="http://schemas.microsoft.com/office/drawing/2014/main" id="{75E97752-9599-477B-A3FD-E472113D1A24}"/>
+              </a:ext>
+            </a:extLst>
+          </p:cNvPr>
+          <p:cNvSpPr>
+            <a:spLocks xmlns:a="http://schemas.openxmlformats.org/drawingml/2006/main" noGrp="1"/>
+          </p:cNvSpPr>
+          <p:nvPr/>
+        </p:nvSpPr>
+        <p:spPr>
+          <a:xfrm xmlns:a="http://schemas.openxmlformats.org/drawingml/2006/main">
+            <a:off x="5514975" y="2286000"/>
+            <a:ext cx="3829050" cy="685800"/>
+          </a:xfrm>
+          <a:prstGeom xmlns:a="http://schemas.openxmlformats.org/drawingml/2006/main" prst="rect">
+            <a:avLst/>
+          </a:prstGeom>
+          <a:noFill xmlns:a="http://schemas.openxmlformats.org/drawingml/2006/main"/>
+          <a:ln xmlns:a="http://schemas.openxmlformats.org/drawingml/2006/main" w="0">
+            <a:noFill/>
+            <a:prstDash val="solid"/>
+          </a:ln>
+        </p:spPr>
+        <p:txBody>
+          <a:bodyPr xmlns:a="http://schemas.openxmlformats.org/drawingml/2006/main" wrap="square" lIns="0" tIns="0" rIns="0" bIns="0" anchor="t">
+            <a:normAutofit fontScale="100000"/>
+          </a:bodyPr>
+          <a:lstStyle xmlns:a="http://schemas.openxmlformats.org/drawingml/2006/main"/>
+          <a:p xmlns:a="http://schemas.openxmlformats.org/drawingml/2006/main">
+            <a:pPr algn="l">
+              <a:defRPr sz="4050" b="1">
+                <a:solidFill>
+                  <a:srgbClr val="102A43"/>
+                </a:solidFill>
+                <a:latin typeface="Arial"/>
+                <a:ea typeface="Arial"/>
+                <a:cs typeface="Arial"/>
+              </a:defRPr>
+            </a:pPr>
+            <a:r>
+              <a:rPr sz="4050" b="1">
+                <a:solidFill>
+                  <a:srgbClr val="102A43"/>
+                </a:solidFill>
+                <a:latin typeface="Arial"/>
+                <a:ea typeface="Arial"/>
+                <a:cs typeface="Arial"/>
+              </a:rPr>
+              <a:t>2</a:t>
+            </a:r>
+          </a:p>
+        </p:txBody>
+      </p:sp>
+      <p:sp>
+        <p:nvSpPr>
+          <p:cNvPr id="8" name="s6-result-copy-2">
+            <a:extLst xmlns:a="http://schemas.openxmlformats.org/drawingml/2006/main">
+              <a:ext uri="{FF2B5EF4-FFF2-40B4-BE49-F238E27FC236}">
+                <a16:creationId xmlns:a16="http://schemas.microsoft.com/office/drawing/2014/main" id="{A98D6243-0CF9-490E-A198-72EDEA8B215A}"/>
+              </a:ext>
+            </a:extLst>
+          </p:cNvPr>
+          <p:cNvSpPr>
+            <a:spLocks xmlns:a="http://schemas.openxmlformats.org/drawingml/2006/main" noGrp="1"/>
+          </p:cNvSpPr>
+          <p:nvPr/>
+        </p:nvSpPr>
+        <p:spPr>
+          <a:xfrm xmlns:a="http://schemas.openxmlformats.org/drawingml/2006/main">
+            <a:off x="5514975" y="3000375"/>
+            <a:ext cx="3829050" cy="714375"/>
+          </a:xfrm>
+          <a:prstGeom xmlns:a="http://schemas.openxmlformats.org/drawingml/2006/main" prst="rect">
+            <a:avLst/>
+          </a:prstGeom>
+          <a:noFill xmlns:a="http://schemas.openxmlformats.org/drawingml/2006/main"/>
+          <a:ln xmlns:a="http://schemas.openxmlformats.org/drawingml/2006/main" w="0">
+            <a:noFill/>
+            <a:prstDash val="solid"/>
+          </a:ln>
+        </p:spPr>
+        <p:txBody>
+          <a:bodyPr xmlns:a="http://schemas.openxmlformats.org/drawingml/2006/main" wrap="square" lIns="0" tIns="0" rIns="0" bIns="0" anchor="t">
+            <a:normAutofit fontScale="100000"/>
+          </a:bodyPr>
+          <a:lstStyle xmlns:a="http://schemas.openxmlformats.org/drawingml/2006/main"/>
+          <a:p xmlns:a="http://schemas.openxmlformats.org/drawingml/2006/main">
+            <a:pPr algn="l">
+              <a:lnSpc>
+                <a:spcPct val="115000"/>
+              </a:lnSpc>
+              <a:buNone/>
+              <a:defRPr sz="1500" b="0">
+                <a:solidFill>
+                  <a:srgbClr val="617080"/>
+                </a:solidFill>
+                <a:latin typeface="Arial"/>
+                <a:ea typeface="Arial"/>
+                <a:cs typeface="Arial"/>
+              </a:defRPr>
+            </a:pPr>
+            <a:r>
+              <a:rPr sz="1500" b="0">
+                <a:solidFill>
+                  <a:srgbClr val="617080"/>
+                </a:solidFill>
+                <a:latin typeface="Arial"/>
+                <a:ea typeface="Arial"/>
+                <a:cs typeface="Arial"/>
+              </a:rPr>
+              <a:t>Expected threshold-crossing alerts, with no alert spam.</a:t>
+            </a:r>
+          </a:p>
+        </p:txBody>
+      </p:sp>
+      <p:sp>
+        <p:nvSpPr>
+          <p:cNvPr id="9" name="s6-result-rule-3">
+            <a:extLst xmlns:a="http://schemas.openxmlformats.org/drawingml/2006/main">
+              <a:ext uri="{FF2B5EF4-FFF2-40B4-BE49-F238E27FC236}">
+                <a16:creationId xmlns:a16="http://schemas.microsoft.com/office/drawing/2014/main" id="{AD46C0BF-8C5A-4590-986D-6486EC41B5C6}"/>
+              </a:ext>
+            </a:extLst>
+          </p:cNvPr>
+          <p:cNvSpPr>
+            <a:spLocks xmlns:a="http://schemas.openxmlformats.org/drawingml/2006/main" noGrp="1"/>
+          </p:cNvSpPr>
+          <p:nvPr/>
+        </p:nvSpPr>
+        <p:spPr>
+          <a:xfrm xmlns:a="http://schemas.openxmlformats.org/drawingml/2006/main">
+            <a:off x="10096500" y="2038350"/>
+            <a:ext cx="3829050" cy="47625"/>
+          </a:xfrm>
+          <a:prstGeom xmlns:a="http://schemas.openxmlformats.org/drawingml/2006/main" prst="rect">
+            <a:avLst/>
+          </a:prstGeom>
+          <a:solidFill xmlns:a="http://schemas.openxmlformats.org/drawingml/2006/main">
+            <a:srgbClr val="2A9D67"/>
+          </a:solidFill>
+          <a:ln xmlns:a="http://schemas.openxmlformats.org/drawingml/2006/main" w="0">
+            <a:noFill/>
+            <a:prstDash val="solid"/>
+          </a:ln>
+        </p:spPr>
+      </p:sp>
+      <p:sp>
+        <p:nvSpPr>
+          <p:cNvPr id="10" name="s6-result-number-3">
+            <a:extLst xmlns:a="http://schemas.openxmlformats.org/drawingml/2006/main">
+              <a:ext uri="{FF2B5EF4-FFF2-40B4-BE49-F238E27FC236}">
+                <a16:creationId xmlns:a16="http://schemas.microsoft.com/office/drawing/2014/main" id="{9681FBF0-3C2B-47EB-8EFF-954C9D4E5DC1}"/>
+              </a:ext>
+            </a:extLst>
+          </p:cNvPr>
+          <p:cNvSpPr>
+            <a:spLocks xmlns:a="http://schemas.openxmlformats.org/drawingml/2006/main" noGrp="1"/>
+          </p:cNvSpPr>
+          <p:nvPr/>
+        </p:nvSpPr>
+        <p:spPr>
+          <a:xfrm xmlns:a="http://schemas.openxmlformats.org/drawingml/2006/main">
+            <a:off x="10096500" y="2286000"/>
+            <a:ext cx="3829050" cy="685800"/>
+          </a:xfrm>
+          <a:prstGeom xmlns:a="http://schemas.openxmlformats.org/drawingml/2006/main" prst="rect">
+            <a:avLst/>
+          </a:prstGeom>
+          <a:noFill xmlns:a="http://schemas.openxmlformats.org/drawingml/2006/main"/>
+          <a:ln xmlns:a="http://schemas.openxmlformats.org/drawingml/2006/main" w="0">
+            <a:noFill/>
+            <a:prstDash val="solid"/>
+          </a:ln>
+        </p:spPr>
+        <p:txBody>
+          <a:bodyPr xmlns:a="http://schemas.openxmlformats.org/drawingml/2006/main" wrap="square" lIns="0" tIns="0" rIns="0" bIns="0" anchor="t">
+            <a:normAutofit fontScale="100000"/>
+          </a:bodyPr>
+          <a:lstStyle xmlns:a="http://schemas.openxmlformats.org/drawingml/2006/main"/>
+          <a:p xmlns:a="http://schemas.openxmlformats.org/drawingml/2006/main">
+            <a:pPr algn="l">
+              <a:defRPr sz="4050" b="1">
+                <a:solidFill>
+                  <a:srgbClr val="102A43"/>
+                </a:solidFill>
+                <a:latin typeface="Arial"/>
+                <a:ea typeface="Arial"/>
+                <a:cs typeface="Arial"/>
+              </a:defRPr>
+            </a:pPr>
+            <a:r>
+              <a:rPr sz="4050" b="1">
+                <a:solidFill>
+                  <a:srgbClr val="102A43"/>
+                </a:solidFill>
+                <a:latin typeface="Arial"/>
+                <a:ea typeface="Arial"/>
+                <a:cs typeface="Arial"/>
+              </a:rPr>
+              <a:t>7/7</a:t>
+            </a:r>
+          </a:p>
+        </p:txBody>
+      </p:sp>
+      <p:sp>
+        <p:nvSpPr>
+          <p:cNvPr id="11" name="s6-result-copy-3">
+            <a:extLst xmlns:a="http://schemas.openxmlformats.org/drawingml/2006/main">
+              <a:ext uri="{FF2B5EF4-FFF2-40B4-BE49-F238E27FC236}">
+                <a16:creationId xmlns:a16="http://schemas.microsoft.com/office/drawing/2014/main" id="{A3EDE18E-A262-4B5E-A4EF-E2786AC8E67D}"/>
+              </a:ext>
+            </a:extLst>
+          </p:cNvPr>
+          <p:cNvSpPr>
+            <a:spLocks xmlns:a="http://schemas.openxmlformats.org/drawingml/2006/main" noGrp="1"/>
+          </p:cNvSpPr>
+          <p:nvPr/>
+        </p:nvSpPr>
+        <p:spPr>
+          <a:xfrm xmlns:a="http://schemas.openxmlformats.org/drawingml/2006/main">
+            <a:off x="10096500" y="3000375"/>
+            <a:ext cx="3829050" cy="714375"/>
+          </a:xfrm>
+          <a:prstGeom xmlns:a="http://schemas.openxmlformats.org/drawingml/2006/main" prst="rect">
+            <a:avLst/>
+          </a:prstGeom>
+          <a:noFill xmlns:a="http://schemas.openxmlformats.org/drawingml/2006/main"/>
+          <a:ln xmlns:a="http://schemas.openxmlformats.org/drawingml/2006/main" w="0">
+            <a:noFill/>
+            <a:prstDash val="solid"/>
+          </a:ln>
+        </p:spPr>
+        <p:txBody>
+          <a:bodyPr xmlns:a="http://schemas.openxmlformats.org/drawingml/2006/main" wrap="square" lIns="0" tIns="0" rIns="0" bIns="0" anchor="t">
+            <a:normAutofit fontScale="100000"/>
+          </a:bodyPr>
+          <a:lstStyle xmlns:a="http://schemas.openxmlformats.org/drawingml/2006/main"/>
+          <a:p xmlns:a="http://schemas.openxmlformats.org/drawingml/2006/main">
+            <a:pPr algn="l">
+              <a:lnSpc>
+                <a:spcPct val="115000"/>
+              </a:lnSpc>
+              <a:buNone/>
+              <a:defRPr sz="1500" b="0">
+                <a:solidFill>
+                  <a:srgbClr val="617080"/>
+                </a:solidFill>
+                <a:latin typeface="Arial"/>
+                <a:ea typeface="Arial"/>
+                <a:cs typeface="Arial"/>
+              </a:defRPr>
+            </a:pPr>
+            <a:r>
+              <a:rPr sz="1500" b="0">
+                <a:solidFill>
+                  <a:srgbClr val="617080"/>
+                </a:solidFill>
+                <a:latin typeface="Arial"/>
+                <a:ea typeface="Arial"/>
+                <a:cs typeface="Arial"/>
+              </a:rPr>
+              <a:t>Evaluation assertions passed for alerts and AI briefing cases.</a:t>
+            </a:r>
+          </a:p>
+        </p:txBody>
+      </p:sp>
+      <p:sp>
+        <p:nvSpPr>
+          <p:cNvPr id="12" name="s6-left-rule">
+            <a:extLst xmlns:a="http://schemas.openxmlformats.org/drawingml/2006/main">
+              <a:ext uri="{FF2B5EF4-FFF2-40B4-BE49-F238E27FC236}">
+                <a16:creationId xmlns:a16="http://schemas.microsoft.com/office/drawing/2014/main" id="{C5D33A46-9C1B-4355-BEF5-F737BEC7B527}"/>
+              </a:ext>
+            </a:extLst>
+          </p:cNvPr>
+          <p:cNvSpPr>
+            <a:spLocks xmlns:a="http://schemas.openxmlformats.org/drawingml/2006/main" noGrp="1"/>
+          </p:cNvSpPr>
+          <p:nvPr/>
+        </p:nvSpPr>
+        <p:spPr>
+          <a:xfrm xmlns:a="http://schemas.openxmlformats.org/drawingml/2006/main">
+            <a:off x="933450" y="4429125"/>
+            <a:ext cx="5753100" cy="57150"/>
+          </a:xfrm>
+          <a:prstGeom xmlns:a="http://schemas.openxmlformats.org/drawingml/2006/main" prst="rect">
+            <a:avLst/>
+          </a:prstGeom>
+          <a:solidFill xmlns:a="http://schemas.openxmlformats.org/drawingml/2006/main">
+            <a:srgbClr val="2A9D67"/>
+          </a:solidFill>
+          <a:ln xmlns:a="http://schemas.openxmlformats.org/drawingml/2006/main" w="0">
+            <a:noFill/>
+            <a:prstDash val="solid"/>
+          </a:ln>
+        </p:spPr>
+      </p:sp>
+      <p:sp>
+        <p:nvSpPr>
+          <p:cNvPr id="13" name="s6-left-heading">
+            <a:extLst xmlns:a="http://schemas.openxmlformats.org/drawingml/2006/main">
+              <a:ext uri="{FF2B5EF4-FFF2-40B4-BE49-F238E27FC236}">
+                <a16:creationId xmlns:a16="http://schemas.microsoft.com/office/drawing/2014/main" id="{2A0CCCA1-83F8-4C10-AE80-0DF1C40C9C3C}"/>
+              </a:ext>
+            </a:extLst>
+          </p:cNvPr>
+          <p:cNvSpPr>
+            <a:spLocks xmlns:a="http://schemas.openxmlformats.org/drawingml/2006/main" noGrp="1"/>
+          </p:cNvSpPr>
+          <p:nvPr/>
+        </p:nvSpPr>
+        <p:spPr>
+          <a:xfrm xmlns:a="http://schemas.openxmlformats.org/drawingml/2006/main">
+            <a:off x="1238250" y="4762500"/>
+            <a:ext cx="5143500" cy="361950"/>
+          </a:xfrm>
+          <a:prstGeom xmlns:a="http://schemas.openxmlformats.org/drawingml/2006/main" prst="rect">
+            <a:avLst/>
+          </a:prstGeom>
+          <a:noFill xmlns:a="http://schemas.openxmlformats.org/drawingml/2006/main"/>
+          <a:ln xmlns:a="http://schemas.openxmlformats.org/drawingml/2006/main" w="0">
+            <a:noFill/>
+            <a:prstDash val="solid"/>
+          </a:ln>
+        </p:spPr>
+        <p:txBody>
+          <a:bodyPr xmlns:a="http://schemas.openxmlformats.org/drawingml/2006/main" wrap="square" lIns="0" tIns="0" rIns="0" bIns="0" anchor="t">
+            <a:normAutofit fontScale="100000"/>
+          </a:bodyPr>
+          <a:lstStyle xmlns:a="http://schemas.openxmlformats.org/drawingml/2006/main"/>
+          <a:p xmlns:a="http://schemas.openxmlformats.org/drawingml/2006/main">
+            <a:pPr algn="l">
+              <a:defRPr sz="1950" b="1">
+                <a:solidFill>
+                  <a:srgbClr val="102A43"/>
+                </a:solidFill>
+                <a:latin typeface="Arial"/>
+                <a:ea typeface="Arial"/>
+                <a:cs typeface="Arial"/>
+              </a:defRPr>
+            </a:pPr>
+            <a:r>
+              <a:rPr sz="1950" b="1">
+                <a:solidFill>
+                  <a:srgbClr val="102A43"/>
+                </a:solidFill>
+                <a:latin typeface="Arial"/>
+                <a:ea typeface="Arial"/>
+                <a:cs typeface="Arial"/>
+              </a:rPr>
+              <a:t>Deterministic code creates the alert</a:t>
+            </a:r>
+          </a:p>
+        </p:txBody>
+      </p:sp>
+      <p:sp>
+        <p:nvSpPr>
+          <p:cNvPr id="14" name="s6-left-copy">
+            <a:extLst xmlns:a="http://schemas.openxmlformats.org/drawingml/2006/main">
+              <a:ext uri="{FF2B5EF4-FFF2-40B4-BE49-F238E27FC236}">
+                <a16:creationId xmlns:a16="http://schemas.microsoft.com/office/drawing/2014/main" id="{F23796CE-28B9-4C0A-BA02-5B8AD8E2C4A8}"/>
+              </a:ext>
+            </a:extLst>
+          </p:cNvPr>
+          <p:cNvSpPr>
+            <a:spLocks xmlns:a="http://schemas.openxmlformats.org/drawingml/2006/main" noGrp="1"/>
+          </p:cNvSpPr>
+          <p:nvPr/>
+        </p:nvSpPr>
+        <p:spPr>
+          <a:xfrm xmlns:a="http://schemas.openxmlformats.org/drawingml/2006/main">
+            <a:off x="1238250" y="5257800"/>
+            <a:ext cx="5143500" cy="952500"/>
+          </a:xfrm>
+          <a:prstGeom xmlns:a="http://schemas.openxmlformats.org/drawingml/2006/main" prst="rect">
+            <a:avLst/>
+          </a:prstGeom>
+          <a:noFill xmlns:a="http://schemas.openxmlformats.org/drawingml/2006/main"/>
+          <a:ln xmlns:a="http://schemas.openxmlformats.org/drawingml/2006/main" w="0">
+            <a:noFill/>
+            <a:prstDash val="solid"/>
+          </a:ln>
+        </p:spPr>
+        <p:txBody>
+          <a:bodyPr xmlns:a="http://schemas.openxmlformats.org/drawingml/2006/main" wrap="square" lIns="0" tIns="0" rIns="0" bIns="0" anchor="t">
+            <a:normAutofit fontScale="100000"/>
+          </a:bodyPr>
+          <a:lstStyle xmlns:a="http://schemas.openxmlformats.org/drawingml/2006/main"/>
+          <a:p xmlns:a="http://schemas.openxmlformats.org/drawingml/2006/main">
+            <a:pPr algn="l">
+              <a:lnSpc>
+                <a:spcPct val="115000"/>
+              </a:lnSpc>
+              <a:buNone/>
+              <a:defRPr sz="1575" b="0">
+                <a:solidFill>
+                  <a:srgbClr val="617080"/>
+                </a:solidFill>
+                <a:latin typeface="Arial"/>
+                <a:ea typeface="Arial"/>
+                <a:cs typeface="Arial"/>
+              </a:defRPr>
+            </a:pPr>
+            <a:r>
+              <a:rPr sz="1575" b="0">
+                <a:solidFill>
+                  <a:srgbClr val="617080"/>
+                </a:solidFill>
+                <a:latin typeface="Arial"/>
+                <a:ea typeface="Arial"/>
+                <a:cs typeface="Arial"/>
+              </a:rPr>
+              <a:t>Validate events → calculate rolling maximum → detect threshold crossing → assign risk label.</a:t>
+            </a:r>
+          </a:p>
+        </p:txBody>
+      </p:sp>
+      <p:sp>
+        <p:nvSpPr>
+          <p:cNvPr id="15" name="s6-boundary-arrow">
+            <a:extLst xmlns:a="http://schemas.openxmlformats.org/drawingml/2006/main">
+              <a:ext uri="{FF2B5EF4-FFF2-40B4-BE49-F238E27FC236}">
+                <a16:creationId xmlns:a16="http://schemas.microsoft.com/office/drawing/2014/main" id="{6E7477B7-9D07-4475-86DA-F6D233FCC2C4}"/>
+              </a:ext>
+            </a:extLst>
+          </p:cNvPr>
+          <p:cNvSpPr>
+            <a:spLocks xmlns:a="http://schemas.openxmlformats.org/drawingml/2006/main" noGrp="1"/>
+          </p:cNvSpPr>
+          <p:nvPr/>
+        </p:nvSpPr>
+        <p:spPr>
+          <a:xfrm xmlns:a="http://schemas.openxmlformats.org/drawingml/2006/main">
+            <a:off x="7191375" y="5095875"/>
+            <a:ext cx="857250" cy="552450"/>
+          </a:xfrm>
+          <a:prstGeom xmlns:a="http://schemas.openxmlformats.org/drawingml/2006/main" prst="rect">
+            <a:avLst/>
+          </a:prstGeom>
+          <a:noFill xmlns:a="http://schemas.openxmlformats.org/drawingml/2006/main"/>
+          <a:ln xmlns:a="http://schemas.openxmlformats.org/drawingml/2006/main" w="0">
+            <a:noFill/>
+            <a:prstDash val="solid"/>
+          </a:ln>
+        </p:spPr>
+        <p:txBody>
+          <a:bodyPr xmlns:a="http://schemas.openxmlformats.org/drawingml/2006/main" wrap="square" lIns="0" tIns="0" rIns="0" bIns="0" anchor="t">
+            <a:normAutofit fontScale="100000"/>
+          </a:bodyPr>
+          <a:lstStyle xmlns:a="http://schemas.openxmlformats.org/drawingml/2006/main"/>
+          <a:p xmlns:a="http://schemas.openxmlformats.org/drawingml/2006/main">
+            <a:pPr algn="ctr">
+              <a:defRPr sz="3225" b="1">
+                <a:solidFill>
+                  <a:srgbClr val="2F6FED"/>
+                </a:solidFill>
+                <a:latin typeface="Arial"/>
+                <a:ea typeface="Arial"/>
+                <a:cs typeface="Arial"/>
+              </a:defRPr>
+            </a:pPr>
+            <a:r>
+              <a:rPr sz="3225" b="1">
+                <a:solidFill>
+                  <a:srgbClr val="2F6FED"/>
+                </a:solidFill>
+                <a:latin typeface="Arial"/>
+                <a:ea typeface="Arial"/>
+                <a:cs typeface="Arial"/>
+              </a:rPr>
+              <a:t>→</a:t>
+            </a:r>
+          </a:p>
+        </p:txBody>
+      </p:sp>
+      <p:sp>
+        <p:nvSpPr>
+          <p:cNvPr id="16" name="s6-right-rule">
+            <a:extLst xmlns:a="http://schemas.openxmlformats.org/drawingml/2006/main">
+              <a:ext uri="{FF2B5EF4-FFF2-40B4-BE49-F238E27FC236}">
+                <a16:creationId xmlns:a16="http://schemas.microsoft.com/office/drawing/2014/main" id="{C52AC69F-0921-4DAD-B86D-030849BA7382}"/>
+              </a:ext>
+            </a:extLst>
+          </p:cNvPr>
+          <p:cNvSpPr>
+            <a:spLocks xmlns:a="http://schemas.openxmlformats.org/drawingml/2006/main" noGrp="1"/>
+          </p:cNvSpPr>
+          <p:nvPr/>
+        </p:nvSpPr>
+        <p:spPr>
+          <a:xfrm xmlns:a="http://schemas.openxmlformats.org/drawingml/2006/main">
+            <a:off x="8553450" y="4429125"/>
+            <a:ext cx="5753100" cy="57150"/>
+          </a:xfrm>
+          <a:prstGeom xmlns:a="http://schemas.openxmlformats.org/drawingml/2006/main" prst="rect">
+            <a:avLst/>
+          </a:prstGeom>
+          <a:solidFill xmlns:a="http://schemas.openxmlformats.org/drawingml/2006/main">
+            <a:srgbClr val="F4A261"/>
+          </a:solidFill>
+          <a:ln xmlns:a="http://schemas.openxmlformats.org/drawingml/2006/main" w="0">
+            <a:noFill/>
+            <a:prstDash val="solid"/>
+          </a:ln>
+        </p:spPr>
+      </p:sp>
+      <p:sp>
+        <p:nvSpPr>
+          <p:cNvPr id="17" name="s6-right-heading">
+            <a:extLst xmlns:a="http://schemas.openxmlformats.org/drawingml/2006/main">
+              <a:ext uri="{FF2B5EF4-FFF2-40B4-BE49-F238E27FC236}">
+                <a16:creationId xmlns:a16="http://schemas.microsoft.com/office/drawing/2014/main" id="{03AF8886-E13B-4BBA-9335-AB70D01B2247}"/>
+              </a:ext>
+            </a:extLst>
+          </p:cNvPr>
+          <p:cNvSpPr>
+            <a:spLocks xmlns:a="http://schemas.openxmlformats.org/drawingml/2006/main" noGrp="1"/>
+          </p:cNvSpPr>
+          <p:nvPr/>
+        </p:nvSpPr>
+        <p:spPr>
+          <a:xfrm xmlns:a="http://schemas.openxmlformats.org/drawingml/2006/main">
+            <a:off x="8858250" y="4762500"/>
+            <a:ext cx="5143500" cy="361950"/>
+          </a:xfrm>
+          <a:prstGeom xmlns:a="http://schemas.openxmlformats.org/drawingml/2006/main" prst="rect">
+            <a:avLst/>
+          </a:prstGeom>
+          <a:noFill xmlns:a="http://schemas.openxmlformats.org/drawingml/2006/main"/>
+          <a:ln xmlns:a="http://schemas.openxmlformats.org/drawingml/2006/main" w="0">
+            <a:noFill/>
+            <a:prstDash val="solid"/>
+          </a:ln>
+        </p:spPr>
+        <p:txBody>
+          <a:bodyPr xmlns:a="http://schemas.openxmlformats.org/drawingml/2006/main" wrap="square" lIns="0" tIns="0" rIns="0" bIns="0" anchor="t">
+            <a:normAutofit fontScale="100000"/>
+          </a:bodyPr>
+          <a:lstStyle xmlns:a="http://schemas.openxmlformats.org/drawingml/2006/main"/>
+          <a:p xmlns:a="http://schemas.openxmlformats.org/drawingml/2006/main">
+            <a:pPr algn="l">
+              <a:defRPr sz="1950" b="1">
+                <a:solidFill>
+                  <a:srgbClr val="102A43"/>
+                </a:solidFill>
+                <a:latin typeface="Arial"/>
+                <a:ea typeface="Arial"/>
+                <a:cs typeface="Arial"/>
+              </a:defRPr>
+            </a:pPr>
+            <a:r>
+              <a:rPr sz="1950" b="1">
+                <a:solidFill>
+                  <a:srgbClr val="102A43"/>
+                </a:solidFill>
+                <a:latin typeface="Arial"/>
+                <a:ea typeface="Arial"/>
+                <a:cs typeface="Arial"/>
+              </a:rPr>
+              <a:t>AI explains the completed alert</a:t>
+            </a:r>
+          </a:p>
+        </p:txBody>
+      </p:sp>
+      <p:sp>
+        <p:nvSpPr>
+          <p:cNvPr id="18" name="s6-right-copy">
+            <a:extLst xmlns:a="http://schemas.openxmlformats.org/drawingml/2006/main">
+              <a:ext uri="{FF2B5EF4-FFF2-40B4-BE49-F238E27FC236}">
+                <a16:creationId xmlns:a16="http://schemas.microsoft.com/office/drawing/2014/main" id="{DB886164-B97A-48B8-8646-BC60F009073B}"/>
+              </a:ext>
+            </a:extLst>
+          </p:cNvPr>
+          <p:cNvSpPr>
+            <a:spLocks xmlns:a="http://schemas.openxmlformats.org/drawingml/2006/main" noGrp="1"/>
+          </p:cNvSpPr>
+          <p:nvPr/>
+        </p:nvSpPr>
+        <p:spPr>
+          <a:xfrm xmlns:a="http://schemas.openxmlformats.org/drawingml/2006/main">
+            <a:off x="8858250" y="5257800"/>
+            <a:ext cx="5143500" cy="952500"/>
+          </a:xfrm>
+          <a:prstGeom xmlns:a="http://schemas.openxmlformats.org/drawingml/2006/main" prst="rect">
+            <a:avLst/>
+          </a:prstGeom>
+          <a:noFill xmlns:a="http://schemas.openxmlformats.org/drawingml/2006/main"/>
+          <a:ln xmlns:a="http://schemas.openxmlformats.org/drawingml/2006/main" w="0">
+            <a:noFill/>
+            <a:prstDash val="solid"/>
+          </a:ln>
+        </p:spPr>
+        <p:txBody>
+          <a:bodyPr xmlns:a="http://schemas.openxmlformats.org/drawingml/2006/main" wrap="square" lIns="0" tIns="0" rIns="0" bIns="0" anchor="t">
+            <a:normAutofit fontScale="100000"/>
+          </a:bodyPr>
+          <a:lstStyle xmlns:a="http://schemas.openxmlformats.org/drawingml/2006/main"/>
+          <a:p xmlns:a="http://schemas.openxmlformats.org/drawingml/2006/main">
+            <a:pPr algn="l">
+              <a:lnSpc>
+                <a:spcPct val="115000"/>
+              </a:lnSpc>
+              <a:buNone/>
+              <a:defRPr sz="1575" b="0">
+                <a:solidFill>
+                  <a:srgbClr val="617080"/>
+                </a:solidFill>
+                <a:latin typeface="Arial"/>
+                <a:ea typeface="Arial"/>
+                <a:cs typeface="Arial"/>
+              </a:defRPr>
+            </a:pPr>
+            <a:r>
+              <a:rPr sz="1575" b="0">
+                <a:solidFill>
+                  <a:srgbClr val="617080"/>
+                </a:solidFill>
+                <a:latin typeface="Arial"/>
+                <a:ea typeface="Arial"/>
+                <a:cs typeface="Arial"/>
+              </a:rPr>
+              <a:t>Latest Kp · rolling maximum · window start · window end · risk label.</a:t>
+            </a:r>
+          </a:p>
+        </p:txBody>
+      </p:sp>
+      <p:sp>
+        <p:nvSpPr>
+          <p:cNvPr id="19" name="s6-evidence">
+            <a:extLst xmlns:a="http://schemas.openxmlformats.org/drawingml/2006/main">
+              <a:ext uri="{FF2B5EF4-FFF2-40B4-BE49-F238E27FC236}">
+                <a16:creationId xmlns:a16="http://schemas.microsoft.com/office/drawing/2014/main" id="{186E69A8-C978-4325-A20F-35C09415A274}"/>
+              </a:ext>
+            </a:extLst>
+          </p:cNvPr>
+          <p:cNvSpPr>
+            <a:spLocks xmlns:a="http://schemas.openxmlformats.org/drawingml/2006/main" noGrp="1"/>
+          </p:cNvSpPr>
+          <p:nvPr/>
+        </p:nvSpPr>
+        <p:spPr>
+          <a:xfrm xmlns:a="http://schemas.openxmlformats.org/drawingml/2006/main">
+            <a:off x="933450" y="7029450"/>
+            <a:ext cx="13373100" cy="571500"/>
+          </a:xfrm>
+          <a:prstGeom xmlns:a="http://schemas.openxmlformats.org/drawingml/2006/main" prst="rect">
+            <a:avLst/>
+          </a:prstGeom>
+          <a:noFill xmlns:a="http://schemas.openxmlformats.org/drawingml/2006/main"/>
+          <a:ln xmlns:a="http://schemas.openxmlformats.org/drawingml/2006/main" w="0">
+            <a:noFill/>
+            <a:prstDash val="solid"/>
+          </a:ln>
+        </p:spPr>
+        <p:txBody>
+          <a:bodyPr xmlns:a="http://schemas.openxmlformats.org/drawingml/2006/main" wrap="square" lIns="0" tIns="0" rIns="0" bIns="0" anchor="t">
+            <a:normAutofit fontScale="100000"/>
+          </a:bodyPr>
+          <a:lstStyle xmlns:a="http://schemas.openxmlformats.org/drawingml/2006/main"/>
+          <a:p xmlns:a="http://schemas.openxmlformats.org/drawingml/2006/main">
+            <a:pPr algn="l">
+              <a:lnSpc>
+                <a:spcPct val="115000"/>
+              </a:lnSpc>
+              <a:buNone/>
+              <a:defRPr sz="1725" b="0">
+                <a:solidFill>
+                  <a:srgbClr val="17212B"/>
+                </a:solidFill>
+                <a:latin typeface="Arial"/>
+                <a:ea typeface="Arial"/>
+                <a:cs typeface="Arial"/>
+              </a:defRPr>
+            </a:pPr>
+            <a:r>
+              <a:rPr sz="1725" b="1">
+                <a:solidFill>
+                  <a:srgbClr val="17212B"/>
+                </a:solidFill>
+                <a:latin typeface="Arial"/>
+                <a:ea typeface="Arial"/>
+                <a:cs typeface="Arial"/>
+              </a:rPr>
+              <a:t>Verified:</a:t>
+            </a:r>
+            <a:r>
+              <a:rPr sz="1725" b="0">
+                <a:solidFill>
+                  <a:srgbClr val="17212B"/>
+                </a:solidFill>
+                <a:latin typeface="Arial"/>
+                <a:ea typeface="Arial"/>
+                <a:cs typeface="Arial"/>
+              </a:rPr>
+              <a:t> 167 standard tests; all 3 Docker-backed Kafka integration tests also passed separately.</a:t>
+            </a:r>
+          </a:p>
+        </p:txBody>
+      </p:sp>
+      <p:sp>
+        <p:nvSpPr>
+          <p:cNvPr id="20" name="footer-6-label">
+            <a:extLst xmlns:a="http://schemas.openxmlformats.org/drawingml/2006/main">
+              <a:ext uri="{FF2B5EF4-FFF2-40B4-BE49-F238E27FC236}">
+                <a16:creationId xmlns:a16="http://schemas.microsoft.com/office/drawing/2014/main" id="{4A25BB09-87FD-4A48-BB76-238882810B0A}"/>
+              </a:ext>
+            </a:extLst>
+          </p:cNvPr>
+          <p:cNvSpPr>
+            <a:spLocks xmlns:a="http://schemas.openxmlformats.org/drawingml/2006/main" noGrp="1"/>
+          </p:cNvSpPr>
+          <p:nvPr/>
+        </p:nvSpPr>
+        <p:spPr>
+          <a:xfrm xmlns:a="http://schemas.openxmlformats.org/drawingml/2006/main">
+            <a:off x="933450" y="8191500"/>
+            <a:ext cx="11906250" cy="209550"/>
+          </a:xfrm>
+          <a:prstGeom xmlns:a="http://schemas.openxmlformats.org/drawingml/2006/main" prst="rect">
+            <a:avLst/>
+          </a:prstGeom>
+          <a:noFill xmlns:a="http://schemas.openxmlformats.org/drawingml/2006/main"/>
+          <a:ln xmlns:a="http://schemas.openxmlformats.org/drawingml/2006/main" w="0">
+            <a:noFill/>
+            <a:prstDash val="solid"/>
+          </a:ln>
+        </p:spPr>
+        <p:txBody>
+          <a:bodyPr xmlns:a="http://schemas.openxmlformats.org/drawingml/2006/main" wrap="square" lIns="0" tIns="0" rIns="0" bIns="0" anchor="t">
+            <a:normAutofit fontScale="100000"/>
+          </a:bodyPr>
+          <a:lstStyle xmlns:a="http://schemas.openxmlformats.org/drawingml/2006/main"/>
+          <a:p xmlns:a="http://schemas.openxmlformats.org/drawingml/2006/main">
+            <a:pPr algn="l">
+              <a:defRPr sz="1125" b="0">
+                <a:solidFill>
+                  <a:srgbClr val="8894A0"/>
+                </a:solidFill>
+                <a:latin typeface="Arial"/>
+                <a:ea typeface="Arial"/>
+                <a:cs typeface="Arial"/>
+              </a:defRPr>
+            </a:pPr>
+            <a:r>
+              <a:rPr sz="1125" b="0">
+                <a:solidFill>
+                  <a:srgbClr val="8894A0"/>
+                </a:solidFill>
+                <a:latin typeface="Arial"/>
+                <a:ea typeface="Arial"/>
+                <a:cs typeface="Arial"/>
+              </a:rPr>
+              <a:t>Reproducible with one command and no credentials</a:t>
+            </a:r>
+          </a:p>
+        </p:txBody>
+      </p:sp>
+      <p:sp>
+        <p:nvSpPr>
+          <p:cNvPr id="21" name="footer-6-number">
+            <a:extLst xmlns:a="http://schemas.openxmlformats.org/drawingml/2006/main">
+              <a:ext uri="{FF2B5EF4-FFF2-40B4-BE49-F238E27FC236}">
+                <a16:creationId xmlns:a16="http://schemas.microsoft.com/office/drawing/2014/main" id="{B49D803E-EDA5-49E5-B076-49FF50A70E25}"/>
+              </a:ext>
+            </a:extLst>
+          </p:cNvPr>
+          <p:cNvSpPr>
+            <a:spLocks xmlns:a="http://schemas.openxmlformats.org/drawingml/2006/main" noGrp="1"/>
+          </p:cNvSpPr>
+          <p:nvPr/>
+        </p:nvSpPr>
+        <p:spPr>
+          <a:xfrm xmlns:a="http://schemas.openxmlformats.org/drawingml/2006/main">
+            <a:off x="13811250" y="8191500"/>
+            <a:ext cx="495300" cy="209550"/>
+          </a:xfrm>
+          <a:prstGeom xmlns:a="http://schemas.openxmlformats.org/drawingml/2006/main" prst="rect">
+            <a:avLst/>
+          </a:prstGeom>
+          <a:noFill xmlns:a="http://schemas.openxmlformats.org/drawingml/2006/main"/>
+          <a:ln xmlns:a="http://schemas.openxmlformats.org/drawingml/2006/main" w="0">
+            <a:noFill/>
+            <a:prstDash val="solid"/>
+          </a:ln>
+        </p:spPr>
+        <p:txBody>
+          <a:bodyPr xmlns:a="http://schemas.openxmlformats.org/drawingml/2006/main" wrap="square" lIns="0" tIns="0" rIns="0" bIns="0" anchor="t">
+            <a:normAutofit fontScale="100000"/>
+          </a:bodyPr>
+          <a:lstStyle xmlns:a="http://schemas.openxmlformats.org/drawingml/2006/main"/>
+          <a:p xmlns:a="http://schemas.openxmlformats.org/drawingml/2006/main">
+            <a:pPr algn="r">
+              <a:defRPr sz="1125" b="0">
+                <a:solidFill>
+                  <a:srgbClr val="8894A0"/>
+                </a:solidFill>
+                <a:latin typeface="Arial"/>
+                <a:ea typeface="Arial"/>
+                <a:cs typeface="Arial"/>
+              </a:defRPr>
+            </a:pPr>
+            <a:r>
+              <a:rPr sz="1125" b="0">
+                <a:solidFill>
+                  <a:srgbClr val="8894A0"/>
+                </a:solidFill>
+                <a:latin typeface="Arial"/>
+                <a:ea typeface="Arial"/>
+                <a:cs typeface="Arial"/>
+              </a:rPr>
+              <a:t>6</a:t>
+            </a:r>
+          </a:p>
+        </p:txBody>
+      </p:sp>
     </p:spTree>
     <p:extLst>
       <p:ext uri="{BB962C8B-B14F-4D97-AF65-F5344CB8AC3E}">
-        <p14:creationId xmlns:p14="http://schemas.microsoft.com/office/powerpoint/2010/main" val="1307523895"/>
+        <p14:creationId xmlns:p14="http://schemas.microsoft.com/office/powerpoint/2010/main" val="442852058"/>
       </p:ext>
     </p:extLst>
   </p:cSld>
@@ -1801,6 +7164,13 @@
 <file path=ppt/slides/slide7.xml><?xml version="1.0" encoding="utf-8"?>
 <p:sld xmlns:p="http://schemas.openxmlformats.org/presentationml/2006/main">
   <p:cSld>
+    <p:bg>
+      <p:bgPr>
+        <a:solidFill xmlns:a="http://schemas.openxmlformats.org/drawingml/2006/main">
+          <a:srgbClr val="F8F6F1"/>
+        </a:solidFill>
+      </p:bgPr>
+    </p:bg>
     <p:spTree>
       <p:nvGrpSpPr>
         <p:cNvPr id="1" name=""/>
@@ -1810,32 +7180,699 @@
       <p:grpSpPr>
         <a:xfrm xmlns:a="http://schemas.openxmlformats.org/drawingml/2006/main"/>
       </p:grpSpPr>
-      <p:pic>
-        <p:nvPicPr>
-          <p:cNvPr id="2" name=""/>
-          <p:cNvPicPr>
-            <a:picLocks xmlns:a="http://schemas.openxmlformats.org/drawingml/2006/main" noChangeAspect="1"/>
-          </p:cNvPicPr>
-          <p:nvPr/>
-        </p:nvPicPr>
-        <p:blipFill>
-          <a:blip xmlns:r="http://schemas.openxmlformats.org/officeDocument/2006/relationships" xmlns:a="http://schemas.openxmlformats.org/drawingml/2006/main" r:embed="R40df1a3139a94b66"/>
-          <a:stretch xmlns:a="http://schemas.openxmlformats.org/drawingml/2006/main"/>
-        </p:blipFill>
-        <p:spPr>
-          <a:xfrm xmlns:a="http://schemas.openxmlformats.org/drawingml/2006/main">
-            <a:off x="0" y="0"/>
-            <a:ext cx="15240000" cy="8572500"/>
-          </a:xfrm>
-          <a:prstGeom xmlns:a="http://schemas.openxmlformats.org/drawingml/2006/main" prst="rect">
-            <a:avLst/>
-          </a:prstGeom>
-        </p:spPr>
-      </p:pic>
+      <p:sp>
+        <p:nvSpPr>
+          <p:cNvPr id="13" name="eyebrow-Lesson, limitation">
+            <a:extLst xmlns:a="http://schemas.openxmlformats.org/drawingml/2006/main">
+              <a:ext uri="{FF2B5EF4-FFF2-40B4-BE49-F238E27FC236}">
+                <a16:creationId xmlns:a16="http://schemas.microsoft.com/office/drawing/2014/main" id="{6B7F9630-0865-4F44-B5C9-298A3EA90C1C}"/>
+              </a:ext>
+            </a:extLst>
+          </p:cNvPr>
+          <p:cNvSpPr>
+            <a:spLocks xmlns:a="http://schemas.openxmlformats.org/drawingml/2006/main" noGrp="1"/>
+          </p:cNvSpPr>
+          <p:nvPr/>
+        </p:nvSpPr>
+        <p:spPr>
+          <a:xfrm xmlns:a="http://schemas.openxmlformats.org/drawingml/2006/main">
+            <a:off x="933450" y="457200"/>
+            <a:ext cx="9048750" cy="285750"/>
+          </a:xfrm>
+          <a:prstGeom xmlns:a="http://schemas.openxmlformats.org/drawingml/2006/main" prst="rect">
+            <a:avLst/>
+          </a:prstGeom>
+          <a:noFill xmlns:a="http://schemas.openxmlformats.org/drawingml/2006/main"/>
+          <a:ln xmlns:a="http://schemas.openxmlformats.org/drawingml/2006/main" w="0">
+            <a:noFill/>
+            <a:prstDash val="solid"/>
+          </a:ln>
+        </p:spPr>
+        <p:txBody>
+          <a:bodyPr xmlns:a="http://schemas.openxmlformats.org/drawingml/2006/main" wrap="square" lIns="0" tIns="0" rIns="0" bIns="0" anchor="t">
+            <a:normAutofit fontScale="100000"/>
+          </a:bodyPr>
+          <a:lstStyle xmlns:a="http://schemas.openxmlformats.org/drawingml/2006/main"/>
+          <a:p xmlns:a="http://schemas.openxmlformats.org/drawingml/2006/main">
+            <a:pPr algn="l">
+              <a:defRPr sz="1275" b="1">
+                <a:solidFill>
+                  <a:srgbClr val="2F6FED"/>
+                </a:solidFill>
+                <a:latin typeface="Arial"/>
+                <a:ea typeface="Arial"/>
+                <a:cs typeface="Arial"/>
+              </a:defRPr>
+            </a:pPr>
+            <a:r>
+              <a:rPr sz="1275" b="1">
+                <a:solidFill>
+                  <a:srgbClr val="2F6FED"/>
+                </a:solidFill>
+                <a:latin typeface="Arial"/>
+                <a:ea typeface="Arial"/>
+                <a:cs typeface="Arial"/>
+              </a:rPr>
+              <a:t>LESSON, LIMITATION, AND NEXT STEP</a:t>
+            </a:r>
+          </a:p>
+        </p:txBody>
+      </p:sp>
+      <p:sp>
+        <p:nvSpPr>
+          <p:cNvPr id="2" name="title-Deterministic repl">
+            <a:extLst xmlns:a="http://schemas.openxmlformats.org/drawingml/2006/main">
+              <a:ext uri="{FF2B5EF4-FFF2-40B4-BE49-F238E27FC236}">
+                <a16:creationId xmlns:a16="http://schemas.microsoft.com/office/drawing/2014/main" id="{89CD0F6C-6C20-43A6-B33C-30889A42FED4}"/>
+              </a:ext>
+            </a:extLst>
+          </p:cNvPr>
+          <p:cNvSpPr>
+            <a:spLocks xmlns:a="http://schemas.openxmlformats.org/drawingml/2006/main" noGrp="1"/>
+          </p:cNvSpPr>
+          <p:nvPr/>
+        </p:nvSpPr>
+        <p:spPr>
+          <a:xfrm xmlns:a="http://schemas.openxmlformats.org/drawingml/2006/main">
+            <a:off x="933450" y="838200"/>
+            <a:ext cx="13373100" cy="1047750"/>
+          </a:xfrm>
+          <a:prstGeom xmlns:a="http://schemas.openxmlformats.org/drawingml/2006/main" prst="rect">
+            <a:avLst/>
+          </a:prstGeom>
+          <a:noFill xmlns:a="http://schemas.openxmlformats.org/drawingml/2006/main"/>
+          <a:ln xmlns:a="http://schemas.openxmlformats.org/drawingml/2006/main" w="0">
+            <a:noFill/>
+            <a:prstDash val="solid"/>
+          </a:ln>
+        </p:spPr>
+        <p:txBody>
+          <a:bodyPr xmlns:a="http://schemas.openxmlformats.org/drawingml/2006/main" wrap="square" lIns="0" tIns="0" rIns="0" bIns="0" anchor="t">
+            <a:normAutofit fontScale="100000"/>
+          </a:bodyPr>
+          <a:lstStyle xmlns:a="http://schemas.openxmlformats.org/drawingml/2006/main"/>
+          <a:p xmlns:a="http://schemas.openxmlformats.org/drawingml/2006/main">
+            <a:pPr algn="l">
+              <a:lnSpc>
+                <a:spcPct val="96000"/>
+              </a:lnSpc>
+              <a:buNone/>
+              <a:defRPr sz="3675" b="1">
+                <a:solidFill>
+                  <a:srgbClr val="102A43"/>
+                </a:solidFill>
+                <a:latin typeface="Arial"/>
+                <a:ea typeface="Arial"/>
+                <a:cs typeface="Arial"/>
+              </a:defRPr>
+            </a:pPr>
+            <a:r>
+              <a:rPr sz="3675" b="1">
+                <a:solidFill>
+                  <a:srgbClr val="102A43"/>
+                </a:solidFill>
+                <a:latin typeface="Arial"/>
+                <a:ea typeface="Arial"/>
+                <a:cs typeface="Arial"/>
+              </a:rPr>
+              <a:t>Deterministic replay made the streaming behavior provable</a:t>
+            </a:r>
+          </a:p>
+        </p:txBody>
+      </p:sp>
+      <p:sp>
+        <p:nvSpPr>
+          <p:cNvPr id="3" name="s7-learned-heading">
+            <a:extLst xmlns:a="http://schemas.openxmlformats.org/drawingml/2006/main">
+              <a:ext uri="{FF2B5EF4-FFF2-40B4-BE49-F238E27FC236}">
+                <a16:creationId xmlns:a16="http://schemas.microsoft.com/office/drawing/2014/main" id="{971FB1CF-95E4-4213-BA7D-33C05BFE8A64}"/>
+              </a:ext>
+            </a:extLst>
+          </p:cNvPr>
+          <p:cNvSpPr>
+            <a:spLocks xmlns:a="http://schemas.openxmlformats.org/drawingml/2006/main" noGrp="1"/>
+          </p:cNvSpPr>
+          <p:nvPr/>
+        </p:nvSpPr>
+        <p:spPr>
+          <a:xfrm xmlns:a="http://schemas.openxmlformats.org/drawingml/2006/main">
+            <a:off x="933450" y="2571750"/>
+            <a:ext cx="6191250" cy="285750"/>
+          </a:xfrm>
+          <a:prstGeom xmlns:a="http://schemas.openxmlformats.org/drawingml/2006/main" prst="rect">
+            <a:avLst/>
+          </a:prstGeom>
+          <a:noFill xmlns:a="http://schemas.openxmlformats.org/drawingml/2006/main"/>
+          <a:ln xmlns:a="http://schemas.openxmlformats.org/drawingml/2006/main" w="0">
+            <a:noFill/>
+            <a:prstDash val="solid"/>
+          </a:ln>
+        </p:spPr>
+        <p:txBody>
+          <a:bodyPr xmlns:a="http://schemas.openxmlformats.org/drawingml/2006/main" wrap="square" lIns="0" tIns="0" rIns="0" bIns="0" anchor="t">
+            <a:normAutofit fontScale="100000"/>
+          </a:bodyPr>
+          <a:lstStyle xmlns:a="http://schemas.openxmlformats.org/drawingml/2006/main"/>
+          <a:p xmlns:a="http://schemas.openxmlformats.org/drawingml/2006/main">
+            <a:pPr algn="l">
+              <a:defRPr sz="1500" b="1">
+                <a:solidFill>
+                  <a:srgbClr val="2F6FED"/>
+                </a:solidFill>
+                <a:latin typeface="Arial"/>
+                <a:ea typeface="Arial"/>
+                <a:cs typeface="Arial"/>
+              </a:defRPr>
+            </a:pPr>
+            <a:r>
+              <a:rPr sz="1500" b="1">
+                <a:solidFill>
+                  <a:srgbClr val="2F6FED"/>
+                </a:solidFill>
+                <a:latin typeface="Arial"/>
+                <a:ea typeface="Arial"/>
+                <a:cs typeface="Arial"/>
+              </a:rPr>
+              <a:t>WHAT WE LEARNED</a:t>
+            </a:r>
+          </a:p>
+        </p:txBody>
+      </p:sp>
+      <p:sp>
+        <p:nvSpPr>
+          <p:cNvPr id="4" name="s7-learned-copy">
+            <a:extLst xmlns:a="http://schemas.openxmlformats.org/drawingml/2006/main">
+              <a:ext uri="{FF2B5EF4-FFF2-40B4-BE49-F238E27FC236}">
+                <a16:creationId xmlns:a16="http://schemas.microsoft.com/office/drawing/2014/main" id="{4B57A443-65EB-4914-BA83-75692A66539C}"/>
+              </a:ext>
+            </a:extLst>
+          </p:cNvPr>
+          <p:cNvSpPr>
+            <a:spLocks xmlns:a="http://schemas.openxmlformats.org/drawingml/2006/main" noGrp="1"/>
+          </p:cNvSpPr>
+          <p:nvPr/>
+        </p:nvSpPr>
+        <p:spPr>
+          <a:xfrm xmlns:a="http://schemas.openxmlformats.org/drawingml/2006/main">
+            <a:off x="933450" y="3000375"/>
+            <a:ext cx="6191250" cy="1238250"/>
+          </a:xfrm>
+          <a:prstGeom xmlns:a="http://schemas.openxmlformats.org/drawingml/2006/main" prst="rect">
+            <a:avLst/>
+          </a:prstGeom>
+          <a:noFill xmlns:a="http://schemas.openxmlformats.org/drawingml/2006/main"/>
+          <a:ln xmlns:a="http://schemas.openxmlformats.org/drawingml/2006/main" w="0">
+            <a:noFill/>
+            <a:prstDash val="solid"/>
+          </a:ln>
+        </p:spPr>
+        <p:txBody>
+          <a:bodyPr xmlns:a="http://schemas.openxmlformats.org/drawingml/2006/main" wrap="square" lIns="0" tIns="0" rIns="0" bIns="0" anchor="t">
+            <a:normAutofit fontScale="100000"/>
+          </a:bodyPr>
+          <a:lstStyle xmlns:a="http://schemas.openxmlformats.org/drawingml/2006/main"/>
+          <a:p xmlns:a="http://schemas.openxmlformats.org/drawingml/2006/main">
+            <a:pPr algn="l">
+              <a:lnSpc>
+                <a:spcPct val="115000"/>
+              </a:lnSpc>
+              <a:buNone/>
+              <a:defRPr sz="2025" b="0">
+                <a:solidFill>
+                  <a:srgbClr val="17212B"/>
+                </a:solidFill>
+                <a:latin typeface="Arial"/>
+                <a:ea typeface="Arial"/>
+                <a:cs typeface="Arial"/>
+              </a:defRPr>
+            </a:pPr>
+            <a:r>
+              <a:rPr sz="2025" b="0">
+                <a:solidFill>
+                  <a:srgbClr val="17212B"/>
+                </a:solidFill>
+                <a:latin typeface="Arial"/>
+                <a:ea typeface="Arial"/>
+                <a:cs typeface="Arial"/>
+              </a:rPr>
+              <a:t>Quiet live data could not demonstrate a threshold crossing. A labeled replay reliably proves crossing, deduplication, window expiry, and rearming.</a:t>
+            </a:r>
+          </a:p>
+        </p:txBody>
+      </p:sp>
+      <p:sp>
+        <p:nvSpPr>
+          <p:cNvPr id="5" name="s7-limitation-heading">
+            <a:extLst xmlns:a="http://schemas.openxmlformats.org/drawingml/2006/main">
+              <a:ext uri="{FF2B5EF4-FFF2-40B4-BE49-F238E27FC236}">
+                <a16:creationId xmlns:a16="http://schemas.microsoft.com/office/drawing/2014/main" id="{6BBB066D-852F-4BB5-BC85-95EA0D0366E3}"/>
+              </a:ext>
+            </a:extLst>
+          </p:cNvPr>
+          <p:cNvSpPr>
+            <a:spLocks xmlns:a="http://schemas.openxmlformats.org/drawingml/2006/main" noGrp="1"/>
+          </p:cNvSpPr>
+          <p:nvPr/>
+        </p:nvSpPr>
+        <p:spPr>
+          <a:xfrm xmlns:a="http://schemas.openxmlformats.org/drawingml/2006/main">
+            <a:off x="933450" y="4667250"/>
+            <a:ext cx="6191250" cy="285750"/>
+          </a:xfrm>
+          <a:prstGeom xmlns:a="http://schemas.openxmlformats.org/drawingml/2006/main" prst="rect">
+            <a:avLst/>
+          </a:prstGeom>
+          <a:noFill xmlns:a="http://schemas.openxmlformats.org/drawingml/2006/main"/>
+          <a:ln xmlns:a="http://schemas.openxmlformats.org/drawingml/2006/main" w="0">
+            <a:noFill/>
+            <a:prstDash val="solid"/>
+          </a:ln>
+        </p:spPr>
+        <p:txBody>
+          <a:bodyPr xmlns:a="http://schemas.openxmlformats.org/drawingml/2006/main" wrap="square" lIns="0" tIns="0" rIns="0" bIns="0" anchor="t">
+            <a:normAutofit fontScale="100000"/>
+          </a:bodyPr>
+          <a:lstStyle xmlns:a="http://schemas.openxmlformats.org/drawingml/2006/main"/>
+          <a:p xmlns:a="http://schemas.openxmlformats.org/drawingml/2006/main">
+            <a:pPr algn="l">
+              <a:defRPr sz="1500" b="1">
+                <a:solidFill>
+                  <a:srgbClr val="2F6FED"/>
+                </a:solidFill>
+                <a:latin typeface="Arial"/>
+                <a:ea typeface="Arial"/>
+                <a:cs typeface="Arial"/>
+              </a:defRPr>
+            </a:pPr>
+            <a:r>
+              <a:rPr sz="1500" b="1">
+                <a:solidFill>
+                  <a:srgbClr val="2F6FED"/>
+                </a:solidFill>
+                <a:latin typeface="Arial"/>
+                <a:ea typeface="Arial"/>
+                <a:cs typeface="Arial"/>
+              </a:rPr>
+              <a:t>LIMITATION</a:t>
+            </a:r>
+          </a:p>
+        </p:txBody>
+      </p:sp>
+      <p:sp>
+        <p:nvSpPr>
+          <p:cNvPr id="6" name="s7-limitation-copy">
+            <a:extLst xmlns:a="http://schemas.openxmlformats.org/drawingml/2006/main">
+              <a:ext uri="{FF2B5EF4-FFF2-40B4-BE49-F238E27FC236}">
+                <a16:creationId xmlns:a16="http://schemas.microsoft.com/office/drawing/2014/main" id="{885F7101-4237-4191-9C8C-BC0FF4505CF2}"/>
+              </a:ext>
+            </a:extLst>
+          </p:cNvPr>
+          <p:cNvSpPr>
+            <a:spLocks xmlns:a="http://schemas.openxmlformats.org/drawingml/2006/main" noGrp="1"/>
+          </p:cNvSpPr>
+          <p:nvPr/>
+        </p:nvSpPr>
+        <p:spPr>
+          <a:xfrm xmlns:a="http://schemas.openxmlformats.org/drawingml/2006/main">
+            <a:off x="933450" y="5095875"/>
+            <a:ext cx="6191250" cy="1047750"/>
+          </a:xfrm>
+          <a:prstGeom xmlns:a="http://schemas.openxmlformats.org/drawingml/2006/main" prst="rect">
+            <a:avLst/>
+          </a:prstGeom>
+          <a:noFill xmlns:a="http://schemas.openxmlformats.org/drawingml/2006/main"/>
+          <a:ln xmlns:a="http://schemas.openxmlformats.org/drawingml/2006/main" w="0">
+            <a:noFill/>
+            <a:prstDash val="solid"/>
+          </a:ln>
+        </p:spPr>
+        <p:txBody>
+          <a:bodyPr xmlns:a="http://schemas.openxmlformats.org/drawingml/2006/main" wrap="square" lIns="0" tIns="0" rIns="0" bIns="0" anchor="t">
+            <a:normAutofit fontScale="100000"/>
+          </a:bodyPr>
+          <a:lstStyle xmlns:a="http://schemas.openxmlformats.org/drawingml/2006/main"/>
+          <a:p xmlns:a="http://schemas.openxmlformats.org/drawingml/2006/main">
+            <a:pPr algn="l">
+              <a:lnSpc>
+                <a:spcPct val="115000"/>
+              </a:lnSpc>
+              <a:buNone/>
+              <a:defRPr sz="2025" b="0">
+                <a:solidFill>
+                  <a:srgbClr val="17212B"/>
+                </a:solidFill>
+                <a:latin typeface="Arial"/>
+                <a:ea typeface="Arial"/>
+                <a:cs typeface="Arial"/>
+              </a:defRPr>
+            </a:pPr>
+            <a:r>
+              <a:rPr sz="2025" b="0">
+                <a:solidFill>
+                  <a:srgbClr val="17212B"/>
+                </a:solidFill>
+                <a:latin typeface="Arial"/>
+                <a:ea typeface="Arial"/>
+                <a:cs typeface="Arial"/>
+              </a:rPr>
+              <a:t>This is a recent global Kp condition – not a forecast or station-level propagation model.</a:t>
+            </a:r>
+          </a:p>
+        </p:txBody>
+      </p:sp>
+      <p:sp>
+        <p:nvSpPr>
+          <p:cNvPr id="7" name="s7-next-heading">
+            <a:extLst xmlns:a="http://schemas.openxmlformats.org/drawingml/2006/main">
+              <a:ext uri="{FF2B5EF4-FFF2-40B4-BE49-F238E27FC236}">
+                <a16:creationId xmlns:a16="http://schemas.microsoft.com/office/drawing/2014/main" id="{EB5842E5-F688-49F6-8ED5-9C9162055A8A}"/>
+              </a:ext>
+            </a:extLst>
+          </p:cNvPr>
+          <p:cNvSpPr>
+            <a:spLocks xmlns:a="http://schemas.openxmlformats.org/drawingml/2006/main" noGrp="1"/>
+          </p:cNvSpPr>
+          <p:nvPr/>
+        </p:nvSpPr>
+        <p:spPr>
+          <a:xfrm xmlns:a="http://schemas.openxmlformats.org/drawingml/2006/main">
+            <a:off x="8077200" y="2571750"/>
+            <a:ext cx="6229350" cy="285750"/>
+          </a:xfrm>
+          <a:prstGeom xmlns:a="http://schemas.openxmlformats.org/drawingml/2006/main" prst="rect">
+            <a:avLst/>
+          </a:prstGeom>
+          <a:noFill xmlns:a="http://schemas.openxmlformats.org/drawingml/2006/main"/>
+          <a:ln xmlns:a="http://schemas.openxmlformats.org/drawingml/2006/main" w="0">
+            <a:noFill/>
+            <a:prstDash val="solid"/>
+          </a:ln>
+        </p:spPr>
+        <p:txBody>
+          <a:bodyPr xmlns:a="http://schemas.openxmlformats.org/drawingml/2006/main" wrap="square" lIns="0" tIns="0" rIns="0" bIns="0" anchor="t">
+            <a:normAutofit fontScale="100000"/>
+          </a:bodyPr>
+          <a:lstStyle xmlns:a="http://schemas.openxmlformats.org/drawingml/2006/main"/>
+          <a:p xmlns:a="http://schemas.openxmlformats.org/drawingml/2006/main">
+            <a:pPr algn="l">
+              <a:defRPr sz="1500" b="1">
+                <a:solidFill>
+                  <a:srgbClr val="2F6FED"/>
+                </a:solidFill>
+                <a:latin typeface="Arial"/>
+                <a:ea typeface="Arial"/>
+                <a:cs typeface="Arial"/>
+              </a:defRPr>
+            </a:pPr>
+            <a:r>
+              <a:rPr sz="1500" b="1">
+                <a:solidFill>
+                  <a:srgbClr val="2F6FED"/>
+                </a:solidFill>
+                <a:latin typeface="Arial"/>
+                <a:ea typeface="Arial"/>
+                <a:cs typeface="Arial"/>
+              </a:rPr>
+              <a:t>REALISTIC NEXT STEP</a:t>
+            </a:r>
+          </a:p>
+        </p:txBody>
+      </p:sp>
+      <p:sp>
+        <p:nvSpPr>
+          <p:cNvPr id="8" name="s7-next-copy">
+            <a:extLst xmlns:a="http://schemas.openxmlformats.org/drawingml/2006/main">
+              <a:ext uri="{FF2B5EF4-FFF2-40B4-BE49-F238E27FC236}">
+                <a16:creationId xmlns:a16="http://schemas.microsoft.com/office/drawing/2014/main" id="{5325B579-80BB-489E-BD95-074FC7706860}"/>
+              </a:ext>
+            </a:extLst>
+          </p:cNvPr>
+          <p:cNvSpPr>
+            <a:spLocks xmlns:a="http://schemas.openxmlformats.org/drawingml/2006/main" noGrp="1"/>
+          </p:cNvSpPr>
+          <p:nvPr/>
+        </p:nvSpPr>
+        <p:spPr>
+          <a:xfrm xmlns:a="http://schemas.openxmlformats.org/drawingml/2006/main">
+            <a:off x="8077200" y="3000375"/>
+            <a:ext cx="6229350" cy="1047750"/>
+          </a:xfrm>
+          <a:prstGeom xmlns:a="http://schemas.openxmlformats.org/drawingml/2006/main" prst="rect">
+            <a:avLst/>
+          </a:prstGeom>
+          <a:noFill xmlns:a="http://schemas.openxmlformats.org/drawingml/2006/main"/>
+          <a:ln xmlns:a="http://schemas.openxmlformats.org/drawingml/2006/main" w="0">
+            <a:noFill/>
+            <a:prstDash val="solid"/>
+          </a:ln>
+        </p:spPr>
+        <p:txBody>
+          <a:bodyPr xmlns:a="http://schemas.openxmlformats.org/drawingml/2006/main" wrap="square" lIns="0" tIns="0" rIns="0" bIns="0" anchor="t">
+            <a:normAutofit fontScale="100000"/>
+          </a:bodyPr>
+          <a:lstStyle xmlns:a="http://schemas.openxmlformats.org/drawingml/2006/main"/>
+          <a:p xmlns:a="http://schemas.openxmlformats.org/drawingml/2006/main">
+            <a:pPr algn="l">
+              <a:lnSpc>
+                <a:spcPct val="115000"/>
+              </a:lnSpc>
+              <a:buNone/>
+              <a:defRPr sz="2025" b="0">
+                <a:solidFill>
+                  <a:srgbClr val="17212B"/>
+                </a:solidFill>
+                <a:latin typeface="Arial"/>
+                <a:ea typeface="Arial"/>
+                <a:cs typeface="Arial"/>
+              </a:defRPr>
+            </a:pPr>
+            <a:r>
+              <a:rPr sz="2025" b="0">
+                <a:solidFill>
+                  <a:srgbClr val="17212B"/>
+                </a:solidFill>
+                <a:latin typeface="Arial"/>
+                <a:ea typeface="Arial"/>
+                <a:cs typeface="Arial"/>
+              </a:rPr>
+              <a:t>Add a long-running consumer that continuously processes live NOAA events and refreshes the UI.</a:t>
+            </a:r>
+          </a:p>
+        </p:txBody>
+      </p:sp>
+      <p:sp>
+        <p:nvSpPr>
+          <p:cNvPr id="9" name="s7-final-background">
+            <a:extLst xmlns:a="http://schemas.openxmlformats.org/drawingml/2006/main">
+              <a:ext uri="{FF2B5EF4-FFF2-40B4-BE49-F238E27FC236}">
+                <a16:creationId xmlns:a16="http://schemas.microsoft.com/office/drawing/2014/main" id="{5767DC6F-37EE-4F70-8CC4-F6DBA6D1E51B}"/>
+              </a:ext>
+            </a:extLst>
+          </p:cNvPr>
+          <p:cNvSpPr>
+            <a:spLocks xmlns:a="http://schemas.openxmlformats.org/drawingml/2006/main" noGrp="1"/>
+          </p:cNvSpPr>
+          <p:nvPr/>
+        </p:nvSpPr>
+        <p:spPr>
+          <a:xfrm xmlns:a="http://schemas.openxmlformats.org/drawingml/2006/main">
+            <a:off x="8077200" y="4524375"/>
+            <a:ext cx="6229350" cy="1714500"/>
+          </a:xfrm>
+          <a:prstGeom xmlns:a="http://schemas.openxmlformats.org/drawingml/2006/main" prst="rect">
+            <a:avLst/>
+          </a:prstGeom>
+          <a:solidFill xmlns:a="http://schemas.openxmlformats.org/drawingml/2006/main">
+            <a:srgbClr val="102A43"/>
+          </a:solidFill>
+          <a:ln xmlns:a="http://schemas.openxmlformats.org/drawingml/2006/main" w="0">
+            <a:noFill/>
+            <a:prstDash val="solid"/>
+          </a:ln>
+        </p:spPr>
+      </p:sp>
+      <p:sp>
+        <p:nvSpPr>
+          <p:cNvPr id="10" name="s7-final-copy">
+            <a:extLst xmlns:a="http://schemas.openxmlformats.org/drawingml/2006/main">
+              <a:ext uri="{FF2B5EF4-FFF2-40B4-BE49-F238E27FC236}">
+                <a16:creationId xmlns:a16="http://schemas.microsoft.com/office/drawing/2014/main" id="{909AE981-4D88-4410-9DE8-6516A3152630}"/>
+              </a:ext>
+            </a:extLst>
+          </p:cNvPr>
+          <p:cNvSpPr>
+            <a:spLocks xmlns:a="http://schemas.openxmlformats.org/drawingml/2006/main" noGrp="1"/>
+          </p:cNvSpPr>
+          <p:nvPr/>
+        </p:nvSpPr>
+        <p:spPr>
+          <a:xfrm xmlns:a="http://schemas.openxmlformats.org/drawingml/2006/main">
+            <a:off x="8458200" y="4905375"/>
+            <a:ext cx="5467350" cy="1047750"/>
+          </a:xfrm>
+          <a:prstGeom xmlns:a="http://schemas.openxmlformats.org/drawingml/2006/main" prst="rect">
+            <a:avLst/>
+          </a:prstGeom>
+          <a:noFill xmlns:a="http://schemas.openxmlformats.org/drawingml/2006/main"/>
+          <a:ln xmlns:a="http://schemas.openxmlformats.org/drawingml/2006/main" w="0">
+            <a:noFill/>
+            <a:prstDash val="solid"/>
+          </a:ln>
+        </p:spPr>
+        <p:txBody>
+          <a:bodyPr xmlns:a="http://schemas.openxmlformats.org/drawingml/2006/main" wrap="square" lIns="0" tIns="0" rIns="0" bIns="0" anchor="t">
+            <a:normAutofit fontScale="88567"/>
+          </a:bodyPr>
+          <a:lstStyle xmlns:a="http://schemas.openxmlformats.org/drawingml/2006/main"/>
+          <a:p xmlns:a="http://schemas.openxmlformats.org/drawingml/2006/main">
+            <a:pPr algn="l">
+              <a:lnSpc>
+                <a:spcPct val="115000"/>
+              </a:lnSpc>
+              <a:buNone/>
+              <a:defRPr sz="2250" b="0">
+                <a:solidFill>
+                  <a:srgbClr val="FFFFFF"/>
+                </a:solidFill>
+                <a:latin typeface="Arial"/>
+                <a:ea typeface="Arial"/>
+                <a:cs typeface="Arial"/>
+              </a:defRPr>
+            </a:pPr>
+            <a:r>
+              <a:rPr sz="2250" b="0">
+                <a:solidFill>
+                  <a:srgbClr val="FFFFFF"/>
+                </a:solidFill>
+                <a:latin typeface="Arial"/>
+                <a:ea typeface="Arial"/>
+                <a:cs typeface="Arial"/>
+              </a:rPr>
+              <a:t>The result is small, explainable, and reproducible: one ordered stream, one clear rule, and evidence for every alert.</a:t>
+            </a:r>
+          </a:p>
+        </p:txBody>
+      </p:sp>
+      <p:sp>
+        <p:nvSpPr>
+          <p:cNvPr id="11" name="footer-7-label">
+            <a:extLst xmlns:a="http://schemas.openxmlformats.org/drawingml/2006/main">
+              <a:ext uri="{FF2B5EF4-FFF2-40B4-BE49-F238E27FC236}">
+                <a16:creationId xmlns:a16="http://schemas.microsoft.com/office/drawing/2014/main" id="{B3F70CCF-647C-4177-BA51-CF99974AB39C}"/>
+              </a:ext>
+            </a:extLst>
+          </p:cNvPr>
+          <p:cNvSpPr>
+            <a:spLocks xmlns:a="http://schemas.openxmlformats.org/drawingml/2006/main" noGrp="1"/>
+          </p:cNvSpPr>
+          <p:nvPr/>
+        </p:nvSpPr>
+        <p:spPr>
+          <a:xfrm xmlns:a="http://schemas.openxmlformats.org/drawingml/2006/main">
+            <a:off x="933450" y="8191500"/>
+            <a:ext cx="11906250" cy="209550"/>
+          </a:xfrm>
+          <a:prstGeom xmlns:a="http://schemas.openxmlformats.org/drawingml/2006/main" prst="rect">
+            <a:avLst/>
+          </a:prstGeom>
+          <a:noFill xmlns:a="http://schemas.openxmlformats.org/drawingml/2006/main"/>
+          <a:ln xmlns:a="http://schemas.openxmlformats.org/drawingml/2006/main" w="0">
+            <a:noFill/>
+            <a:prstDash val="solid"/>
+          </a:ln>
+        </p:spPr>
+        <p:txBody>
+          <a:bodyPr xmlns:a="http://schemas.openxmlformats.org/drawingml/2006/main" wrap="square" lIns="0" tIns="0" rIns="0" bIns="0" anchor="t">
+            <a:normAutofit fontScale="100000"/>
+          </a:bodyPr>
+          <a:lstStyle xmlns:a="http://schemas.openxmlformats.org/drawingml/2006/main"/>
+          <a:p xmlns:a="http://schemas.openxmlformats.org/drawingml/2006/main">
+            <a:pPr algn="l">
+              <a:defRPr sz="1125" b="0">
+                <a:solidFill>
+                  <a:srgbClr val="8894A0"/>
+                </a:solidFill>
+                <a:latin typeface="Arial"/>
+                <a:ea typeface="Arial"/>
+                <a:cs typeface="Arial"/>
+              </a:defRPr>
+            </a:pPr>
+            <a:r>
+              <a:rPr sz="1125" b="0">
+                <a:solidFill>
+                  <a:srgbClr val="8894A0"/>
+                </a:solidFill>
+                <a:latin typeface="Arial"/>
+                <a:ea typeface="Arial"/>
+                <a:cs typeface="Arial"/>
+              </a:rPr>
+              <a:t>Questions</a:t>
+            </a:r>
+          </a:p>
+        </p:txBody>
+      </p:sp>
+      <p:sp>
+        <p:nvSpPr>
+          <p:cNvPr id="12" name="footer-7-number">
+            <a:extLst xmlns:a="http://schemas.openxmlformats.org/drawingml/2006/main">
+              <a:ext uri="{FF2B5EF4-FFF2-40B4-BE49-F238E27FC236}">
+                <a16:creationId xmlns:a16="http://schemas.microsoft.com/office/drawing/2014/main" id="{DBFB2A45-8850-4FC1-85A0-1E068DD75B78}"/>
+              </a:ext>
+            </a:extLst>
+          </p:cNvPr>
+          <p:cNvSpPr>
+            <a:spLocks xmlns:a="http://schemas.openxmlformats.org/drawingml/2006/main" noGrp="1"/>
+          </p:cNvSpPr>
+          <p:nvPr/>
+        </p:nvSpPr>
+        <p:spPr>
+          <a:xfrm xmlns:a="http://schemas.openxmlformats.org/drawingml/2006/main">
+            <a:off x="13811250" y="8191500"/>
+            <a:ext cx="495300" cy="209550"/>
+          </a:xfrm>
+          <a:prstGeom xmlns:a="http://schemas.openxmlformats.org/drawingml/2006/main" prst="rect">
+            <a:avLst/>
+          </a:prstGeom>
+          <a:noFill xmlns:a="http://schemas.openxmlformats.org/drawingml/2006/main"/>
+          <a:ln xmlns:a="http://schemas.openxmlformats.org/drawingml/2006/main" w="0">
+            <a:noFill/>
+            <a:prstDash val="solid"/>
+          </a:ln>
+        </p:spPr>
+        <p:txBody>
+          <a:bodyPr xmlns:a="http://schemas.openxmlformats.org/drawingml/2006/main" wrap="square" lIns="0" tIns="0" rIns="0" bIns="0" anchor="t">
+            <a:normAutofit fontScale="100000"/>
+          </a:bodyPr>
+          <a:lstStyle xmlns:a="http://schemas.openxmlformats.org/drawingml/2006/main"/>
+          <a:p xmlns:a="http://schemas.openxmlformats.org/drawingml/2006/main">
+            <a:pPr algn="r">
+              <a:defRPr sz="1125" b="0">
+                <a:solidFill>
+                  <a:srgbClr val="8894A0"/>
+                </a:solidFill>
+                <a:latin typeface="Arial"/>
+                <a:ea typeface="Arial"/>
+                <a:cs typeface="Arial"/>
+              </a:defRPr>
+            </a:pPr>
+            <a:r>
+              <a:rPr sz="1125" b="0">
+                <a:solidFill>
+                  <a:srgbClr val="8894A0"/>
+                </a:solidFill>
+                <a:latin typeface="Arial"/>
+                <a:ea typeface="Arial"/>
+                <a:cs typeface="Arial"/>
+              </a:rPr>
+              <a:t>7</a:t>
+            </a:r>
+          </a:p>
+        </p:txBody>
+      </p:sp>
     </p:spTree>
     <p:extLst>
       <p:ext uri="{BB962C8B-B14F-4D97-AF65-F5344CB8AC3E}">
-        <p14:creationId xmlns:p14="http://schemas.microsoft.com/office/powerpoint/2010/main" val="619519013"/>
+        <p14:creationId xmlns:p14="http://schemas.microsoft.com/office/powerpoint/2010/main" val="1416426630"/>
       </p:ext>
     </p:extLst>
   </p:cSld>
@@ -1845,6 +7882,13 @@
 <file path=ppt/slides/slide8.xml><?xml version="1.0" encoding="utf-8"?>
 <p:sld xmlns:p="http://schemas.openxmlformats.org/presentationml/2006/main">
   <p:cSld>
+    <p:bg>
+      <p:bgPr>
+        <a:solidFill xmlns:a="http://schemas.openxmlformats.org/drawingml/2006/main">
+          <a:srgbClr val="F8F6F1"/>
+        </a:solidFill>
+      </p:bgPr>
+    </p:bg>
     <p:spTree>
       <p:nvGrpSpPr>
         <p:cNvPr id="1" name=""/>
@@ -1854,32 +7898,1131 @@
       <p:grpSpPr>
         <a:xfrm xmlns:a="http://schemas.openxmlformats.org/drawingml/2006/main"/>
       </p:grpSpPr>
-      <p:pic>
-        <p:nvPicPr>
-          <p:cNvPr id="2" name=""/>
-          <p:cNvPicPr>
-            <a:picLocks xmlns:a="http://schemas.openxmlformats.org/drawingml/2006/main" noChangeAspect="1"/>
-          </p:cNvPicPr>
-          <p:nvPr/>
-        </p:nvPicPr>
-        <p:blipFill>
-          <a:blip xmlns:r="http://schemas.openxmlformats.org/officeDocument/2006/relationships" xmlns:a="http://schemas.openxmlformats.org/drawingml/2006/main" r:embed="R357e1069c9e243e2"/>
-          <a:stretch xmlns:a="http://schemas.openxmlformats.org/drawingml/2006/main"/>
-        </p:blipFill>
-        <p:spPr>
-          <a:xfrm xmlns:a="http://schemas.openxmlformats.org/drawingml/2006/main">
-            <a:off x="0" y="0"/>
-            <a:ext cx="15240000" cy="8572500"/>
-          </a:xfrm>
-          <a:prstGeom xmlns:a="http://schemas.openxmlformats.org/drawingml/2006/main" prst="rect">
-            <a:avLst/>
-          </a:prstGeom>
-        </p:spPr>
-      </p:pic>
+      <p:sp>
+        <p:nvSpPr>
+          <p:cNvPr id="21" name="eyebrow-Backup · use only ">
+            <a:extLst xmlns:a="http://schemas.openxmlformats.org/drawingml/2006/main">
+              <a:ext uri="{FF2B5EF4-FFF2-40B4-BE49-F238E27FC236}">
+                <a16:creationId xmlns:a16="http://schemas.microsoft.com/office/drawing/2014/main" id="{E44DF0DC-449B-4259-951C-077C61813DE9}"/>
+              </a:ext>
+            </a:extLst>
+          </p:cNvPr>
+          <p:cNvSpPr>
+            <a:spLocks xmlns:a="http://schemas.openxmlformats.org/drawingml/2006/main" noGrp="1"/>
+          </p:cNvSpPr>
+          <p:nvPr/>
+        </p:nvSpPr>
+        <p:spPr>
+          <a:xfrm xmlns:a="http://schemas.openxmlformats.org/drawingml/2006/main">
+            <a:off x="933450" y="457200"/>
+            <a:ext cx="9048750" cy="285750"/>
+          </a:xfrm>
+          <a:prstGeom xmlns:a="http://schemas.openxmlformats.org/drawingml/2006/main" prst="rect">
+            <a:avLst/>
+          </a:prstGeom>
+          <a:noFill xmlns:a="http://schemas.openxmlformats.org/drawingml/2006/main"/>
+          <a:ln xmlns:a="http://schemas.openxmlformats.org/drawingml/2006/main" w="0">
+            <a:noFill/>
+            <a:prstDash val="solid"/>
+          </a:ln>
+        </p:spPr>
+        <p:txBody>
+          <a:bodyPr xmlns:a="http://schemas.openxmlformats.org/drawingml/2006/main" wrap="square" lIns="0" tIns="0" rIns="0" bIns="0" anchor="t">
+            <a:normAutofit fontScale="100000"/>
+          </a:bodyPr>
+          <a:lstStyle xmlns:a="http://schemas.openxmlformats.org/drawingml/2006/main"/>
+          <a:p xmlns:a="http://schemas.openxmlformats.org/drawingml/2006/main">
+            <a:pPr algn="l">
+              <a:defRPr sz="1275" b="1">
+                <a:solidFill>
+                  <a:srgbClr val="2F6FED"/>
+                </a:solidFill>
+                <a:latin typeface="Arial"/>
+                <a:ea typeface="Arial"/>
+                <a:cs typeface="Arial"/>
+              </a:defRPr>
+            </a:pPr>
+            <a:r>
+              <a:rPr sz="1275" b="1">
+                <a:solidFill>
+                  <a:srgbClr val="2F6FED"/>
+                </a:solidFill>
+                <a:latin typeface="Arial"/>
+                <a:ea typeface="Arial"/>
+                <a:cs typeface="Arial"/>
+              </a:rPr>
+              <a:t>BACKUP · USE ONLY IF THE LIVE DEMO FAILS</a:t>
+            </a:r>
+          </a:p>
+        </p:txBody>
+      </p:sp>
+      <p:sp>
+        <p:nvSpPr>
+          <p:cNvPr id="2" name="title-Saved terminal evi">
+            <a:extLst xmlns:a="http://schemas.openxmlformats.org/drawingml/2006/main">
+              <a:ext uri="{FF2B5EF4-FFF2-40B4-BE49-F238E27FC236}">
+                <a16:creationId xmlns:a16="http://schemas.microsoft.com/office/drawing/2014/main" id="{12415409-C97F-4458-B0F2-56B3B24CB469}"/>
+              </a:ext>
+            </a:extLst>
+          </p:cNvPr>
+          <p:cNvSpPr>
+            <a:spLocks xmlns:a="http://schemas.openxmlformats.org/drawingml/2006/main" noGrp="1"/>
+          </p:cNvSpPr>
+          <p:nvPr/>
+        </p:nvSpPr>
+        <p:spPr>
+          <a:xfrm xmlns:a="http://schemas.openxmlformats.org/drawingml/2006/main">
+            <a:off x="933450" y="838200"/>
+            <a:ext cx="13373100" cy="1047750"/>
+          </a:xfrm>
+          <a:prstGeom xmlns:a="http://schemas.openxmlformats.org/drawingml/2006/main" prst="rect">
+            <a:avLst/>
+          </a:prstGeom>
+          <a:noFill xmlns:a="http://schemas.openxmlformats.org/drawingml/2006/main"/>
+          <a:ln xmlns:a="http://schemas.openxmlformats.org/drawingml/2006/main" w="0">
+            <a:noFill/>
+            <a:prstDash val="solid"/>
+          </a:ln>
+        </p:spPr>
+        <p:txBody>
+          <a:bodyPr xmlns:a="http://schemas.openxmlformats.org/drawingml/2006/main" wrap="square" lIns="0" tIns="0" rIns="0" bIns="0" anchor="t">
+            <a:normAutofit fontScale="100000"/>
+          </a:bodyPr>
+          <a:lstStyle xmlns:a="http://schemas.openxmlformats.org/drawingml/2006/main"/>
+          <a:p xmlns:a="http://schemas.openxmlformats.org/drawingml/2006/main">
+            <a:pPr algn="l">
+              <a:lnSpc>
+                <a:spcPct val="96000"/>
+              </a:lnSpc>
+              <a:buNone/>
+              <a:defRPr sz="3675" b="1">
+                <a:solidFill>
+                  <a:srgbClr val="102A43"/>
+                </a:solidFill>
+                <a:latin typeface="Arial"/>
+                <a:ea typeface="Arial"/>
+                <a:cs typeface="Arial"/>
+              </a:defRPr>
+            </a:pPr>
+            <a:r>
+              <a:rPr sz="3675" b="1">
+                <a:solidFill>
+                  <a:srgbClr val="102A43"/>
+                </a:solidFill>
+                <a:latin typeface="Arial"/>
+                <a:ea typeface="Arial"/>
+                <a:cs typeface="Arial"/>
+              </a:rPr>
+              <a:t>Saved terminal evidence</a:t>
+            </a:r>
+          </a:p>
+        </p:txBody>
+      </p:sp>
+      <p:sp>
+        <p:nvSpPr>
+          <p:cNvPr id="3" name="s8-terminal-background">
+            <a:extLst xmlns:a="http://schemas.openxmlformats.org/drawingml/2006/main">
+              <a:ext uri="{FF2B5EF4-FFF2-40B4-BE49-F238E27FC236}">
+                <a16:creationId xmlns:a16="http://schemas.microsoft.com/office/drawing/2014/main" id="{9DD6A5E7-05A4-4313-87F9-2E99187821D2}"/>
+              </a:ext>
+            </a:extLst>
+          </p:cNvPr>
+          <p:cNvSpPr>
+            <a:spLocks xmlns:a="http://schemas.openxmlformats.org/drawingml/2006/main" noGrp="1"/>
+          </p:cNvSpPr>
+          <p:nvPr/>
+        </p:nvSpPr>
+        <p:spPr>
+          <a:xfrm xmlns:a="http://schemas.openxmlformats.org/drawingml/2006/main">
+            <a:off x="933450" y="1809750"/>
+            <a:ext cx="13373100" cy="4762500"/>
+          </a:xfrm>
+          <a:prstGeom xmlns:a="http://schemas.openxmlformats.org/drawingml/2006/main" prst="roundRect">
+            <a:avLst>
+              <a:gd name="adj" fmla="val 2400"/>
+            </a:avLst>
+          </a:prstGeom>
+          <a:solidFill xmlns:a="http://schemas.openxmlformats.org/drawingml/2006/main">
+            <a:srgbClr val="101820"/>
+          </a:solidFill>
+          <a:ln xmlns:a="http://schemas.openxmlformats.org/drawingml/2006/main" w="0">
+            <a:noFill/>
+            <a:prstDash val="solid"/>
+          </a:ln>
+        </p:spPr>
+      </p:sp>
+      <p:sp>
+        <p:nvSpPr>
+          <p:cNvPr id="4" name="s8-line-1">
+            <a:extLst xmlns:a="http://schemas.openxmlformats.org/drawingml/2006/main">
+              <a:ext uri="{FF2B5EF4-FFF2-40B4-BE49-F238E27FC236}">
+                <a16:creationId xmlns:a16="http://schemas.microsoft.com/office/drawing/2014/main" id="{CE3AC14D-FF37-4B4E-BBB7-CA34373F5B7F}"/>
+              </a:ext>
+            </a:extLst>
+          </p:cNvPr>
+          <p:cNvSpPr>
+            <a:spLocks xmlns:a="http://schemas.openxmlformats.org/drawingml/2006/main" noGrp="1"/>
+          </p:cNvSpPr>
+          <p:nvPr/>
+        </p:nvSpPr>
+        <p:spPr>
+          <a:xfrm xmlns:a="http://schemas.openxmlformats.org/drawingml/2006/main">
+            <a:off x="1314450" y="2076450"/>
+            <a:ext cx="12611100" cy="276225"/>
+          </a:xfrm>
+          <a:prstGeom xmlns:a="http://schemas.openxmlformats.org/drawingml/2006/main" prst="rect">
+            <a:avLst/>
+          </a:prstGeom>
+          <a:noFill xmlns:a="http://schemas.openxmlformats.org/drawingml/2006/main"/>
+          <a:ln xmlns:a="http://schemas.openxmlformats.org/drawingml/2006/main" w="0">
+            <a:noFill/>
+            <a:prstDash val="solid"/>
+          </a:ln>
+        </p:spPr>
+        <p:txBody>
+          <a:bodyPr xmlns:a="http://schemas.openxmlformats.org/drawingml/2006/main" wrap="square" lIns="0" tIns="0" rIns="0" bIns="0" anchor="t">
+            <a:normAutofit fontScale="100000"/>
+          </a:bodyPr>
+          <a:lstStyle xmlns:a="http://schemas.openxmlformats.org/drawingml/2006/main"/>
+          <a:p xmlns:a="http://schemas.openxmlformats.org/drawingml/2006/main">
+            <a:pPr algn="l">
+              <a:defRPr sz="1500" b="0">
+                <a:solidFill>
+                  <a:srgbClr val="DCE8F2"/>
+                </a:solidFill>
+                <a:latin typeface="Courier New"/>
+                <a:ea typeface="Courier New"/>
+                <a:cs typeface="Courier New"/>
+              </a:defRPr>
+            </a:pPr>
+            <a:r>
+              <a:rPr sz="1500" b="0">
+                <a:solidFill>
+                  <a:srgbClr val="DCE8F2"/>
+                </a:solidFill>
+                <a:latin typeface="Courier New"/>
+                <a:ea typeface="Courier New"/>
+                <a:cs typeface="Courier New"/>
+              </a:rPr>
+              <a:t>$ ./run_demo.sh</a:t>
+            </a:r>
+          </a:p>
+        </p:txBody>
+      </p:sp>
+      <p:sp>
+        <p:nvSpPr>
+          <p:cNvPr id="5" name="s8-line-2">
+            <a:extLst xmlns:a="http://schemas.openxmlformats.org/drawingml/2006/main">
+              <a:ext uri="{FF2B5EF4-FFF2-40B4-BE49-F238E27FC236}">
+                <a16:creationId xmlns:a16="http://schemas.microsoft.com/office/drawing/2014/main" id="{110B99F3-7B70-4AA1-887D-B476819C96A3}"/>
+              </a:ext>
+            </a:extLst>
+          </p:cNvPr>
+          <p:cNvSpPr>
+            <a:spLocks xmlns:a="http://schemas.openxmlformats.org/drawingml/2006/main" noGrp="1"/>
+          </p:cNvSpPr>
+          <p:nvPr/>
+        </p:nvSpPr>
+        <p:spPr>
+          <a:xfrm xmlns:a="http://schemas.openxmlformats.org/drawingml/2006/main">
+            <a:off x="1314450" y="2352675"/>
+            <a:ext cx="12611100" cy="276225"/>
+          </a:xfrm>
+          <a:prstGeom xmlns:a="http://schemas.openxmlformats.org/drawingml/2006/main" prst="rect">
+            <a:avLst/>
+          </a:prstGeom>
+          <a:noFill xmlns:a="http://schemas.openxmlformats.org/drawingml/2006/main"/>
+          <a:ln xmlns:a="http://schemas.openxmlformats.org/drawingml/2006/main" w="0">
+            <a:noFill/>
+            <a:prstDash val="solid"/>
+          </a:ln>
+        </p:spPr>
+        <p:txBody>
+          <a:bodyPr xmlns:a="http://schemas.openxmlformats.org/drawingml/2006/main" wrap="square" lIns="0" tIns="0" rIns="0" bIns="0" anchor="t">
+            <a:normAutofit fontScale="100000"/>
+          </a:bodyPr>
+          <a:lstStyle xmlns:a="http://schemas.openxmlformats.org/drawingml/2006/main"/>
+          <a:p xmlns:a="http://schemas.openxmlformats.org/drawingml/2006/main">
+            <a:pPr algn="l">
+              <a:defRPr sz="1500" b="0">
+                <a:solidFill>
+                  <a:srgbClr val="DCE8F2"/>
+                </a:solidFill>
+                <a:latin typeface="Courier New"/>
+                <a:ea typeface="Courier New"/>
+                <a:cs typeface="Courier New"/>
+              </a:defRPr>
+            </a:pPr>
+            <a:r>
+              <a:rPr sz="1500" b="0">
+                <a:solidFill>
+                  <a:srgbClr val="DCE8F2"/>
+                </a:solidFill>
+                <a:latin typeface="Courier New"/>
+                <a:ea typeface="Courier New"/>
+                <a:cs typeface="Courier New"/>
+              </a:rPr>
+              <a:t>Published 9 event(s) · Topic=kp_observations · key=planetary_kp</a:t>
+            </a:r>
+          </a:p>
+        </p:txBody>
+      </p:sp>
+      <p:sp>
+        <p:nvSpPr>
+          <p:cNvPr id="6" name="s8-line-3">
+            <a:extLst xmlns:a="http://schemas.openxmlformats.org/drawingml/2006/main">
+              <a:ext uri="{FF2B5EF4-FFF2-40B4-BE49-F238E27FC236}">
+                <a16:creationId xmlns:a16="http://schemas.microsoft.com/office/drawing/2014/main" id="{FBFA99CB-FAE0-4DA5-ADC9-829C96036DEF}"/>
+              </a:ext>
+            </a:extLst>
+          </p:cNvPr>
+          <p:cNvSpPr>
+            <a:spLocks xmlns:a="http://schemas.openxmlformats.org/drawingml/2006/main" noGrp="1"/>
+          </p:cNvSpPr>
+          <p:nvPr/>
+        </p:nvSpPr>
+        <p:spPr>
+          <a:xfrm xmlns:a="http://schemas.openxmlformats.org/drawingml/2006/main">
+            <a:off x="1314450" y="2628900"/>
+            <a:ext cx="12611100" cy="276225"/>
+          </a:xfrm>
+          <a:prstGeom xmlns:a="http://schemas.openxmlformats.org/drawingml/2006/main" prst="rect">
+            <a:avLst/>
+          </a:prstGeom>
+          <a:noFill xmlns:a="http://schemas.openxmlformats.org/drawingml/2006/main"/>
+          <a:ln xmlns:a="http://schemas.openxmlformats.org/drawingml/2006/main" w="0">
+            <a:noFill/>
+            <a:prstDash val="solid"/>
+          </a:ln>
+        </p:spPr>
+        <p:txBody>
+          <a:bodyPr xmlns:a="http://schemas.openxmlformats.org/drawingml/2006/main" wrap="square" lIns="0" tIns="0" rIns="0" bIns="0" anchor="t">
+            <a:normAutofit fontScale="100000"/>
+          </a:bodyPr>
+          <a:lstStyle xmlns:a="http://schemas.openxmlformats.org/drawingml/2006/main"/>
+          <a:p xmlns:a="http://schemas.openxmlformats.org/drawingml/2006/main">
+            <a:pPr algn="l">
+              <a:defRPr sz="1500" b="0">
+                <a:solidFill>
+                  <a:srgbClr val="7FE3A7"/>
+                </a:solidFill>
+                <a:latin typeface="Courier New"/>
+                <a:ea typeface="Courier New"/>
+                <a:cs typeface="Courier New"/>
+              </a:defRPr>
+            </a:pPr>
+            <a:r>
+              <a:rPr sz="1500" b="0">
+                <a:solidFill>
+                  <a:srgbClr val="7FE3A7"/>
+                </a:solidFill>
+                <a:latin typeface="Courier New"/>
+                <a:ea typeface="Courier New"/>
+                <a:cs typeface="Courier New"/>
+              </a:rPr>
+              <a:t>Processed 9 valid event(s); emitted 2 alert(s)</a:t>
+            </a:r>
+          </a:p>
+        </p:txBody>
+      </p:sp>
+      <p:sp>
+        <p:nvSpPr>
+          <p:cNvPr id="7" name="s8-line-4">
+            <a:extLst xmlns:a="http://schemas.openxmlformats.org/drawingml/2006/main">
+              <a:ext uri="{FF2B5EF4-FFF2-40B4-BE49-F238E27FC236}">
+                <a16:creationId xmlns:a16="http://schemas.microsoft.com/office/drawing/2014/main" id="{B1A1BFE9-D14E-4256-B03C-9438A3FFB199}"/>
+              </a:ext>
+            </a:extLst>
+          </p:cNvPr>
+          <p:cNvSpPr>
+            <a:spLocks xmlns:a="http://schemas.openxmlformats.org/drawingml/2006/main" noGrp="1"/>
+          </p:cNvSpPr>
+          <p:nvPr/>
+        </p:nvSpPr>
+        <p:spPr>
+          <a:xfrm xmlns:a="http://schemas.openxmlformats.org/drawingml/2006/main">
+            <a:off x="1314450" y="2905125"/>
+            <a:ext cx="12611100" cy="276225"/>
+          </a:xfrm>
+          <a:prstGeom xmlns:a="http://schemas.openxmlformats.org/drawingml/2006/main" prst="rect">
+            <a:avLst/>
+          </a:prstGeom>
+          <a:noFill xmlns:a="http://schemas.openxmlformats.org/drawingml/2006/main"/>
+          <a:ln xmlns:a="http://schemas.openxmlformats.org/drawingml/2006/main" w="0">
+            <a:noFill/>
+            <a:prstDash val="solid"/>
+          </a:ln>
+        </p:spPr>
+        <p:txBody>
+          <a:bodyPr xmlns:a="http://schemas.openxmlformats.org/drawingml/2006/main" wrap="square" lIns="0" tIns="0" rIns="0" bIns="0" anchor="t">
+            <a:normAutofit fontScale="100000"/>
+          </a:bodyPr>
+          <a:lstStyle xmlns:a="http://schemas.openxmlformats.org/drawingml/2006/main"/>
+          <a:p xmlns:a="http://schemas.openxmlformats.org/drawingml/2006/main">
+            <a:pPr algn="l">
+              <a:defRPr sz="1500" b="0">
+                <a:solidFill>
+                  <a:srgbClr val="DCE8F2"/>
+                </a:solidFill>
+                <a:latin typeface="Courier New"/>
+                <a:ea typeface="Courier New"/>
+                <a:cs typeface="Courier New"/>
+              </a:defRPr>
+            </a:pPr>
+            <a:r>
+              <a:rPr sz="1500" b="0">
+                <a:solidFill>
+                  <a:srgbClr val="DCE8F2"/>
+                </a:solidFill>
+                <a:latin typeface="Courier New"/>
+                <a:ea typeface="Courier New"/>
+                <a:cs typeface="Courier New"/>
+              </a:rPr>
+              <a:t>Briefing source: fallback</a:t>
+            </a:r>
+          </a:p>
+        </p:txBody>
+      </p:sp>
+      <p:sp>
+        <p:nvSpPr>
+          <p:cNvPr id="8" name="s8-line-5">
+            <a:extLst xmlns:a="http://schemas.openxmlformats.org/drawingml/2006/main">
+              <a:ext uri="{FF2B5EF4-FFF2-40B4-BE49-F238E27FC236}">
+                <a16:creationId xmlns:a16="http://schemas.microsoft.com/office/drawing/2014/main" id="{A01F8DFC-F73F-4E2C-8861-D0721E879F8A}"/>
+              </a:ext>
+            </a:extLst>
+          </p:cNvPr>
+          <p:cNvSpPr>
+            <a:spLocks xmlns:a="http://schemas.openxmlformats.org/drawingml/2006/main" noGrp="1"/>
+          </p:cNvSpPr>
+          <p:nvPr/>
+        </p:nvSpPr>
+        <p:spPr>
+          <a:xfrm xmlns:a="http://schemas.openxmlformats.org/drawingml/2006/main">
+            <a:off x="1314450" y="3181350"/>
+            <a:ext cx="12611100" cy="276225"/>
+          </a:xfrm>
+          <a:prstGeom xmlns:a="http://schemas.openxmlformats.org/drawingml/2006/main" prst="rect">
+            <a:avLst/>
+          </a:prstGeom>
+          <a:noFill xmlns:a="http://schemas.openxmlformats.org/drawingml/2006/main"/>
+          <a:ln xmlns:a="http://schemas.openxmlformats.org/drawingml/2006/main" w="0">
+            <a:noFill/>
+            <a:prstDash val="solid"/>
+          </a:ln>
+        </p:spPr>
+        <p:txBody>
+          <a:bodyPr xmlns:a="http://schemas.openxmlformats.org/drawingml/2006/main" wrap="square" lIns="0" tIns="0" rIns="0" bIns="0" anchor="t">
+            <a:normAutofit fontScale="100000"/>
+          </a:bodyPr>
+          <a:lstStyle xmlns:a="http://schemas.openxmlformats.org/drawingml/2006/main"/>
+          <a:p xmlns:a="http://schemas.openxmlformats.org/drawingml/2006/main">
+            <a:pPr algn="l">
+              <a:defRPr sz="1500" b="0">
+                <a:solidFill>
+                  <a:srgbClr val="7FE3A7"/>
+                </a:solidFill>
+                <a:latin typeface="Courier New"/>
+                <a:ea typeface="Courier New"/>
+                <a:cs typeface="Courier New"/>
+              </a:defRPr>
+            </a:pPr>
+            <a:r>
+              <a:rPr sz="1500" b="0">
+                <a:solidFill>
+                  <a:srgbClr val="7FE3A7"/>
+                </a:solidFill>
+                <a:latin typeface="Courier New"/>
+                <a:ea typeface="Courier New"/>
+                <a:cs typeface="Courier New"/>
+              </a:rPr>
+              <a:t>Evaluation: 7/7 assertions passed</a:t>
+            </a:r>
+          </a:p>
+        </p:txBody>
+      </p:sp>
+      <p:sp>
+        <p:nvSpPr>
+          <p:cNvPr id="9" name="s8-line-6">
+            <a:extLst xmlns:a="http://schemas.openxmlformats.org/drawingml/2006/main">
+              <a:ext uri="{FF2B5EF4-FFF2-40B4-BE49-F238E27FC236}">
+                <a16:creationId xmlns:a16="http://schemas.microsoft.com/office/drawing/2014/main" id="{88785356-8CD2-44E8-B4A8-BFF50195FE9F}"/>
+              </a:ext>
+            </a:extLst>
+          </p:cNvPr>
+          <p:cNvSpPr>
+            <a:spLocks xmlns:a="http://schemas.openxmlformats.org/drawingml/2006/main" noGrp="1"/>
+          </p:cNvSpPr>
+          <p:nvPr/>
+        </p:nvSpPr>
+        <p:spPr>
+          <a:xfrm xmlns:a="http://schemas.openxmlformats.org/drawingml/2006/main">
+            <a:off x="1314450" y="3457575"/>
+            <a:ext cx="12611100" cy="276225"/>
+          </a:xfrm>
+          <a:prstGeom xmlns:a="http://schemas.openxmlformats.org/drawingml/2006/main" prst="rect">
+            <a:avLst/>
+          </a:prstGeom>
+          <a:noFill xmlns:a="http://schemas.openxmlformats.org/drawingml/2006/main"/>
+          <a:ln xmlns:a="http://schemas.openxmlformats.org/drawingml/2006/main" w="0">
+            <a:noFill/>
+            <a:prstDash val="solid"/>
+          </a:ln>
+        </p:spPr>
+        <p:txBody>
+          <a:bodyPr xmlns:a="http://schemas.openxmlformats.org/drawingml/2006/main" wrap="square" lIns="0" tIns="0" rIns="0" bIns="0" anchor="t">
+            <a:normAutofit fontScale="100000"/>
+          </a:bodyPr>
+          <a:lstStyle xmlns:a="http://schemas.openxmlformats.org/drawingml/2006/main"/>
+          <a:p xmlns:a="http://schemas.openxmlformats.org/drawingml/2006/main">
+            <a:pPr algn="l">
+              <a:defRPr sz="1500" b="0">
+                <a:solidFill>
+                  <a:srgbClr val="7FE3A7"/>
+                </a:solidFill>
+                <a:latin typeface="Courier New"/>
+                <a:ea typeface="Courier New"/>
+                <a:cs typeface="Courier New"/>
+              </a:defRPr>
+            </a:pPr>
+            <a:r>
+              <a:rPr sz="1500" b="0">
+                <a:solidFill>
+                  <a:srgbClr val="7FE3A7"/>
+                </a:solidFill>
+                <a:latin typeface="Courier New"/>
+                <a:ea typeface="Courier New"/>
+                <a:cs typeface="Courier New"/>
+              </a:rPr>
+              <a:t>Artifacts match the labeled fixture:</a:t>
+            </a:r>
+          </a:p>
+        </p:txBody>
+      </p:sp>
+      <p:sp>
+        <p:nvSpPr>
+          <p:cNvPr id="10" name="s8-line-7">
+            <a:extLst xmlns:a="http://schemas.openxmlformats.org/drawingml/2006/main">
+              <a:ext uri="{FF2B5EF4-FFF2-40B4-BE49-F238E27FC236}">
+                <a16:creationId xmlns:a16="http://schemas.microsoft.com/office/drawing/2014/main" id="{B37CE2B3-0FF9-4F38-BE08-B6AA5E90D35F}"/>
+              </a:ext>
+            </a:extLst>
+          </p:cNvPr>
+          <p:cNvSpPr>
+            <a:spLocks xmlns:a="http://schemas.openxmlformats.org/drawingml/2006/main" noGrp="1"/>
+          </p:cNvSpPr>
+          <p:nvPr/>
+        </p:nvSpPr>
+        <p:spPr>
+          <a:xfrm xmlns:a="http://schemas.openxmlformats.org/drawingml/2006/main">
+            <a:off x="1314450" y="3733800"/>
+            <a:ext cx="12611100" cy="276225"/>
+          </a:xfrm>
+          <a:prstGeom xmlns:a="http://schemas.openxmlformats.org/drawingml/2006/main" prst="rect">
+            <a:avLst/>
+          </a:prstGeom>
+          <a:noFill xmlns:a="http://schemas.openxmlformats.org/drawingml/2006/main"/>
+          <a:ln xmlns:a="http://schemas.openxmlformats.org/drawingml/2006/main" w="0">
+            <a:noFill/>
+            <a:prstDash val="solid"/>
+          </a:ln>
+        </p:spPr>
+        <p:txBody>
+          <a:bodyPr xmlns:a="http://schemas.openxmlformats.org/drawingml/2006/main" wrap="square" lIns="0" tIns="0" rIns="0" bIns="0" anchor="t">
+            <a:normAutofit fontScale="100000"/>
+          </a:bodyPr>
+          <a:lstStyle xmlns:a="http://schemas.openxmlformats.org/drawingml/2006/main"/>
+          <a:p xmlns:a="http://schemas.openxmlformats.org/drawingml/2006/main">
+            <a:pPr algn="l">
+              <a:defRPr sz="1500" b="0">
+                <a:solidFill>
+                  <a:srgbClr val="DCE8F2"/>
+                </a:solidFill>
+                <a:latin typeface="Courier New"/>
+                <a:ea typeface="Courier New"/>
+                <a:cs typeface="Courier New"/>
+              </a:defRPr>
+            </a:pPr>
+            <a:r>
+              <a:rPr sz="1500" b="0">
+                <a:solidFill>
+                  <a:srgbClr val="DCE8F2"/>
+                </a:solidFill>
+                <a:latin typeface="Courier New"/>
+                <a:ea typeface="Courier New"/>
+                <a:cs typeface="Courier New"/>
+              </a:rPr>
+              <a:t>  2 alerts · 9 metrics rows · briefing present</a:t>
+            </a:r>
+          </a:p>
+        </p:txBody>
+      </p:sp>
+      <p:sp>
+        <p:nvSpPr>
+          <p:cNvPr id="11" name="s8-line-8">
+            <a:extLst xmlns:a="http://schemas.openxmlformats.org/drawingml/2006/main">
+              <a:ext uri="{FF2B5EF4-FFF2-40B4-BE49-F238E27FC236}">
+                <a16:creationId xmlns:a16="http://schemas.microsoft.com/office/drawing/2014/main" id="{874AB735-32ED-4CDA-8DBE-0DF9EF9FB7E4}"/>
+              </a:ext>
+            </a:extLst>
+          </p:cNvPr>
+          <p:cNvSpPr>
+            <a:spLocks xmlns:a="http://schemas.openxmlformats.org/drawingml/2006/main" noGrp="1"/>
+          </p:cNvSpPr>
+          <p:nvPr/>
+        </p:nvSpPr>
+        <p:spPr>
+          <a:xfrm xmlns:a="http://schemas.openxmlformats.org/drawingml/2006/main">
+            <a:off x="1314450" y="4010025"/>
+            <a:ext cx="12611100" cy="276225"/>
+          </a:xfrm>
+          <a:prstGeom xmlns:a="http://schemas.openxmlformats.org/drawingml/2006/main" prst="rect">
+            <a:avLst/>
+          </a:prstGeom>
+          <a:noFill xmlns:a="http://schemas.openxmlformats.org/drawingml/2006/main"/>
+          <a:ln xmlns:a="http://schemas.openxmlformats.org/drawingml/2006/main" w="0">
+            <a:noFill/>
+            <a:prstDash val="solid"/>
+          </a:ln>
+        </p:spPr>
+        <p:txBody>
+          <a:bodyPr xmlns:a="http://schemas.openxmlformats.org/drawingml/2006/main" wrap="square" lIns="0" tIns="0" rIns="0" bIns="0" anchor="t">
+            <a:normAutofit fontScale="100000"/>
+          </a:bodyPr>
+          <a:lstStyle xmlns:a="http://schemas.openxmlformats.org/drawingml/2006/main"/>
+          <a:p xmlns:a="http://schemas.openxmlformats.org/drawingml/2006/main">
+            <a:pPr algn="l">
+              <a:defRPr sz="1500" b="0">
+                <a:solidFill>
+                  <a:srgbClr val="7FE3A7"/>
+                </a:solidFill>
+                <a:latin typeface="Courier New"/>
+                <a:ea typeface="Courier New"/>
+                <a:cs typeface="Courier New"/>
+              </a:defRPr>
+            </a:pPr>
+            <a:r>
+              <a:rPr sz="1500" b="0">
+                <a:solidFill>
+                  <a:srgbClr val="7FE3A7"/>
+                </a:solidFill>
+                <a:latin typeface="Courier New"/>
+                <a:ea typeface="Courier New"/>
+                <a:cs typeface="Courier New"/>
+              </a:rPr>
+              <a:t>167 passed, 3 opt-in tests skipped</a:t>
+            </a:r>
+          </a:p>
+        </p:txBody>
+      </p:sp>
+      <p:sp>
+        <p:nvSpPr>
+          <p:cNvPr id="12" name="s8-line-9">
+            <a:extLst xmlns:a="http://schemas.openxmlformats.org/drawingml/2006/main">
+              <a:ext uri="{FF2B5EF4-FFF2-40B4-BE49-F238E27FC236}">
+                <a16:creationId xmlns:a16="http://schemas.microsoft.com/office/drawing/2014/main" id="{12F5626D-0065-402D-8494-E71C742FEB00}"/>
+              </a:ext>
+            </a:extLst>
+          </p:cNvPr>
+          <p:cNvSpPr>
+            <a:spLocks xmlns:a="http://schemas.openxmlformats.org/drawingml/2006/main" noGrp="1"/>
+          </p:cNvSpPr>
+          <p:nvPr/>
+        </p:nvSpPr>
+        <p:spPr>
+          <a:xfrm xmlns:a="http://schemas.openxmlformats.org/drawingml/2006/main">
+            <a:off x="1314450" y="4286250"/>
+            <a:ext cx="12611100" cy="276225"/>
+          </a:xfrm>
+          <a:prstGeom xmlns:a="http://schemas.openxmlformats.org/drawingml/2006/main" prst="rect">
+            <a:avLst/>
+          </a:prstGeom>
+          <a:noFill xmlns:a="http://schemas.openxmlformats.org/drawingml/2006/main"/>
+          <a:ln xmlns:a="http://schemas.openxmlformats.org/drawingml/2006/main" w="0">
+            <a:noFill/>
+            <a:prstDash val="solid"/>
+          </a:ln>
+        </p:spPr>
+        <p:txBody>
+          <a:bodyPr xmlns:a="http://schemas.openxmlformats.org/drawingml/2006/main" wrap="square" lIns="0" tIns="0" rIns="0" bIns="0" anchor="t">
+            <a:normAutofit fontScale="100000"/>
+          </a:bodyPr>
+          <a:lstStyle xmlns:a="http://schemas.openxmlformats.org/drawingml/2006/main"/>
+          <a:p xmlns:a="http://schemas.openxmlformats.org/drawingml/2006/main">
+            <a:pPr algn="l">
+              <a:defRPr sz="1500" b="0">
+                <a:solidFill>
+                  <a:srgbClr val="DCE8F2"/>
+                </a:solidFill>
+                <a:latin typeface="Courier New"/>
+                <a:ea typeface="Courier New"/>
+                <a:cs typeface="Courier New"/>
+              </a:defRPr>
+            </a:pPr>
+            <a:r>
+              <a:rPr sz="1500" b="0">
+                <a:solidFill>
+                  <a:srgbClr val="DCE8F2"/>
+                </a:solidFill>
+                <a:latin typeface="Courier New"/>
+                <a:ea typeface="Courier New"/>
+                <a:cs typeface="Courier New"/>
+              </a:rPr>
+              <a:t>Demo complete.</a:t>
+            </a:r>
+          </a:p>
+        </p:txBody>
+      </p:sp>
+      <p:sp>
+        <p:nvSpPr>
+          <p:cNvPr id="13" name="s8-line-10">
+            <a:extLst xmlns:a="http://schemas.openxmlformats.org/drawingml/2006/main">
+              <a:ext uri="{FF2B5EF4-FFF2-40B4-BE49-F238E27FC236}">
+                <a16:creationId xmlns:a16="http://schemas.microsoft.com/office/drawing/2014/main" id="{A3E85F80-7CA3-47EE-8485-453FA2BFB347}"/>
+              </a:ext>
+            </a:extLst>
+          </p:cNvPr>
+          <p:cNvSpPr>
+            <a:spLocks xmlns:a="http://schemas.openxmlformats.org/drawingml/2006/main" noGrp="1"/>
+          </p:cNvSpPr>
+          <p:nvPr/>
+        </p:nvSpPr>
+        <p:spPr>
+          <a:xfrm xmlns:a="http://schemas.openxmlformats.org/drawingml/2006/main">
+            <a:off x="1314450" y="4562475"/>
+            <a:ext cx="12611100" cy="276225"/>
+          </a:xfrm>
+          <a:prstGeom xmlns:a="http://schemas.openxmlformats.org/drawingml/2006/main" prst="rect">
+            <a:avLst/>
+          </a:prstGeom>
+          <a:noFill xmlns:a="http://schemas.openxmlformats.org/drawingml/2006/main"/>
+          <a:ln xmlns:a="http://schemas.openxmlformats.org/drawingml/2006/main" w="0">
+            <a:noFill/>
+            <a:prstDash val="solid"/>
+          </a:ln>
+        </p:spPr>
+        <p:txBody>
+          <a:bodyPr xmlns:a="http://schemas.openxmlformats.org/drawingml/2006/main" wrap="square" lIns="0" tIns="0" rIns="0" bIns="0" anchor="t">
+            <a:normAutofit/>
+          </a:bodyPr>
+          <a:lstStyle xmlns:a="http://schemas.openxmlformats.org/drawingml/2006/main"/>
+          <a:p xmlns:a="http://schemas.openxmlformats.org/drawingml/2006/main">
+            <a:r>
+              <a:t/>
+            </a:r>
+          </a:p>
+        </p:txBody>
+      </p:sp>
+      <p:sp>
+        <p:nvSpPr>
+          <p:cNvPr id="14" name="s8-line-11">
+            <a:extLst xmlns:a="http://schemas.openxmlformats.org/drawingml/2006/main">
+              <a:ext uri="{FF2B5EF4-FFF2-40B4-BE49-F238E27FC236}">
+                <a16:creationId xmlns:a16="http://schemas.microsoft.com/office/drawing/2014/main" id="{98EFD66B-6A67-44B7-828E-1E951CDAF8A4}"/>
+              </a:ext>
+            </a:extLst>
+          </p:cNvPr>
+          <p:cNvSpPr>
+            <a:spLocks xmlns:a="http://schemas.openxmlformats.org/drawingml/2006/main" noGrp="1"/>
+          </p:cNvSpPr>
+          <p:nvPr/>
+        </p:nvSpPr>
+        <p:spPr>
+          <a:xfrm xmlns:a="http://schemas.openxmlformats.org/drawingml/2006/main">
+            <a:off x="1314450" y="4838700"/>
+            <a:ext cx="12611100" cy="276225"/>
+          </a:xfrm>
+          <a:prstGeom xmlns:a="http://schemas.openxmlformats.org/drawingml/2006/main" prst="rect">
+            <a:avLst/>
+          </a:prstGeom>
+          <a:noFill xmlns:a="http://schemas.openxmlformats.org/drawingml/2006/main"/>
+          <a:ln xmlns:a="http://schemas.openxmlformats.org/drawingml/2006/main" w="0">
+            <a:noFill/>
+            <a:prstDash val="solid"/>
+          </a:ln>
+        </p:spPr>
+        <p:txBody>
+          <a:bodyPr xmlns:a="http://schemas.openxmlformats.org/drawingml/2006/main" wrap="square" lIns="0" tIns="0" rIns="0" bIns="0" anchor="t">
+            <a:normAutofit fontScale="100000"/>
+          </a:bodyPr>
+          <a:lstStyle xmlns:a="http://schemas.openxmlformats.org/drawingml/2006/main"/>
+          <a:p xmlns:a="http://schemas.openxmlformats.org/drawingml/2006/main">
+            <a:pPr algn="l">
+              <a:defRPr sz="1500" b="0">
+                <a:solidFill>
+                  <a:srgbClr val="DCE8F2"/>
+                </a:solidFill>
+                <a:latin typeface="Courier New"/>
+                <a:ea typeface="Courier New"/>
+                <a:cs typeface="Courier New"/>
+              </a:defRPr>
+            </a:pPr>
+            <a:r>
+              <a:rPr sz="1500" b="0">
+                <a:solidFill>
+                  <a:srgbClr val="DCE8F2"/>
+                </a:solidFill>
+                <a:latin typeface="Courier New"/>
+                <a:ea typeface="Courier New"/>
+                <a:cs typeface="Courier New"/>
+              </a:rPr>
+              <a:t>Artifacts</a:t>
+            </a:r>
+          </a:p>
+        </p:txBody>
+      </p:sp>
+      <p:sp>
+        <p:nvSpPr>
+          <p:cNvPr id="15" name="s8-line-12">
+            <a:extLst xmlns:a="http://schemas.openxmlformats.org/drawingml/2006/main">
+              <a:ext uri="{FF2B5EF4-FFF2-40B4-BE49-F238E27FC236}">
+                <a16:creationId xmlns:a16="http://schemas.microsoft.com/office/drawing/2014/main" id="{5A1138DA-024C-4680-A177-8CD9A45ABD9D}"/>
+              </a:ext>
+            </a:extLst>
+          </p:cNvPr>
+          <p:cNvSpPr>
+            <a:spLocks xmlns:a="http://schemas.openxmlformats.org/drawingml/2006/main" noGrp="1"/>
+          </p:cNvSpPr>
+          <p:nvPr/>
+        </p:nvSpPr>
+        <p:spPr>
+          <a:xfrm xmlns:a="http://schemas.openxmlformats.org/drawingml/2006/main">
+            <a:off x="1314450" y="5114925"/>
+            <a:ext cx="12611100" cy="276225"/>
+          </a:xfrm>
+          <a:prstGeom xmlns:a="http://schemas.openxmlformats.org/drawingml/2006/main" prst="rect">
+            <a:avLst/>
+          </a:prstGeom>
+          <a:noFill xmlns:a="http://schemas.openxmlformats.org/drawingml/2006/main"/>
+          <a:ln xmlns:a="http://schemas.openxmlformats.org/drawingml/2006/main" w="0">
+            <a:noFill/>
+            <a:prstDash val="solid"/>
+          </a:ln>
+        </p:spPr>
+        <p:txBody>
+          <a:bodyPr xmlns:a="http://schemas.openxmlformats.org/drawingml/2006/main" wrap="square" lIns="0" tIns="0" rIns="0" bIns="0" anchor="t">
+            <a:normAutofit fontScale="100000"/>
+          </a:bodyPr>
+          <a:lstStyle xmlns:a="http://schemas.openxmlformats.org/drawingml/2006/main"/>
+          <a:p xmlns:a="http://schemas.openxmlformats.org/drawingml/2006/main">
+            <a:pPr algn="l">
+              <a:defRPr sz="1500" b="0">
+                <a:solidFill>
+                  <a:srgbClr val="DCE8F2"/>
+                </a:solidFill>
+                <a:latin typeface="Courier New"/>
+                <a:ea typeface="Courier New"/>
+                <a:cs typeface="Courier New"/>
+              </a:defRPr>
+            </a:pPr>
+            <a:r>
+              <a:rPr sz="1500" b="0">
+                <a:solidFill>
+                  <a:srgbClr val="DCE8F2"/>
+                </a:solidFill>
+                <a:latin typeface="Courier New"/>
+                <a:ea typeface="Courier New"/>
+                <a:cs typeface="Courier New"/>
+              </a:rPr>
+              <a:t>  outputs/alert.json</a:t>
+            </a:r>
+          </a:p>
+        </p:txBody>
+      </p:sp>
+      <p:sp>
+        <p:nvSpPr>
+          <p:cNvPr id="16" name="s8-line-13">
+            <a:extLst xmlns:a="http://schemas.openxmlformats.org/drawingml/2006/main">
+              <a:ext uri="{FF2B5EF4-FFF2-40B4-BE49-F238E27FC236}">
+                <a16:creationId xmlns:a16="http://schemas.microsoft.com/office/drawing/2014/main" id="{A7C3A832-1CD3-4DE6-9F26-D706EDBBD105}"/>
+              </a:ext>
+            </a:extLst>
+          </p:cNvPr>
+          <p:cNvSpPr>
+            <a:spLocks xmlns:a="http://schemas.openxmlformats.org/drawingml/2006/main" noGrp="1"/>
+          </p:cNvSpPr>
+          <p:nvPr/>
+        </p:nvSpPr>
+        <p:spPr>
+          <a:xfrm xmlns:a="http://schemas.openxmlformats.org/drawingml/2006/main">
+            <a:off x="1314450" y="5391150"/>
+            <a:ext cx="12611100" cy="276225"/>
+          </a:xfrm>
+          <a:prstGeom xmlns:a="http://schemas.openxmlformats.org/drawingml/2006/main" prst="rect">
+            <a:avLst/>
+          </a:prstGeom>
+          <a:noFill xmlns:a="http://schemas.openxmlformats.org/drawingml/2006/main"/>
+          <a:ln xmlns:a="http://schemas.openxmlformats.org/drawingml/2006/main" w="0">
+            <a:noFill/>
+            <a:prstDash val="solid"/>
+          </a:ln>
+        </p:spPr>
+        <p:txBody>
+          <a:bodyPr xmlns:a="http://schemas.openxmlformats.org/drawingml/2006/main" wrap="square" lIns="0" tIns="0" rIns="0" bIns="0" anchor="t">
+            <a:normAutofit fontScale="100000"/>
+          </a:bodyPr>
+          <a:lstStyle xmlns:a="http://schemas.openxmlformats.org/drawingml/2006/main"/>
+          <a:p xmlns:a="http://schemas.openxmlformats.org/drawingml/2006/main">
+            <a:pPr algn="l">
+              <a:defRPr sz="1500" b="0">
+                <a:solidFill>
+                  <a:srgbClr val="DCE8F2"/>
+                </a:solidFill>
+                <a:latin typeface="Courier New"/>
+                <a:ea typeface="Courier New"/>
+                <a:cs typeface="Courier New"/>
+              </a:defRPr>
+            </a:pPr>
+            <a:r>
+              <a:rPr sz="1500" b="0">
+                <a:solidFill>
+                  <a:srgbClr val="DCE8F2"/>
+                </a:solidFill>
+                <a:latin typeface="Courier New"/>
+                <a:ea typeface="Courier New"/>
+                <a:cs typeface="Courier New"/>
+              </a:rPr>
+              <a:t>  outputs/metrics.csv</a:t>
+            </a:r>
+          </a:p>
+        </p:txBody>
+      </p:sp>
+      <p:sp>
+        <p:nvSpPr>
+          <p:cNvPr id="17" name="s8-line-14">
+            <a:extLst xmlns:a="http://schemas.openxmlformats.org/drawingml/2006/main">
+              <a:ext uri="{FF2B5EF4-FFF2-40B4-BE49-F238E27FC236}">
+                <a16:creationId xmlns:a16="http://schemas.microsoft.com/office/drawing/2014/main" id="{784B9BB5-B936-4A05-B51B-3226B46610D4}"/>
+              </a:ext>
+            </a:extLst>
+          </p:cNvPr>
+          <p:cNvSpPr>
+            <a:spLocks xmlns:a="http://schemas.openxmlformats.org/drawingml/2006/main" noGrp="1"/>
+          </p:cNvSpPr>
+          <p:nvPr/>
+        </p:nvSpPr>
+        <p:spPr>
+          <a:xfrm xmlns:a="http://schemas.openxmlformats.org/drawingml/2006/main">
+            <a:off x="1314450" y="5667375"/>
+            <a:ext cx="12611100" cy="276225"/>
+          </a:xfrm>
+          <a:prstGeom xmlns:a="http://schemas.openxmlformats.org/drawingml/2006/main" prst="rect">
+            <a:avLst/>
+          </a:prstGeom>
+          <a:noFill xmlns:a="http://schemas.openxmlformats.org/drawingml/2006/main"/>
+          <a:ln xmlns:a="http://schemas.openxmlformats.org/drawingml/2006/main" w="0">
+            <a:noFill/>
+            <a:prstDash val="solid"/>
+          </a:ln>
+        </p:spPr>
+        <p:txBody>
+          <a:bodyPr xmlns:a="http://schemas.openxmlformats.org/drawingml/2006/main" wrap="square" lIns="0" tIns="0" rIns="0" bIns="0" anchor="t">
+            <a:normAutofit fontScale="100000"/>
+          </a:bodyPr>
+          <a:lstStyle xmlns:a="http://schemas.openxmlformats.org/drawingml/2006/main"/>
+          <a:p xmlns:a="http://schemas.openxmlformats.org/drawingml/2006/main">
+            <a:pPr algn="l">
+              <a:defRPr sz="1500" b="0">
+                <a:solidFill>
+                  <a:srgbClr val="DCE8F2"/>
+                </a:solidFill>
+                <a:latin typeface="Courier New"/>
+                <a:ea typeface="Courier New"/>
+                <a:cs typeface="Courier New"/>
+              </a:defRPr>
+            </a:pPr>
+            <a:r>
+              <a:rPr sz="1500" b="0">
+                <a:solidFill>
+                  <a:srgbClr val="DCE8F2"/>
+                </a:solidFill>
+                <a:latin typeface="Courier New"/>
+                <a:ea typeface="Courier New"/>
+                <a:cs typeface="Courier New"/>
+              </a:rPr>
+              <a:t>  outputs/briefing.txt</a:t>
+            </a:r>
+          </a:p>
+        </p:txBody>
+      </p:sp>
+      <p:sp>
+        <p:nvSpPr>
+          <p:cNvPr id="18" name="s8-line-15">
+            <a:extLst xmlns:a="http://schemas.openxmlformats.org/drawingml/2006/main">
+              <a:ext uri="{FF2B5EF4-FFF2-40B4-BE49-F238E27FC236}">
+                <a16:creationId xmlns:a16="http://schemas.microsoft.com/office/drawing/2014/main" id="{B95C72DD-8A47-4C73-82D9-B6F2DA2F8137}"/>
+              </a:ext>
+            </a:extLst>
+          </p:cNvPr>
+          <p:cNvSpPr>
+            <a:spLocks xmlns:a="http://schemas.openxmlformats.org/drawingml/2006/main" noGrp="1"/>
+          </p:cNvSpPr>
+          <p:nvPr/>
+        </p:nvSpPr>
+        <p:spPr>
+          <a:xfrm xmlns:a="http://schemas.openxmlformats.org/drawingml/2006/main">
+            <a:off x="1314450" y="5943600"/>
+            <a:ext cx="12611100" cy="276225"/>
+          </a:xfrm>
+          <a:prstGeom xmlns:a="http://schemas.openxmlformats.org/drawingml/2006/main" prst="rect">
+            <a:avLst/>
+          </a:prstGeom>
+          <a:noFill xmlns:a="http://schemas.openxmlformats.org/drawingml/2006/main"/>
+          <a:ln xmlns:a="http://schemas.openxmlformats.org/drawingml/2006/main" w="0">
+            <a:noFill/>
+            <a:prstDash val="solid"/>
+          </a:ln>
+        </p:spPr>
+        <p:txBody>
+          <a:bodyPr xmlns:a="http://schemas.openxmlformats.org/drawingml/2006/main" wrap="square" lIns="0" tIns="0" rIns="0" bIns="0" anchor="t">
+            <a:normAutofit fontScale="100000"/>
+          </a:bodyPr>
+          <a:lstStyle xmlns:a="http://schemas.openxmlformats.org/drawingml/2006/main"/>
+          <a:p xmlns:a="http://schemas.openxmlformats.org/drawingml/2006/main">
+            <a:pPr algn="l">
+              <a:defRPr sz="1500" b="0">
+                <a:solidFill>
+                  <a:srgbClr val="DCE8F2"/>
+                </a:solidFill>
+                <a:latin typeface="Courier New"/>
+                <a:ea typeface="Courier New"/>
+                <a:cs typeface="Courier New"/>
+              </a:defRPr>
+            </a:pPr>
+            <a:r>
+              <a:rPr sz="1500" b="0">
+                <a:solidFill>
+                  <a:srgbClr val="DCE8F2"/>
+                </a:solidFill>
+                <a:latin typeface="Courier New"/>
+                <a:ea typeface="Courier New"/>
+                <a:cs typeface="Courier New"/>
+              </a:rPr>
+              <a:t>  evaluation/evaluation.json</a:t>
+            </a:r>
+          </a:p>
+        </p:txBody>
+      </p:sp>
+      <p:sp>
+        <p:nvSpPr>
+          <p:cNvPr id="19" name="footer-8-label">
+            <a:extLst xmlns:a="http://schemas.openxmlformats.org/drawingml/2006/main">
+              <a:ext uri="{FF2B5EF4-FFF2-40B4-BE49-F238E27FC236}">
+                <a16:creationId xmlns:a16="http://schemas.microsoft.com/office/drawing/2014/main" id="{8E93D845-A7D6-4069-B7B0-25C3C6AF451E}"/>
+              </a:ext>
+            </a:extLst>
+          </p:cNvPr>
+          <p:cNvSpPr>
+            <a:spLocks xmlns:a="http://schemas.openxmlformats.org/drawingml/2006/main" noGrp="1"/>
+          </p:cNvSpPr>
+          <p:nvPr/>
+        </p:nvSpPr>
+        <p:spPr>
+          <a:xfrm xmlns:a="http://schemas.openxmlformats.org/drawingml/2006/main">
+            <a:off x="933450" y="8191500"/>
+            <a:ext cx="11906250" cy="209550"/>
+          </a:xfrm>
+          <a:prstGeom xmlns:a="http://schemas.openxmlformats.org/drawingml/2006/main" prst="rect">
+            <a:avLst/>
+          </a:prstGeom>
+          <a:noFill xmlns:a="http://schemas.openxmlformats.org/drawingml/2006/main"/>
+          <a:ln xmlns:a="http://schemas.openxmlformats.org/drawingml/2006/main" w="0">
+            <a:noFill/>
+            <a:prstDash val="solid"/>
+          </a:ln>
+        </p:spPr>
+        <p:txBody>
+          <a:bodyPr xmlns:a="http://schemas.openxmlformats.org/drawingml/2006/main" wrap="square" lIns="0" tIns="0" rIns="0" bIns="0" anchor="t">
+            <a:normAutofit fontScale="100000"/>
+          </a:bodyPr>
+          <a:lstStyle xmlns:a="http://schemas.openxmlformats.org/drawingml/2006/main"/>
+          <a:p xmlns:a="http://schemas.openxmlformats.org/drawingml/2006/main">
+            <a:pPr algn="l">
+              <a:defRPr sz="1125" b="0">
+                <a:solidFill>
+                  <a:srgbClr val="8894A0"/>
+                </a:solidFill>
+                <a:latin typeface="Arial"/>
+                <a:ea typeface="Arial"/>
+                <a:cs typeface="Arial"/>
+              </a:defRPr>
+            </a:pPr>
+            <a:r>
+              <a:rPr sz="1125" b="0">
+                <a:solidFill>
+                  <a:srgbClr val="8894A0"/>
+                </a:solidFill>
+                <a:latin typeface="Arial"/>
+                <a:ea typeface="Arial"/>
+                <a:cs typeface="Arial"/>
+              </a:rPr>
+              <a:t>Docker, Wi-Fi, NOAA, or OpenAI failure does not change the story</a:t>
+            </a:r>
+          </a:p>
+        </p:txBody>
+      </p:sp>
+      <p:sp>
+        <p:nvSpPr>
+          <p:cNvPr id="20" name="footer-8-number">
+            <a:extLst xmlns:a="http://schemas.openxmlformats.org/drawingml/2006/main">
+              <a:ext uri="{FF2B5EF4-FFF2-40B4-BE49-F238E27FC236}">
+                <a16:creationId xmlns:a16="http://schemas.microsoft.com/office/drawing/2014/main" id="{7D80C56A-31E9-4EBE-B653-8F8A3845BC0F}"/>
+              </a:ext>
+            </a:extLst>
+          </p:cNvPr>
+          <p:cNvSpPr>
+            <a:spLocks xmlns:a="http://schemas.openxmlformats.org/drawingml/2006/main" noGrp="1"/>
+          </p:cNvSpPr>
+          <p:nvPr/>
+        </p:nvSpPr>
+        <p:spPr>
+          <a:xfrm xmlns:a="http://schemas.openxmlformats.org/drawingml/2006/main">
+            <a:off x="13811250" y="8191500"/>
+            <a:ext cx="495300" cy="209550"/>
+          </a:xfrm>
+          <a:prstGeom xmlns:a="http://schemas.openxmlformats.org/drawingml/2006/main" prst="rect">
+            <a:avLst/>
+          </a:prstGeom>
+          <a:noFill xmlns:a="http://schemas.openxmlformats.org/drawingml/2006/main"/>
+          <a:ln xmlns:a="http://schemas.openxmlformats.org/drawingml/2006/main" w="0">
+            <a:noFill/>
+            <a:prstDash val="solid"/>
+          </a:ln>
+        </p:spPr>
+        <p:txBody>
+          <a:bodyPr xmlns:a="http://schemas.openxmlformats.org/drawingml/2006/main" wrap="square" lIns="0" tIns="0" rIns="0" bIns="0" anchor="t">
+            <a:normAutofit fontScale="100000"/>
+          </a:bodyPr>
+          <a:lstStyle xmlns:a="http://schemas.openxmlformats.org/drawingml/2006/main"/>
+          <a:p xmlns:a="http://schemas.openxmlformats.org/drawingml/2006/main">
+            <a:pPr algn="r">
+              <a:defRPr sz="1125" b="0">
+                <a:solidFill>
+                  <a:srgbClr val="8894A0"/>
+                </a:solidFill>
+                <a:latin typeface="Arial"/>
+                <a:ea typeface="Arial"/>
+                <a:cs typeface="Arial"/>
+              </a:defRPr>
+            </a:pPr>
+            <a:r>
+              <a:rPr sz="1125" b="0">
+                <a:solidFill>
+                  <a:srgbClr val="8894A0"/>
+                </a:solidFill>
+                <a:latin typeface="Arial"/>
+                <a:ea typeface="Arial"/>
+                <a:cs typeface="Arial"/>
+              </a:rPr>
+              <a:t>8</a:t>
+            </a:r>
+          </a:p>
+        </p:txBody>
+      </p:sp>
     </p:spTree>
     <p:extLst>
       <p:ext uri="{BB962C8B-B14F-4D97-AF65-F5344CB8AC3E}">
-        <p14:creationId xmlns:p14="http://schemas.microsoft.com/office/powerpoint/2010/main" val="1885585457"/>
+        <p14:creationId xmlns:p14="http://schemas.microsoft.com/office/powerpoint/2010/main" val="1128719898"/>
       </p:ext>
     </p:extLst>
   </p:cSld>
